--- a/deliverable/中期答辩_H_nature风.pptx
+++ b/deliverable/中期答辩_H_nature风.pptx
@@ -517,7 +517,7 @@
           <a:lstStyle/>
           <a:p>
             <a:r>
-              <a:t>各位老师好，我汇报的题目是《基于深度学习的阿尔茨海默症患者与健康人群肠道微生物组中抗菌肽的差异性研究》。本次中期检查按导师意见，重点说明研究思路，以及每一项工作完成到哪一步。</a:t>
+              <a:t>各位老师好，我汇报的题目是《基于深度学习的阿尔茨海默症患者与健康人群肠道微生物组中抗菌肽的差异性研究》。本次中期检查重点说明研究思路，以及每一项工作完成到哪一步。</a:t>
             </a:r>
           </a:p>
         </p:txBody>

--- a/deliverable/中期答辩_H_nature风.pptx
+++ b/deliverable/中期答辩_H_nature风.pptx
@@ -21,6 +21,10 @@
     <p:sldId id="269" r:id="rId21"/>
     <p:sldId id="270" r:id="rId22"/>
     <p:sldId id="271" r:id="rId23"/>
+    <p:sldId id="272" r:id="rId24"/>
+    <p:sldId id="273" r:id="rId25"/>
+    <p:sldId id="274" r:id="rId26"/>
+    <p:sldId id="275" r:id="rId27"/>
   </p:sldIdLst>
   <p:sldSz cx="12191695" cy="6858000" type="screen4x3"/>
   <p:notesSz cx="6858000" cy="9144000"/>
@@ -1032,6 +1036,216 @@
 </p:notes>
 </file>
 
+<file path=ppt/notesSlides/notesSlide17.xml><?xml version="1.0" encoding="utf-8"?>
+<p:notes xmlns:a="http://schemas.openxmlformats.org/drawingml/2006/main" xmlns:p="http://schemas.openxmlformats.org/presentationml/2006/main" xmlns:r="http://schemas.openxmlformats.org/officeDocument/2006/relationships">
+  <p:cSld>
+    <p:spTree>
+      <p:nvGrpSpPr>
+        <p:cNvPr id="1" name=""/>
+        <p:cNvGrpSpPr/>
+        <p:nvPr/>
+      </p:nvGrpSpPr>
+      <p:grpSpPr>
+        <a:xfrm>
+          <a:off x="0" y="0"/>
+          <a:ext cx="0" cy="0"/>
+          <a:chOff x="0" y="0"/>
+          <a:chExt cx="0" cy="0"/>
+        </a:xfrm>
+      </p:grpSpPr>
+      <p:sp>
+        <p:nvSpPr>
+          <p:cNvPr id="2" name="Slide Image Placeholder 1"/>
+          <p:cNvSpPr>
+            <a:spLocks noGrp="1"/>
+          </p:cNvSpPr>
+          <p:nvPr>
+            <p:ph type="sldImg" idx="2"/>
+          </p:nvPr>
+        </p:nvSpPr>
+        <p:spPr/>
+      </p:sp>
+      <p:sp>
+        <p:nvSpPr>
+          <p:cNvPr id="3" name="Notes Placeholder 2"/>
+          <p:cNvSpPr>
+            <a:spLocks noGrp="1"/>
+          </p:cNvSpPr>
+          <p:nvPr>
+            <p:ph type="body" idx="3" sz="quarter"/>
+          </p:nvPr>
+        </p:nvSpPr>
+        <p:spPr/>
+        <p:txBody>
+          <a:bodyPr/>
+          <a:lstStyle/>
+          <a:p>
+            <a:r>
+              <a:t>这张图把抗菌肽与 AD 的关联拆成七环，并标出每一环的证据强度：蓝色是已有实验或临床证据，绿色是计算方法能给出候选与优先序的部分，橙色是本课题要回答或需要验证的部分。这样讲的好处是：老师问任何一环，都能说清这一环目前的证据到什么程度。</a:t>
+            </a:r>
+          </a:p>
+        </p:txBody>
+      </p:sp>
+      <p:sp>
+        <p:nvSpPr>
+          <p:cNvPr id="4" name="Slide Number Placeholder 3"/>
+          <p:cNvSpPr>
+            <a:spLocks noGrp="1"/>
+          </p:cNvSpPr>
+          <p:nvPr>
+            <p:ph type="sldNum" idx="5" sz="quarter"/>
+          </p:nvPr>
+        </p:nvSpPr>
+        <p:spPr/>
+      </p:sp>
+    </p:spTree>
+  </p:cSld>
+  <p:clrMapOvr>
+    <a:masterClrMapping/>
+  </p:clrMapOvr>
+</p:notes>
+</file>
+
+<file path=ppt/notesSlides/notesSlide18.xml><?xml version="1.0" encoding="utf-8"?>
+<p:notes xmlns:a="http://schemas.openxmlformats.org/drawingml/2006/main" xmlns:p="http://schemas.openxmlformats.org/presentationml/2006/main" xmlns:r="http://schemas.openxmlformats.org/officeDocument/2006/relationships">
+  <p:cSld>
+    <p:spTree>
+      <p:nvGrpSpPr>
+        <p:cNvPr id="1" name=""/>
+        <p:cNvGrpSpPr/>
+        <p:nvPr/>
+      </p:nvGrpSpPr>
+      <p:grpSpPr>
+        <a:xfrm>
+          <a:off x="0" y="0"/>
+          <a:ext cx="0" cy="0"/>
+          <a:chOff x="0" y="0"/>
+          <a:chExt cx="0" cy="0"/>
+        </a:xfrm>
+      </p:grpSpPr>
+      <p:sp>
+        <p:nvSpPr>
+          <p:cNvPr id="2" name="Slide Image Placeholder 1"/>
+          <p:cNvSpPr>
+            <a:spLocks noGrp="1"/>
+          </p:cNvSpPr>
+          <p:nvPr>
+            <p:ph type="sldImg" idx="2"/>
+          </p:nvPr>
+        </p:nvSpPr>
+        <p:spPr/>
+      </p:sp>
+      <p:sp>
+        <p:nvSpPr>
+          <p:cNvPr id="3" name="Notes Placeholder 2"/>
+          <p:cNvSpPr>
+            <a:spLocks noGrp="1"/>
+          </p:cNvSpPr>
+          <p:nvPr>
+            <p:ph type="body" idx="3" sz="quarter"/>
+          </p:nvPr>
+        </p:nvSpPr>
+        <p:spPr/>
+        <p:txBody>
+          <a:bodyPr/>
+          <a:lstStyle/>
+          <a:p>
+            <a:r>
+              <a:t>为什么 AD 患者体内的抗菌肽更多？因为存在一个正反馈：菌群失衡与肠屏障通透性增加使内毒素和病原体长期刺激宿主，经 TLR4 与 NF-κB 通路升高促炎因子，而促炎因子又上调 Aβ 与抗菌肽的生成；Aβ 与抗菌肽聚集后激活小胶质细胞，产生更多炎症介质，循环自我加强。这也是抗菌保护假说的现代表述：一项有益的先天免疫反应，在长期失衡后被放大成病理过程。</a:t>
+            </a:r>
+          </a:p>
+        </p:txBody>
+      </p:sp>
+      <p:sp>
+        <p:nvSpPr>
+          <p:cNvPr id="4" name="Slide Number Placeholder 3"/>
+          <p:cNvSpPr>
+            <a:spLocks noGrp="1"/>
+          </p:cNvSpPr>
+          <p:nvPr>
+            <p:ph type="sldNum" idx="5" sz="quarter"/>
+          </p:nvPr>
+        </p:nvSpPr>
+        <p:spPr/>
+      </p:sp>
+    </p:spTree>
+  </p:cSld>
+  <p:clrMapOvr>
+    <a:masterClrMapping/>
+  </p:clrMapOvr>
+</p:notes>
+</file>
+
+<file path=ppt/notesSlides/notesSlide19.xml><?xml version="1.0" encoding="utf-8"?>
+<p:notes xmlns:a="http://schemas.openxmlformats.org/drawingml/2006/main" xmlns:p="http://schemas.openxmlformats.org/presentationml/2006/main" xmlns:r="http://schemas.openxmlformats.org/officeDocument/2006/relationships">
+  <p:cSld>
+    <p:spTree>
+      <p:nvGrpSpPr>
+        <p:cNvPr id="1" name=""/>
+        <p:cNvGrpSpPr/>
+        <p:nvPr/>
+      </p:nvGrpSpPr>
+      <p:grpSpPr>
+        <a:xfrm>
+          <a:off x="0" y="0"/>
+          <a:ext cx="0" cy="0"/>
+          <a:chOff x="0" y="0"/>
+          <a:chExt cx="0" cy="0"/>
+        </a:xfrm>
+      </p:grpSpPr>
+      <p:sp>
+        <p:nvSpPr>
+          <p:cNvPr id="2" name="Slide Image Placeholder 1"/>
+          <p:cNvSpPr>
+            <a:spLocks noGrp="1"/>
+          </p:cNvSpPr>
+          <p:nvPr>
+            <p:ph type="sldImg" idx="2"/>
+          </p:nvPr>
+        </p:nvSpPr>
+        <p:spPr/>
+      </p:sp>
+      <p:sp>
+        <p:nvSpPr>
+          <p:cNvPr id="3" name="Notes Placeholder 2"/>
+          <p:cNvSpPr>
+            <a:spLocks noGrp="1"/>
+          </p:cNvSpPr>
+          <p:nvPr>
+            <p:ph type="body" idx="3" sz="quarter"/>
+          </p:nvPr>
+        </p:nvSpPr>
+        <p:spPr/>
+        <p:txBody>
+          <a:bodyPr/>
+          <a:lstStyle/>
+          <a:p>
+            <a:r>
+              <a:t>机制落点参照 AChE–Aβ 复合物的分子动力学研究：Aβ 对接进外周阴离子位点 PAS 后，复合物在 1 微秒模拟中保持稳定，主要停留区为 344–361 区段，该区段紧邻 PAS 但不受双位点抑制剂的位阻。由此提出三个可检验假设：H1 竞争 PAS 减少成核、H2 直接结合 Aβ 改变聚集路径、H3 在膜水平影响小胶质识别。我们用对接与动力学给出优先序，再用抑菌与酶活实验验证。</a:t>
+            </a:r>
+          </a:p>
+        </p:txBody>
+      </p:sp>
+      <p:sp>
+        <p:nvSpPr>
+          <p:cNvPr id="4" name="Slide Number Placeholder 3"/>
+          <p:cNvSpPr>
+            <a:spLocks noGrp="1"/>
+          </p:cNvSpPr>
+          <p:nvPr>
+            <p:ph type="sldNum" idx="5" sz="quarter"/>
+          </p:nvPr>
+        </p:nvSpPr>
+        <p:spPr/>
+      </p:sp>
+    </p:spTree>
+  </p:cSld>
+  <p:clrMapOvr>
+    <a:masterClrMapping/>
+  </p:clrMapOvr>
+</p:notes>
+</file>
+
 <file path=ppt/notesSlides/notesSlide2.xml><?xml version="1.0" encoding="utf-8"?>
 <p:notes xmlns:a="http://schemas.openxmlformats.org/drawingml/2006/main" xmlns:p="http://schemas.openxmlformats.org/presentationml/2006/main" xmlns:r="http://schemas.openxmlformats.org/officeDocument/2006/relationships">
   <p:cSld>
@@ -1078,6 +1292,76 @@
           <a:p>
             <a:r>
               <a:t>研究背景分三点：AD 与肠道微生物组的关系已有较多证据；微生物基因组编码的抗菌肽是可能的效应分子；现有研究缺少面向 AD 人群并按认知阶段分层的分析。由此提出本次研究的切入点。</a:t>
+            </a:r>
+          </a:p>
+        </p:txBody>
+      </p:sp>
+      <p:sp>
+        <p:nvSpPr>
+          <p:cNvPr id="4" name="Slide Number Placeholder 3"/>
+          <p:cNvSpPr>
+            <a:spLocks noGrp="1"/>
+          </p:cNvSpPr>
+          <p:nvPr>
+            <p:ph type="sldNum" idx="5" sz="quarter"/>
+          </p:nvPr>
+        </p:nvSpPr>
+        <p:spPr/>
+      </p:sp>
+    </p:spTree>
+  </p:cSld>
+  <p:clrMapOvr>
+    <a:masterClrMapping/>
+  </p:clrMapOvr>
+</p:notes>
+</file>
+
+<file path=ppt/notesSlides/notesSlide20.xml><?xml version="1.0" encoding="utf-8"?>
+<p:notes xmlns:a="http://schemas.openxmlformats.org/drawingml/2006/main" xmlns:p="http://schemas.openxmlformats.org/presentationml/2006/main" xmlns:r="http://schemas.openxmlformats.org/officeDocument/2006/relationships">
+  <p:cSld>
+    <p:spTree>
+      <p:nvGrpSpPr>
+        <p:cNvPr id="1" name=""/>
+        <p:cNvGrpSpPr/>
+        <p:nvPr/>
+      </p:nvGrpSpPr>
+      <p:grpSpPr>
+        <a:xfrm>
+          <a:off x="0" y="0"/>
+          <a:ext cx="0" cy="0"/>
+          <a:chOff x="0" y="0"/>
+          <a:chExt cx="0" cy="0"/>
+        </a:xfrm>
+      </p:grpSpPr>
+      <p:sp>
+        <p:nvSpPr>
+          <p:cNvPr id="2" name="Slide Image Placeholder 1"/>
+          <p:cNvSpPr>
+            <a:spLocks noGrp="1"/>
+          </p:cNvSpPr>
+          <p:nvPr>
+            <p:ph type="sldImg" idx="2"/>
+          </p:nvPr>
+        </p:nvSpPr>
+        <p:spPr/>
+      </p:sp>
+      <p:sp>
+        <p:nvSpPr>
+          <p:cNvPr id="3" name="Notes Placeholder 2"/>
+          <p:cNvSpPr>
+            <a:spLocks noGrp="1"/>
+          </p:cNvSpPr>
+          <p:nvPr>
+            <p:ph type="body" idx="3" sz="quarter"/>
+          </p:nvPr>
+        </p:nvSpPr>
+        <p:spPr/>
+        <p:txBody>
+          <a:bodyPr/>
+          <a:lstStyle/>
+          <a:p>
+            <a:r>
+              <a:t>这张表说明每一环的证据强度，以及本课题要补的是哪一块：宿主来源抗菌肽、Aβ 的抗菌活性、AChE 经 PAS 促进聚集，这些已有较强证据；微生物源抗菌肽在 AD 患者中增多、以及候选肽经 AChE–Aβ 界面影响成核，是本课题要回答的问题。这样既讲清了关联，也没有夸大因果。</a:t>
             </a:r>
           </a:p>
         </p:txBody>
@@ -5034,7 +5318,7 @@
                 <a:ea typeface="微软雅黑"/>
                 <a:cs typeface="Arial"/>
               </a:rPr>
-              <a:t>1 / 16</a:t>
+              <a:t>1 / 20</a:t>
             </a:r>
           </a:p>
         </p:txBody>
@@ -5399,7 +5683,7 @@
                 <a:ea typeface="微软雅黑"/>
                 <a:cs typeface="Arial"/>
               </a:rPr>
-              <a:t>10 / 16</a:t>
+              <a:t>10 / 20</a:t>
             </a:r>
           </a:p>
         </p:txBody>
@@ -5720,7 +6004,7 @@
                 <a:ea typeface="微软雅黑"/>
                 <a:cs typeface="Arial"/>
               </a:rPr>
-              <a:t>11 / 16</a:t>
+              <a:t>11 / 20</a:t>
             </a:r>
           </a:p>
         </p:txBody>
@@ -6532,7 +6816,7 @@
                 <a:ea typeface="微软雅黑"/>
                 <a:cs typeface="Arial"/>
               </a:rPr>
-              <a:t>12 / 16</a:t>
+              <a:t>12 / 20</a:t>
             </a:r>
           </a:p>
         </p:txBody>
@@ -7177,7 +7461,7 @@
                 <a:ea typeface="微软雅黑"/>
                 <a:cs typeface="Arial"/>
               </a:rPr>
-              <a:t>13 / 16</a:t>
+              <a:t>13 / 20</a:t>
             </a:r>
           </a:p>
         </p:txBody>
@@ -7475,7 +7759,7 @@
                 <a:ea typeface="微软雅黑"/>
                 <a:cs typeface="Arial"/>
               </a:rPr>
-              <a:t>14 / 16</a:t>
+              <a:t>14 / 20</a:t>
             </a:r>
           </a:p>
         </p:txBody>
@@ -7773,7 +8057,7 @@
                 <a:ea typeface="微软雅黑"/>
                 <a:cs typeface="Arial"/>
               </a:rPr>
-              <a:t>15 / 16</a:t>
+              <a:t>15 / 20</a:t>
             </a:r>
           </a:p>
         </p:txBody>
@@ -8162,7 +8446,1111 @@
                 <a:ea typeface="微软雅黑"/>
                 <a:cs typeface="Arial"/>
               </a:rPr>
-              <a:t>16 / 16</a:t>
+              <a:t>16 / 20</a:t>
+            </a:r>
+          </a:p>
+        </p:txBody>
+      </p:sp>
+    </p:spTree>
+  </p:cSld>
+  <p:clrMapOvr>
+    <a:masterClrMapping/>
+  </p:clrMapOvr>
+</p:sld>
+</file>
+
+<file path=ppt/slides/slide17.xml><?xml version="1.0" encoding="utf-8"?>
+<p:sld xmlns:a="http://schemas.openxmlformats.org/drawingml/2006/main" xmlns:p="http://schemas.openxmlformats.org/presentationml/2006/main" xmlns:r="http://schemas.openxmlformats.org/officeDocument/2006/relationships">
+  <p:cSld>
+    <p:spTree>
+      <p:nvGrpSpPr>
+        <p:cNvPr id="1" name=""/>
+        <p:cNvGrpSpPr/>
+        <p:nvPr/>
+      </p:nvGrpSpPr>
+      <p:grpSpPr/>
+      <p:sp>
+        <p:nvSpPr>
+          <p:cNvPr id="2" name="TextBox 1"/>
+          <p:cNvSpPr txBox="1"/>
+          <p:nvPr/>
+        </p:nvSpPr>
+        <p:spPr>
+          <a:xfrm>
+            <a:off x="640080" y="365760"/>
+            <a:ext cx="10908792" cy="548640"/>
+          </a:xfrm>
+          <a:prstGeom prst="rect">
+            <a:avLst/>
+          </a:prstGeom>
+          <a:noFill/>
+        </p:spPr>
+        <p:txBody>
+          <a:bodyPr wrap="square" anchor="t" lIns="27432" rIns="27432" tIns="0" bIns="0">
+            <a:spAutoFit/>
+          </a:bodyPr>
+          <a:lstStyle/>
+          <a:p>
+            <a:pPr algn="l">
+              <a:lnSpc>
+                <a:spcPct val="100000"/>
+              </a:lnSpc>
+              <a:spcBef>
+                <a:spcPts val="0"/>
+              </a:spcBef>
+              <a:spcAft>
+                <a:spcPts val="0"/>
+              </a:spcAft>
+            </a:pPr>
+            <a:r>
+              <a:rPr sz="2500" b="1">
+                <a:solidFill>
+                  <a:srgbClr val="111111"/>
+                </a:solidFill>
+                <a:latin typeface="Arial"/>
+                <a:ea typeface="微软雅黑"/>
+                <a:cs typeface="Arial"/>
+              </a:rPr>
+              <a:t>抗菌肽与 AD 的关联可以拆成七环，每环的证据强度不同</a:t>
+            </a:r>
+          </a:p>
+        </p:txBody>
+      </p:sp>
+      <p:sp>
+        <p:nvSpPr>
+          <p:cNvPr id="3" name="Rectangle 2"/>
+          <p:cNvSpPr/>
+          <p:nvPr/>
+        </p:nvSpPr>
+        <p:spPr>
+          <a:xfrm>
+            <a:off x="640080" y="969264"/>
+            <a:ext cx="10908792" cy="12700"/>
+          </a:xfrm>
+          <a:prstGeom prst="rect">
+            <a:avLst/>
+          </a:prstGeom>
+          <a:solidFill>
+            <a:srgbClr val="DDDDDA"/>
+          </a:solidFill>
+          <a:ln>
+            <a:noFill/>
+          </a:ln>
+          <a:effectLst/>
+        </p:spPr>
+        <p:style>
+          <a:lnRef idx="1">
+            <a:schemeClr val="accent1"/>
+          </a:lnRef>
+          <a:fillRef idx="3">
+            <a:schemeClr val="accent1"/>
+          </a:fillRef>
+          <a:effectRef idx="2">
+            <a:schemeClr val="accent1"/>
+          </a:effectRef>
+          <a:fontRef idx="minor">
+            <a:schemeClr val="lt1"/>
+          </a:fontRef>
+        </p:style>
+        <p:txBody>
+          <a:bodyPr rtlCol="0" anchor="ctr"/>
+          <a:lstStyle/>
+          <a:p>
+            <a:pPr algn="ctr"/>
+          </a:p>
+        </p:txBody>
+      </p:sp>
+      <p:pic>
+        <p:nvPicPr>
+          <p:cNvPr id="4" name="Picture 3" descr="figM1_关联逻辑链.png"/>
+          <p:cNvPicPr>
+            <a:picLocks noChangeAspect="1"/>
+          </p:cNvPicPr>
+          <p:nvPr/>
+        </p:nvPicPr>
+        <p:blipFill>
+          <a:blip r:embed="rId2"/>
+          <a:stretch>
+            <a:fillRect/>
+          </a:stretch>
+        </p:blipFill>
+        <p:spPr>
+          <a:xfrm>
+            <a:off x="640080" y="1188720"/>
+            <a:ext cx="10073906" cy="4315968"/>
+          </a:xfrm>
+          <a:prstGeom prst="rect">
+            <a:avLst/>
+          </a:prstGeom>
+        </p:spPr>
+      </p:pic>
+      <p:sp>
+        <p:nvSpPr>
+          <p:cNvPr id="5" name="TextBox 4"/>
+          <p:cNvSpPr txBox="1"/>
+          <p:nvPr/>
+        </p:nvSpPr>
+        <p:spPr>
+          <a:xfrm>
+            <a:off x="640080" y="6053328"/>
+            <a:ext cx="10908792" cy="329184"/>
+          </a:xfrm>
+          <a:prstGeom prst="rect">
+            <a:avLst/>
+          </a:prstGeom>
+          <a:noFill/>
+        </p:spPr>
+        <p:txBody>
+          <a:bodyPr wrap="square" anchor="t" lIns="27432" rIns="27432" tIns="0" bIns="0">
+            <a:spAutoFit/>
+          </a:bodyPr>
+          <a:lstStyle/>
+          <a:p>
+            <a:pPr algn="l">
+              <a:lnSpc>
+                <a:spcPct val="100000"/>
+              </a:lnSpc>
+              <a:spcBef>
+                <a:spcPts val="0"/>
+              </a:spcBef>
+              <a:spcAft>
+                <a:spcPts val="0"/>
+              </a:spcAft>
+            </a:pPr>
+            <a:r>
+              <a:rPr sz="1500" b="0">
+                <a:solidFill>
+                  <a:srgbClr val="777777"/>
+                </a:solidFill>
+                <a:latin typeface="Arial"/>
+                <a:ea typeface="微软雅黑"/>
+                <a:cs typeface="Arial"/>
+              </a:rPr>
+              <a:t>图：本项目自制（results/figures）</a:t>
+            </a:r>
+          </a:p>
+        </p:txBody>
+      </p:sp>
+      <p:sp>
+        <p:nvSpPr>
+          <p:cNvPr id="6" name="TextBox 5"/>
+          <p:cNvSpPr txBox="1"/>
+          <p:nvPr/>
+        </p:nvSpPr>
+        <p:spPr>
+          <a:xfrm>
+            <a:off x="640080" y="4626864"/>
+            <a:ext cx="10908792" cy="1280160"/>
+          </a:xfrm>
+          <a:prstGeom prst="rect">
+            <a:avLst/>
+          </a:prstGeom>
+          <a:noFill/>
+        </p:spPr>
+        <p:txBody>
+          <a:bodyPr wrap="square" anchor="t" lIns="27432" rIns="27432" tIns="0" bIns="0">
+            <a:spAutoFit/>
+          </a:bodyPr>
+          <a:lstStyle/>
+          <a:p>
+            <a:pPr algn="l">
+              <a:lnSpc>
+                <a:spcPct val="130000"/>
+              </a:lnSpc>
+              <a:spcBef>
+                <a:spcPts val="0"/>
+              </a:spcBef>
+              <a:spcAft>
+                <a:spcPts val="0"/>
+              </a:spcAft>
+            </a:pPr>
+            <a:r>
+              <a:rPr sz="1700" b="0">
+                <a:solidFill>
+                  <a:srgbClr val="333333"/>
+                </a:solidFill>
+                <a:latin typeface="Arial"/>
+                <a:ea typeface="微软雅黑"/>
+                <a:cs typeface="Arial"/>
+              </a:rPr>
+              <a:t>① AD 与感染相关、② 感染与炎症驱动抗菌肽与 Aβ 生成、③ Aβ 本身即抗菌肽；④ 抗菌活性可计算预测、⑤ AD 组特异抗菌肽随阶段变化、⑥ 双刃剑效应；⑦ 为什么 AD 更多与 AChE–Aβ 机制落点，是本课题要回答的部分。</a:t>
+            </a:r>
+          </a:p>
+        </p:txBody>
+      </p:sp>
+      <p:sp>
+        <p:nvSpPr>
+          <p:cNvPr id="7" name="TextBox 6"/>
+          <p:cNvSpPr txBox="1"/>
+          <p:nvPr/>
+        </p:nvSpPr>
+        <p:spPr>
+          <a:xfrm>
+            <a:off x="640080" y="6419088"/>
+            <a:ext cx="8778240" cy="310896"/>
+          </a:xfrm>
+          <a:prstGeom prst="rect">
+            <a:avLst/>
+          </a:prstGeom>
+          <a:noFill/>
+        </p:spPr>
+        <p:txBody>
+          <a:bodyPr wrap="square" anchor="t" lIns="27432" rIns="27432" tIns="0" bIns="0">
+            <a:spAutoFit/>
+          </a:bodyPr>
+          <a:lstStyle/>
+          <a:p>
+            <a:pPr algn="l">
+              <a:lnSpc>
+                <a:spcPct val="100000"/>
+              </a:lnSpc>
+              <a:spcBef>
+                <a:spcPts val="0"/>
+              </a:spcBef>
+              <a:spcAft>
+                <a:spcPts val="0"/>
+              </a:spcAft>
+            </a:pPr>
+            <a:r>
+              <a:rPr sz="1500" b="0">
+                <a:solidFill>
+                  <a:srgbClr val="777777"/>
+                </a:solidFill>
+                <a:latin typeface="Arial"/>
+                <a:ea typeface="微软雅黑"/>
+                <a:cs typeface="Arial"/>
+              </a:rPr>
+              <a:t>研究生论文中期检查 · 文绍华</a:t>
+            </a:r>
+          </a:p>
+        </p:txBody>
+      </p:sp>
+      <p:sp>
+        <p:nvSpPr>
+          <p:cNvPr id="8" name="TextBox 7"/>
+          <p:cNvSpPr txBox="1"/>
+          <p:nvPr/>
+        </p:nvSpPr>
+        <p:spPr>
+          <a:xfrm>
+            <a:off x="10058400" y="6419088"/>
+            <a:ext cx="1490472" cy="310896"/>
+          </a:xfrm>
+          <a:prstGeom prst="rect">
+            <a:avLst/>
+          </a:prstGeom>
+          <a:noFill/>
+        </p:spPr>
+        <p:txBody>
+          <a:bodyPr wrap="square" anchor="t" lIns="27432" rIns="27432" tIns="0" bIns="0">
+            <a:spAutoFit/>
+          </a:bodyPr>
+          <a:lstStyle/>
+          <a:p>
+            <a:pPr algn="r">
+              <a:lnSpc>
+                <a:spcPct val="100000"/>
+              </a:lnSpc>
+              <a:spcBef>
+                <a:spcPts val="0"/>
+              </a:spcBef>
+              <a:spcAft>
+                <a:spcPts val="0"/>
+              </a:spcAft>
+            </a:pPr>
+            <a:r>
+              <a:rPr sz="1500" b="0">
+                <a:solidFill>
+                  <a:srgbClr val="777777"/>
+                </a:solidFill>
+                <a:latin typeface="Arial"/>
+                <a:ea typeface="微软雅黑"/>
+                <a:cs typeface="Arial"/>
+              </a:rPr>
+              <a:t>17 / 20</a:t>
+            </a:r>
+          </a:p>
+        </p:txBody>
+      </p:sp>
+    </p:spTree>
+  </p:cSld>
+  <p:clrMapOvr>
+    <a:masterClrMapping/>
+  </p:clrMapOvr>
+</p:sld>
+</file>
+
+<file path=ppt/slides/slide18.xml><?xml version="1.0" encoding="utf-8"?>
+<p:sld xmlns:a="http://schemas.openxmlformats.org/drawingml/2006/main" xmlns:p="http://schemas.openxmlformats.org/presentationml/2006/main" xmlns:r="http://schemas.openxmlformats.org/officeDocument/2006/relationships">
+  <p:cSld>
+    <p:spTree>
+      <p:nvGrpSpPr>
+        <p:cNvPr id="1" name=""/>
+        <p:cNvGrpSpPr/>
+        <p:nvPr/>
+      </p:nvGrpSpPr>
+      <p:grpSpPr/>
+      <p:sp>
+        <p:nvSpPr>
+          <p:cNvPr id="2" name="TextBox 1"/>
+          <p:cNvSpPr txBox="1"/>
+          <p:nvPr/>
+        </p:nvSpPr>
+        <p:spPr>
+          <a:xfrm>
+            <a:off x="640080" y="365760"/>
+            <a:ext cx="10908792" cy="548640"/>
+          </a:xfrm>
+          <a:prstGeom prst="rect">
+            <a:avLst/>
+          </a:prstGeom>
+          <a:noFill/>
+        </p:spPr>
+        <p:txBody>
+          <a:bodyPr wrap="square" anchor="t" lIns="27432" rIns="27432" tIns="0" bIns="0">
+            <a:spAutoFit/>
+          </a:bodyPr>
+          <a:lstStyle/>
+          <a:p>
+            <a:pPr algn="l">
+              <a:lnSpc>
+                <a:spcPct val="100000"/>
+              </a:lnSpc>
+              <a:spcBef>
+                <a:spcPts val="0"/>
+              </a:spcBef>
+              <a:spcAft>
+                <a:spcPts val="0"/>
+              </a:spcAft>
+            </a:pPr>
+            <a:r>
+              <a:rPr sz="2600" b="1">
+                <a:solidFill>
+                  <a:srgbClr val="111111"/>
+                </a:solidFill>
+                <a:latin typeface="Arial"/>
+                <a:ea typeface="微软雅黑"/>
+                <a:cs typeface="Arial"/>
+              </a:rPr>
+              <a:t>为什么 AD 更多：炎症—Aβ—抗菌肽构成正反馈</a:t>
+            </a:r>
+          </a:p>
+        </p:txBody>
+      </p:sp>
+      <p:sp>
+        <p:nvSpPr>
+          <p:cNvPr id="3" name="Rectangle 2"/>
+          <p:cNvSpPr/>
+          <p:nvPr/>
+        </p:nvSpPr>
+        <p:spPr>
+          <a:xfrm>
+            <a:off x="640080" y="969264"/>
+            <a:ext cx="10908792" cy="12700"/>
+          </a:xfrm>
+          <a:prstGeom prst="rect">
+            <a:avLst/>
+          </a:prstGeom>
+          <a:solidFill>
+            <a:srgbClr val="DDDDDA"/>
+          </a:solidFill>
+          <a:ln>
+            <a:noFill/>
+          </a:ln>
+          <a:effectLst/>
+        </p:spPr>
+        <p:style>
+          <a:lnRef idx="1">
+            <a:schemeClr val="accent1"/>
+          </a:lnRef>
+          <a:fillRef idx="3">
+            <a:schemeClr val="accent1"/>
+          </a:fillRef>
+          <a:effectRef idx="2">
+            <a:schemeClr val="accent1"/>
+          </a:effectRef>
+          <a:fontRef idx="minor">
+            <a:schemeClr val="lt1"/>
+          </a:fontRef>
+        </p:style>
+        <p:txBody>
+          <a:bodyPr rtlCol="0" anchor="ctr"/>
+          <a:lstStyle/>
+          <a:p>
+            <a:pPr algn="ctr"/>
+          </a:p>
+        </p:txBody>
+      </p:sp>
+      <p:sp>
+        <p:nvSpPr>
+          <p:cNvPr id="4" name="TextBox 3"/>
+          <p:cNvSpPr txBox="1"/>
+          <p:nvPr/>
+        </p:nvSpPr>
+        <p:spPr>
+          <a:xfrm>
+            <a:off x="640080" y="1481328"/>
+            <a:ext cx="7223760" cy="3108960"/>
+          </a:xfrm>
+          <a:prstGeom prst="rect">
+            <a:avLst/>
+          </a:prstGeom>
+          <a:noFill/>
+        </p:spPr>
+        <p:txBody>
+          <a:bodyPr wrap="square" anchor="t" lIns="27432" rIns="27432" tIns="0" bIns="0">
+            <a:spAutoFit/>
+          </a:bodyPr>
+          <a:lstStyle/>
+          <a:p>
+            <a:pPr algn="l">
+              <a:lnSpc>
+                <a:spcPct val="134000"/>
+              </a:lnSpc>
+              <a:spcBef>
+                <a:spcPts val="0"/>
+              </a:spcBef>
+              <a:spcAft>
+                <a:spcPts val="0"/>
+              </a:spcAft>
+            </a:pPr>
+            <a:r>
+              <a:rPr sz="1800" b="0">
+                <a:solidFill>
+                  <a:srgbClr val="333333"/>
+                </a:solidFill>
+                <a:latin typeface="Arial"/>
+                <a:ea typeface="微软雅黑"/>
+                <a:cs typeface="Arial"/>
+              </a:rPr>
+              <a:t>菌群失衡与肠屏障通透性增加，使内毒素与病原体长期刺激宿主；</a:t>
+            </a:r>
+          </a:p>
+          <a:p>
+            <a:pPr algn="l">
+              <a:lnSpc>
+                <a:spcPct val="134000"/>
+              </a:lnSpc>
+              <a:spcBef>
+                <a:spcPts val="1400"/>
+              </a:spcBef>
+              <a:spcAft>
+                <a:spcPts val="0"/>
+              </a:spcAft>
+            </a:pPr>
+            <a:r>
+              <a:rPr sz="1800" b="0">
+                <a:solidFill>
+                  <a:srgbClr val="333333"/>
+                </a:solidFill>
+                <a:latin typeface="Arial"/>
+                <a:ea typeface="微软雅黑"/>
+                <a:cs typeface="Arial"/>
+              </a:rPr>
+              <a:t>经 TLR4/NF-κB 升高促炎因子，促炎因子又上调 Aβ 与抗菌肽的生成；</a:t>
+            </a:r>
+          </a:p>
+          <a:p>
+            <a:pPr algn="l">
+              <a:lnSpc>
+                <a:spcPct val="134000"/>
+              </a:lnSpc>
+              <a:spcBef>
+                <a:spcPts val="1400"/>
+              </a:spcBef>
+              <a:spcAft>
+                <a:spcPts val="0"/>
+              </a:spcAft>
+            </a:pPr>
+            <a:r>
+              <a:rPr sz="1800" b="0">
+                <a:solidFill>
+                  <a:srgbClr val="333333"/>
+                </a:solidFill>
+                <a:latin typeface="Arial"/>
+                <a:ea typeface="微软雅黑"/>
+                <a:cs typeface="Arial"/>
+              </a:rPr>
+              <a:t>Aβ 与抗菌肽聚集、成核并激活小胶质细胞，产生更多炎症介质，循环自我加强。</a:t>
+            </a:r>
+          </a:p>
+        </p:txBody>
+      </p:sp>
+      <p:sp>
+        <p:nvSpPr>
+          <p:cNvPr id="5" name="Rectangle 4"/>
+          <p:cNvSpPr/>
+          <p:nvPr/>
+        </p:nvSpPr>
+        <p:spPr>
+          <a:xfrm>
+            <a:off x="8229600" y="1481328"/>
+            <a:ext cx="12700" cy="3017520"/>
+          </a:xfrm>
+          <a:prstGeom prst="rect">
+            <a:avLst/>
+          </a:prstGeom>
+          <a:solidFill>
+            <a:srgbClr val="DDDDDA"/>
+          </a:solidFill>
+          <a:ln>
+            <a:noFill/>
+          </a:ln>
+          <a:effectLst/>
+        </p:spPr>
+        <p:style>
+          <a:lnRef idx="1">
+            <a:schemeClr val="accent1"/>
+          </a:lnRef>
+          <a:fillRef idx="3">
+            <a:schemeClr val="accent1"/>
+          </a:fillRef>
+          <a:effectRef idx="2">
+            <a:schemeClr val="accent1"/>
+          </a:effectRef>
+          <a:fontRef idx="minor">
+            <a:schemeClr val="lt1"/>
+          </a:fontRef>
+        </p:style>
+        <p:txBody>
+          <a:bodyPr rtlCol="0" anchor="ctr"/>
+          <a:lstStyle/>
+          <a:p>
+            <a:pPr algn="ctr"/>
+          </a:p>
+        </p:txBody>
+      </p:sp>
+      <p:sp>
+        <p:nvSpPr>
+          <p:cNvPr id="6" name="TextBox 5"/>
+          <p:cNvSpPr txBox="1"/>
+          <p:nvPr/>
+        </p:nvSpPr>
+        <p:spPr>
+          <a:xfrm>
+            <a:off x="8549640" y="1481328"/>
+            <a:ext cx="2999232" cy="3108960"/>
+          </a:xfrm>
+          <a:prstGeom prst="rect">
+            <a:avLst/>
+          </a:prstGeom>
+          <a:noFill/>
+        </p:spPr>
+        <p:txBody>
+          <a:bodyPr wrap="square" anchor="t" lIns="27432" rIns="27432" tIns="0" bIns="0">
+            <a:spAutoFit/>
+          </a:bodyPr>
+          <a:lstStyle/>
+          <a:p>
+            <a:pPr algn="l">
+              <a:lnSpc>
+                <a:spcPct val="130000"/>
+              </a:lnSpc>
+              <a:spcBef>
+                <a:spcPts val="0"/>
+              </a:spcBef>
+              <a:spcAft>
+                <a:spcPts val="0"/>
+              </a:spcAft>
+            </a:pPr>
+            <a:r>
+              <a:rPr sz="1600" b="0">
+                <a:solidFill>
+                  <a:srgbClr val="777777"/>
+                </a:solidFill>
+                <a:latin typeface="Arial"/>
+                <a:ea typeface="微软雅黑"/>
+                <a:cs typeface="Arial"/>
+              </a:rPr>
+              <a:t>表述口径：</a:t>
+            </a:r>
+          </a:p>
+          <a:p>
+            <a:pPr algn="l">
+              <a:lnSpc>
+                <a:spcPct val="130000"/>
+              </a:lnSpc>
+              <a:spcBef>
+                <a:spcPts val="1200"/>
+              </a:spcBef>
+              <a:spcAft>
+                <a:spcPts val="0"/>
+              </a:spcAft>
+            </a:pPr>
+            <a:r>
+              <a:rPr sz="1600" b="0">
+                <a:solidFill>
+                  <a:srgbClr val="777777"/>
+                </a:solidFill>
+                <a:latin typeface="Arial"/>
+                <a:ea typeface="微软雅黑"/>
+                <a:cs typeface="Arial"/>
+              </a:rPr>
+              <a:t>抗体外证据为主；</a:t>
+            </a:r>
+          </a:p>
+          <a:p>
+            <a:pPr algn="l">
+              <a:lnSpc>
+                <a:spcPct val="130000"/>
+              </a:lnSpc>
+              <a:spcBef>
+                <a:spcPts val="1200"/>
+              </a:spcBef>
+              <a:spcAft>
+                <a:spcPts val="0"/>
+              </a:spcAft>
+            </a:pPr>
+            <a:r>
+              <a:rPr sz="1600" b="0">
+                <a:solidFill>
+                  <a:srgbClr val="777777"/>
+                </a:solidFill>
+                <a:latin typeface="Arial"/>
+                <a:ea typeface="微软雅黑"/>
+                <a:cs typeface="Arial"/>
+              </a:rPr>
+              <a:t>区分宿主来源与</a:t>
+            </a:r>
+          </a:p>
+          <a:p>
+            <a:pPr algn="l">
+              <a:lnSpc>
+                <a:spcPct val="130000"/>
+              </a:lnSpc>
+              <a:spcBef>
+                <a:spcPts val="1200"/>
+              </a:spcBef>
+              <a:spcAft>
+                <a:spcPts val="0"/>
+              </a:spcAft>
+            </a:pPr>
+            <a:r>
+              <a:rPr sz="1600" b="0">
+                <a:solidFill>
+                  <a:srgbClr val="777777"/>
+                </a:solidFill>
+                <a:latin typeface="Arial"/>
+                <a:ea typeface="微软雅黑"/>
+                <a:cs typeface="Arial"/>
+              </a:rPr>
+              <a:t>微生物来源、局部</a:t>
+            </a:r>
+          </a:p>
+          <a:p>
+            <a:pPr algn="l">
+              <a:lnSpc>
+                <a:spcPct val="130000"/>
+              </a:lnSpc>
+              <a:spcBef>
+                <a:spcPts val="1200"/>
+              </a:spcBef>
+              <a:spcAft>
+                <a:spcPts val="0"/>
+              </a:spcAft>
+            </a:pPr>
+            <a:r>
+              <a:rPr sz="1600" b="0">
+                <a:solidFill>
+                  <a:srgbClr val="777777"/>
+                </a:solidFill>
+                <a:latin typeface="Arial"/>
+                <a:ea typeface="微软雅黑"/>
+                <a:cs typeface="Arial"/>
+              </a:rPr>
+              <a:t>与系统、阶段差异。</a:t>
+            </a:r>
+          </a:p>
+        </p:txBody>
+      </p:sp>
+      <p:sp>
+        <p:nvSpPr>
+          <p:cNvPr id="7" name="TextBox 6"/>
+          <p:cNvSpPr txBox="1"/>
+          <p:nvPr/>
+        </p:nvSpPr>
+        <p:spPr>
+          <a:xfrm>
+            <a:off x="640080" y="6419088"/>
+            <a:ext cx="8778240" cy="310896"/>
+          </a:xfrm>
+          <a:prstGeom prst="rect">
+            <a:avLst/>
+          </a:prstGeom>
+          <a:noFill/>
+        </p:spPr>
+        <p:txBody>
+          <a:bodyPr wrap="square" anchor="t" lIns="27432" rIns="27432" tIns="0" bIns="0">
+            <a:spAutoFit/>
+          </a:bodyPr>
+          <a:lstStyle/>
+          <a:p>
+            <a:pPr algn="l">
+              <a:lnSpc>
+                <a:spcPct val="100000"/>
+              </a:lnSpc>
+              <a:spcBef>
+                <a:spcPts val="0"/>
+              </a:spcBef>
+              <a:spcAft>
+                <a:spcPts val="0"/>
+              </a:spcAft>
+            </a:pPr>
+            <a:r>
+              <a:rPr sz="1500" b="0">
+                <a:solidFill>
+                  <a:srgbClr val="777777"/>
+                </a:solidFill>
+                <a:latin typeface="Arial"/>
+                <a:ea typeface="微软雅黑"/>
+                <a:cs typeface="Arial"/>
+              </a:rPr>
+              <a:t>研究生论文中期检查 · 文绍华</a:t>
+            </a:r>
+          </a:p>
+        </p:txBody>
+      </p:sp>
+      <p:sp>
+        <p:nvSpPr>
+          <p:cNvPr id="8" name="TextBox 7"/>
+          <p:cNvSpPr txBox="1"/>
+          <p:nvPr/>
+        </p:nvSpPr>
+        <p:spPr>
+          <a:xfrm>
+            <a:off x="10058400" y="6419088"/>
+            <a:ext cx="1490472" cy="310896"/>
+          </a:xfrm>
+          <a:prstGeom prst="rect">
+            <a:avLst/>
+          </a:prstGeom>
+          <a:noFill/>
+        </p:spPr>
+        <p:txBody>
+          <a:bodyPr wrap="square" anchor="t" lIns="27432" rIns="27432" tIns="0" bIns="0">
+            <a:spAutoFit/>
+          </a:bodyPr>
+          <a:lstStyle/>
+          <a:p>
+            <a:pPr algn="r">
+              <a:lnSpc>
+                <a:spcPct val="100000"/>
+              </a:lnSpc>
+              <a:spcBef>
+                <a:spcPts val="0"/>
+              </a:spcBef>
+              <a:spcAft>
+                <a:spcPts val="0"/>
+              </a:spcAft>
+            </a:pPr>
+            <a:r>
+              <a:rPr sz="1500" b="0">
+                <a:solidFill>
+                  <a:srgbClr val="777777"/>
+                </a:solidFill>
+                <a:latin typeface="Arial"/>
+                <a:ea typeface="微软雅黑"/>
+                <a:cs typeface="Arial"/>
+              </a:rPr>
+              <a:t>18 / 20</a:t>
+            </a:r>
+          </a:p>
+        </p:txBody>
+      </p:sp>
+    </p:spTree>
+  </p:cSld>
+  <p:clrMapOvr>
+    <a:masterClrMapping/>
+  </p:clrMapOvr>
+</p:sld>
+</file>
+
+<file path=ppt/slides/slide19.xml><?xml version="1.0" encoding="utf-8"?>
+<p:sld xmlns:a="http://schemas.openxmlformats.org/drawingml/2006/main" xmlns:p="http://schemas.openxmlformats.org/presentationml/2006/main" xmlns:r="http://schemas.openxmlformats.org/officeDocument/2006/relationships">
+  <p:cSld>
+    <p:spTree>
+      <p:nvGrpSpPr>
+        <p:cNvPr id="1" name=""/>
+        <p:cNvGrpSpPr/>
+        <p:nvPr/>
+      </p:nvGrpSpPr>
+      <p:grpSpPr/>
+      <p:sp>
+        <p:nvSpPr>
+          <p:cNvPr id="2" name="TextBox 1"/>
+          <p:cNvSpPr txBox="1"/>
+          <p:nvPr/>
+        </p:nvSpPr>
+        <p:spPr>
+          <a:xfrm>
+            <a:off x="640080" y="365760"/>
+            <a:ext cx="10908792" cy="548640"/>
+          </a:xfrm>
+          <a:prstGeom prst="rect">
+            <a:avLst/>
+          </a:prstGeom>
+          <a:noFill/>
+        </p:spPr>
+        <p:txBody>
+          <a:bodyPr wrap="square" anchor="t" lIns="27432" rIns="27432" tIns="0" bIns="0">
+            <a:spAutoFit/>
+          </a:bodyPr>
+          <a:lstStyle/>
+          <a:p>
+            <a:pPr algn="l">
+              <a:lnSpc>
+                <a:spcPct val="100000"/>
+              </a:lnSpc>
+              <a:spcBef>
+                <a:spcPts val="0"/>
+              </a:spcBef>
+              <a:spcAft>
+                <a:spcPts val="0"/>
+              </a:spcAft>
+            </a:pPr>
+            <a:r>
+              <a:rPr sz="2500" b="1">
+                <a:solidFill>
+                  <a:srgbClr val="111111"/>
+                </a:solidFill>
+                <a:latin typeface="Arial"/>
+                <a:ea typeface="微软雅黑"/>
+                <a:cs typeface="Arial"/>
+              </a:rPr>
+              <a:t>机制落点：AChE–Aβ 复合物与候选肽的三个假设</a:t>
+            </a:r>
+          </a:p>
+        </p:txBody>
+      </p:sp>
+      <p:sp>
+        <p:nvSpPr>
+          <p:cNvPr id="3" name="Rectangle 2"/>
+          <p:cNvSpPr/>
+          <p:nvPr/>
+        </p:nvSpPr>
+        <p:spPr>
+          <a:xfrm>
+            <a:off x="640080" y="969264"/>
+            <a:ext cx="10908792" cy="12700"/>
+          </a:xfrm>
+          <a:prstGeom prst="rect">
+            <a:avLst/>
+          </a:prstGeom>
+          <a:solidFill>
+            <a:srgbClr val="DDDDDA"/>
+          </a:solidFill>
+          <a:ln>
+            <a:noFill/>
+          </a:ln>
+          <a:effectLst/>
+        </p:spPr>
+        <p:style>
+          <a:lnRef idx="1">
+            <a:schemeClr val="accent1"/>
+          </a:lnRef>
+          <a:fillRef idx="3">
+            <a:schemeClr val="accent1"/>
+          </a:fillRef>
+          <a:effectRef idx="2">
+            <a:schemeClr val="accent1"/>
+          </a:effectRef>
+          <a:fontRef idx="minor">
+            <a:schemeClr val="lt1"/>
+          </a:fontRef>
+        </p:style>
+        <p:txBody>
+          <a:bodyPr rtlCol="0" anchor="ctr"/>
+          <a:lstStyle/>
+          <a:p>
+            <a:pPr algn="ctr"/>
+          </a:p>
+        </p:txBody>
+      </p:sp>
+      <p:pic>
+        <p:nvPicPr>
+          <p:cNvPr id="4" name="Picture 3" descr="figM2_AChE_Aβ_机制.png"/>
+          <p:cNvPicPr>
+            <a:picLocks noChangeAspect="1"/>
+          </p:cNvPicPr>
+          <p:nvPr/>
+        </p:nvPicPr>
+        <p:blipFill>
+          <a:blip r:embed="rId2"/>
+          <a:stretch>
+            <a:fillRect/>
+          </a:stretch>
+        </p:blipFill>
+        <p:spPr>
+          <a:xfrm>
+            <a:off x="640080" y="1188720"/>
+            <a:ext cx="7863840" cy="3943173"/>
+          </a:xfrm>
+          <a:prstGeom prst="rect">
+            <a:avLst/>
+          </a:prstGeom>
+        </p:spPr>
+      </p:pic>
+      <p:sp>
+        <p:nvSpPr>
+          <p:cNvPr id="5" name="TextBox 4"/>
+          <p:cNvSpPr txBox="1"/>
+          <p:nvPr/>
+        </p:nvSpPr>
+        <p:spPr>
+          <a:xfrm>
+            <a:off x="8549640" y="1188720"/>
+            <a:ext cx="2999232" cy="4480560"/>
+          </a:xfrm>
+          <a:prstGeom prst="rect">
+            <a:avLst/>
+          </a:prstGeom>
+          <a:noFill/>
+        </p:spPr>
+        <p:txBody>
+          <a:bodyPr wrap="square" anchor="t" lIns="27432" rIns="27432" tIns="0" bIns="0">
+            <a:spAutoFit/>
+          </a:bodyPr>
+          <a:lstStyle/>
+          <a:p>
+            <a:pPr algn="l">
+              <a:lnSpc>
+                <a:spcPct val="110000"/>
+              </a:lnSpc>
+              <a:spcBef>
+                <a:spcPts val="0"/>
+              </a:spcBef>
+              <a:spcAft>
+                <a:spcPts val="0"/>
+              </a:spcAft>
+            </a:pPr>
+            <a:r>
+              <a:rPr sz="1600" b="1">
+                <a:solidFill>
+                  <a:srgbClr val="2F5D62"/>
+                </a:solidFill>
+                <a:latin typeface="Arial"/>
+                <a:ea typeface="微软雅黑"/>
+                <a:cs typeface="Arial"/>
+              </a:rPr>
+              <a:t>解读</a:t>
+            </a:r>
+          </a:p>
+          <a:p>
+            <a:pPr algn="l">
+              <a:lnSpc>
+                <a:spcPct val="130000"/>
+              </a:lnSpc>
+              <a:spcBef>
+                <a:spcPts val="800"/>
+              </a:spcBef>
+              <a:spcAft>
+                <a:spcPts val="0"/>
+              </a:spcAft>
+            </a:pPr>
+            <a:r>
+              <a:rPr sz="1600" b="0">
+                <a:solidFill>
+                  <a:srgbClr val="333333"/>
+                </a:solidFill>
+                <a:latin typeface="Arial"/>
+                <a:ea typeface="微软雅黑"/>
+                <a:cs typeface="Arial"/>
+              </a:rPr>
+              <a:t>AChE 的 PAS 是 Aβ 聚集的成核中心；分子动力学显示复合物在 1 μs 内稳定，Aβ 主要停留于 344–361 区段，且该区段不受双位点抑制剂位阻。由此提出：H1 竞争 PAS 减少成核、H2 结合 Aβ 改变聚集路径、H3 膜水平影响炎症信号；以对接与动力学给优先序，以抑菌与酶活实验验证。</a:t>
+            </a:r>
+          </a:p>
+        </p:txBody>
+      </p:sp>
+      <p:sp>
+        <p:nvSpPr>
+          <p:cNvPr id="6" name="TextBox 5"/>
+          <p:cNvSpPr txBox="1"/>
+          <p:nvPr/>
+        </p:nvSpPr>
+        <p:spPr>
+          <a:xfrm>
+            <a:off x="640080" y="6419088"/>
+            <a:ext cx="8778240" cy="310896"/>
+          </a:xfrm>
+          <a:prstGeom prst="rect">
+            <a:avLst/>
+          </a:prstGeom>
+          <a:noFill/>
+        </p:spPr>
+        <p:txBody>
+          <a:bodyPr wrap="square" anchor="t" lIns="27432" rIns="27432" tIns="0" bIns="0">
+            <a:spAutoFit/>
+          </a:bodyPr>
+          <a:lstStyle/>
+          <a:p>
+            <a:pPr algn="l">
+              <a:lnSpc>
+                <a:spcPct val="100000"/>
+              </a:lnSpc>
+              <a:spcBef>
+                <a:spcPts val="0"/>
+              </a:spcBef>
+              <a:spcAft>
+                <a:spcPts val="0"/>
+              </a:spcAft>
+            </a:pPr>
+            <a:r>
+              <a:rPr sz="1500" b="0">
+                <a:solidFill>
+                  <a:srgbClr val="777777"/>
+                </a:solidFill>
+                <a:latin typeface="Arial"/>
+                <a:ea typeface="微软雅黑"/>
+                <a:cs typeface="Arial"/>
+              </a:rPr>
+              <a:t>研究生论文中期检查 · 文绍华</a:t>
+            </a:r>
+          </a:p>
+        </p:txBody>
+      </p:sp>
+      <p:sp>
+        <p:nvSpPr>
+          <p:cNvPr id="7" name="TextBox 6"/>
+          <p:cNvSpPr txBox="1"/>
+          <p:nvPr/>
+        </p:nvSpPr>
+        <p:spPr>
+          <a:xfrm>
+            <a:off x="10058400" y="6419088"/>
+            <a:ext cx="1490472" cy="310896"/>
+          </a:xfrm>
+          <a:prstGeom prst="rect">
+            <a:avLst/>
+          </a:prstGeom>
+          <a:noFill/>
+        </p:spPr>
+        <p:txBody>
+          <a:bodyPr wrap="square" anchor="t" lIns="27432" rIns="27432" tIns="0" bIns="0">
+            <a:spAutoFit/>
+          </a:bodyPr>
+          <a:lstStyle/>
+          <a:p>
+            <a:pPr algn="r">
+              <a:lnSpc>
+                <a:spcPct val="100000"/>
+              </a:lnSpc>
+              <a:spcBef>
+                <a:spcPts val="0"/>
+              </a:spcBef>
+              <a:spcAft>
+                <a:spcPts val="0"/>
+              </a:spcAft>
+            </a:pPr>
+            <a:r>
+              <a:rPr sz="1500" b="0">
+                <a:solidFill>
+                  <a:srgbClr val="777777"/>
+                </a:solidFill>
+                <a:latin typeface="Arial"/>
+                <a:ea typeface="微软雅黑"/>
+                <a:cs typeface="Arial"/>
+              </a:rPr>
+              <a:t>19 / 20</a:t>
             </a:r>
           </a:p>
         </p:txBody>
@@ -8599,7 +9987,914 @@
                 <a:ea typeface="微软雅黑"/>
                 <a:cs typeface="Arial"/>
               </a:rPr>
-              <a:t>2 / 16</a:t>
+              <a:t>2 / 20</a:t>
+            </a:r>
+          </a:p>
+        </p:txBody>
+      </p:sp>
+    </p:spTree>
+  </p:cSld>
+  <p:clrMapOvr>
+    <a:masterClrMapping/>
+  </p:clrMapOvr>
+</p:sld>
+</file>
+
+<file path=ppt/slides/slide20.xml><?xml version="1.0" encoding="utf-8"?>
+<p:sld xmlns:a="http://schemas.openxmlformats.org/drawingml/2006/main" xmlns:p="http://schemas.openxmlformats.org/presentationml/2006/main" xmlns:r="http://schemas.openxmlformats.org/officeDocument/2006/relationships">
+  <p:cSld>
+    <p:spTree>
+      <p:nvGrpSpPr>
+        <p:cNvPr id="1" name=""/>
+        <p:cNvGrpSpPr/>
+        <p:nvPr/>
+      </p:nvGrpSpPr>
+      <p:grpSpPr/>
+      <p:sp>
+        <p:nvSpPr>
+          <p:cNvPr id="2" name="TextBox 1"/>
+          <p:cNvSpPr txBox="1"/>
+          <p:nvPr/>
+        </p:nvSpPr>
+        <p:spPr>
+          <a:xfrm>
+            <a:off x="640080" y="365760"/>
+            <a:ext cx="10908792" cy="548640"/>
+          </a:xfrm>
+          <a:prstGeom prst="rect">
+            <a:avLst/>
+          </a:prstGeom>
+          <a:noFill/>
+        </p:spPr>
+        <p:txBody>
+          <a:bodyPr wrap="square" anchor="t" lIns="27432" rIns="27432" tIns="0" bIns="0">
+            <a:spAutoFit/>
+          </a:bodyPr>
+          <a:lstStyle/>
+          <a:p>
+            <a:pPr algn="l">
+              <a:lnSpc>
+                <a:spcPct val="100000"/>
+              </a:lnSpc>
+              <a:spcBef>
+                <a:spcPts val="0"/>
+              </a:spcBef>
+              <a:spcAft>
+                <a:spcPts val="0"/>
+              </a:spcAft>
+            </a:pPr>
+            <a:r>
+              <a:rPr sz="2500" b="1">
+                <a:solidFill>
+                  <a:srgbClr val="111111"/>
+                </a:solidFill>
+                <a:latin typeface="Arial"/>
+                <a:ea typeface="微软雅黑"/>
+                <a:cs typeface="Arial"/>
+              </a:rPr>
+              <a:t>证据到哪一步：分级与验证路径</a:t>
+            </a:r>
+          </a:p>
+        </p:txBody>
+      </p:sp>
+      <p:sp>
+        <p:nvSpPr>
+          <p:cNvPr id="3" name="Rectangle 2"/>
+          <p:cNvSpPr/>
+          <p:nvPr/>
+        </p:nvSpPr>
+        <p:spPr>
+          <a:xfrm>
+            <a:off x="640080" y="969264"/>
+            <a:ext cx="10908792" cy="12700"/>
+          </a:xfrm>
+          <a:prstGeom prst="rect">
+            <a:avLst/>
+          </a:prstGeom>
+          <a:solidFill>
+            <a:srgbClr val="DDDDDA"/>
+          </a:solidFill>
+          <a:ln>
+            <a:noFill/>
+          </a:ln>
+          <a:effectLst/>
+        </p:spPr>
+        <p:style>
+          <a:lnRef idx="1">
+            <a:schemeClr val="accent1"/>
+          </a:lnRef>
+          <a:fillRef idx="3">
+            <a:schemeClr val="accent1"/>
+          </a:fillRef>
+          <a:effectRef idx="2">
+            <a:schemeClr val="accent1"/>
+          </a:effectRef>
+          <a:fontRef idx="minor">
+            <a:schemeClr val="lt1"/>
+          </a:fontRef>
+        </p:style>
+        <p:txBody>
+          <a:bodyPr rtlCol="0" anchor="ctr"/>
+          <a:lstStyle/>
+          <a:p>
+            <a:pPr algn="ctr"/>
+          </a:p>
+        </p:txBody>
+      </p:sp>
+      <p:graphicFrame>
+        <p:nvGraphicFramePr>
+          <p:cNvPr id="4" name="Table 3"/>
+          <p:cNvGraphicFramePr>
+            <a:graphicFrameLocks noGrp="1"/>
+          </p:cNvGraphicFramePr>
+          <p:nvPr/>
+        </p:nvGraphicFramePr>
+        <p:xfrm>
+          <a:off x="640080" y="1234440"/>
+          <a:ext cx="10972800" cy="3328416"/>
+        </p:xfrm>
+        <a:graphic>
+          <a:graphicData uri="http://schemas.openxmlformats.org/drawingml/2006/table">
+            <a:tbl>
+              <a:tblPr firstRow="1" bandRow="1">
+                <a:tableStyleId>{5C22544A-7EE6-4342-B048-85BDC9FD1C3A}</a:tableStyleId>
+              </a:tblPr>
+              <a:tblGrid>
+                <a:gridCol w="4206240"/>
+                <a:gridCol w="3108960"/>
+                <a:gridCol w="3657600"/>
+              </a:tblGrid>
+              <a:tr h="475488">
+                <a:tc>
+                  <a:txBody>
+                    <a:bodyPr/>
+                    <a:lstStyle/>
+                    <a:p>
+                      <a:pPr algn="l">
+                        <a:lnSpc>
+                          <a:spcPct val="105000"/>
+                        </a:lnSpc>
+                        <a:spcBef>
+                          <a:spcPts val="0"/>
+                        </a:spcBef>
+                        <a:spcAft>
+                          <a:spcPts val="0"/>
+                        </a:spcAft>
+                      </a:pPr>
+                      <a:r>
+                        <a:rPr sz="1500" b="1">
+                          <a:solidFill>
+                            <a:srgbClr val="111111"/>
+                          </a:solidFill>
+                          <a:latin typeface="Arial"/>
+                          <a:ea typeface="微软雅黑"/>
+                          <a:cs typeface="Arial"/>
+                        </a:rPr>
+                        <a:t>要点</a:t>
+                      </a:r>
+                    </a:p>
+                  </a:txBody>
+                  <a:tcPr>
+                    <a:solidFill>
+                      <a:srgbClr val="F7F7F5"/>
+                    </a:solidFill>
+                  </a:tcPr>
+                </a:tc>
+                <a:tc>
+                  <a:txBody>
+                    <a:bodyPr/>
+                    <a:lstStyle/>
+                    <a:p>
+                      <a:pPr algn="l">
+                        <a:lnSpc>
+                          <a:spcPct val="105000"/>
+                        </a:lnSpc>
+                        <a:spcBef>
+                          <a:spcPts val="0"/>
+                        </a:spcBef>
+                        <a:spcAft>
+                          <a:spcPts val="0"/>
+                        </a:spcAft>
+                      </a:pPr>
+                      <a:r>
+                        <a:rPr sz="1500" b="1">
+                          <a:solidFill>
+                            <a:srgbClr val="111111"/>
+                          </a:solidFill>
+                          <a:latin typeface="Arial"/>
+                          <a:ea typeface="微软雅黑"/>
+                          <a:cs typeface="Arial"/>
+                        </a:rPr>
+                        <a:t>证据强度</a:t>
+                      </a:r>
+                    </a:p>
+                  </a:txBody>
+                  <a:tcPr>
+                    <a:solidFill>
+                      <a:srgbClr val="F7F7F5"/>
+                    </a:solidFill>
+                  </a:tcPr>
+                </a:tc>
+                <a:tc>
+                  <a:txBody>
+                    <a:bodyPr/>
+                    <a:lstStyle/>
+                    <a:p>
+                      <a:pPr algn="l">
+                        <a:lnSpc>
+                          <a:spcPct val="105000"/>
+                        </a:lnSpc>
+                        <a:spcBef>
+                          <a:spcPts val="0"/>
+                        </a:spcBef>
+                        <a:spcAft>
+                          <a:spcPts val="0"/>
+                        </a:spcAft>
+                      </a:pPr>
+                      <a:r>
+                        <a:rPr sz="1500" b="1">
+                          <a:solidFill>
+                            <a:srgbClr val="111111"/>
+                          </a:solidFill>
+                          <a:latin typeface="Arial"/>
+                          <a:ea typeface="微软雅黑"/>
+                          <a:cs typeface="Arial"/>
+                        </a:rPr>
+                        <a:t>与本课题的关系</a:t>
+                      </a:r>
+                    </a:p>
+                  </a:txBody>
+                  <a:tcPr>
+                    <a:solidFill>
+                      <a:srgbClr val="F7F7F5"/>
+                    </a:solidFill>
+                  </a:tcPr>
+                </a:tc>
+              </a:tr>
+              <a:tr h="475488">
+                <a:tc>
+                  <a:txBody>
+                    <a:bodyPr/>
+                    <a:lstStyle/>
+                    <a:p>
+                      <a:pPr algn="l">
+                        <a:lnSpc>
+                          <a:spcPct val="110000"/>
+                        </a:lnSpc>
+                        <a:spcBef>
+                          <a:spcPts val="0"/>
+                        </a:spcBef>
+                        <a:spcAft>
+                          <a:spcPts val="0"/>
+                        </a:spcAft>
+                      </a:pPr>
+                      <a:r>
+                        <a:rPr sz="1500" b="0">
+                          <a:solidFill>
+                            <a:srgbClr val="333333"/>
+                          </a:solidFill>
+                          <a:latin typeface="Arial"/>
+                          <a:ea typeface="微软雅黑"/>
+                          <a:cs typeface="Arial"/>
+                        </a:rPr>
+                        <a:t>Aβ 具抗菌活性，AD 脑匀浆活性更高</a:t>
+                      </a:r>
+                    </a:p>
+                  </a:txBody>
+                  <a:tcPr/>
+                </a:tc>
+                <a:tc>
+                  <a:txBody>
+                    <a:bodyPr/>
+                    <a:lstStyle/>
+                    <a:p>
+                      <a:pPr algn="l">
+                        <a:lnSpc>
+                          <a:spcPct val="110000"/>
+                        </a:lnSpc>
+                        <a:spcBef>
+                          <a:spcPts val="0"/>
+                        </a:spcBef>
+                        <a:spcAft>
+                          <a:spcPts val="0"/>
+                        </a:spcAft>
+                      </a:pPr>
+                      <a:r>
+                        <a:rPr sz="1500" b="0">
+                          <a:solidFill>
+                            <a:srgbClr val="333333"/>
+                          </a:solidFill>
+                          <a:latin typeface="Arial"/>
+                          <a:ea typeface="微软雅黑"/>
+                          <a:cs typeface="Arial"/>
+                        </a:rPr>
+                        <a:t>强：体外 + 人脑组织</a:t>
+                      </a:r>
+                    </a:p>
+                  </a:txBody>
+                  <a:tcPr/>
+                </a:tc>
+                <a:tc>
+                  <a:txBody>
+                    <a:bodyPr/>
+                    <a:lstStyle/>
+                    <a:p>
+                      <a:pPr algn="l">
+                        <a:lnSpc>
+                          <a:spcPct val="110000"/>
+                        </a:lnSpc>
+                        <a:spcBef>
+                          <a:spcPts val="0"/>
+                        </a:spcBef>
+                        <a:spcAft>
+                          <a:spcPts val="0"/>
+                        </a:spcAft>
+                      </a:pPr>
+                      <a:r>
+                        <a:rPr sz="1500" b="0">
+                          <a:solidFill>
+                            <a:srgbClr val="333333"/>
+                          </a:solidFill>
+                          <a:latin typeface="Arial"/>
+                          <a:ea typeface="微软雅黑"/>
+                          <a:cs typeface="Arial"/>
+                        </a:rPr>
+                        <a:t>提供抗菌肽研究的出发点</a:t>
+                      </a:r>
+                    </a:p>
+                  </a:txBody>
+                  <a:tcPr/>
+                </a:tc>
+              </a:tr>
+              <a:tr h="475488">
+                <a:tc>
+                  <a:txBody>
+                    <a:bodyPr/>
+                    <a:lstStyle/>
+                    <a:p>
+                      <a:pPr algn="l">
+                        <a:lnSpc>
+                          <a:spcPct val="110000"/>
+                        </a:lnSpc>
+                        <a:spcBef>
+                          <a:spcPts val="0"/>
+                        </a:spcBef>
+                        <a:spcAft>
+                          <a:spcPts val="0"/>
+                        </a:spcAft>
+                      </a:pPr>
+                      <a:r>
+                        <a:rPr sz="1500" b="0">
+                          <a:solidFill>
+                            <a:srgbClr val="333333"/>
+                          </a:solidFill>
+                          <a:latin typeface="Arial"/>
+                          <a:ea typeface="微软雅黑"/>
+                          <a:cs typeface="Arial"/>
+                        </a:rPr>
+                        <a:t>AD 脑内宿主抗菌肽上调</a:t>
+                      </a:r>
+                    </a:p>
+                  </a:txBody>
+                  <a:tcPr/>
+                </a:tc>
+                <a:tc>
+                  <a:txBody>
+                    <a:bodyPr/>
+                    <a:lstStyle/>
+                    <a:p>
+                      <a:pPr algn="l">
+                        <a:lnSpc>
+                          <a:spcPct val="110000"/>
+                        </a:lnSpc>
+                        <a:spcBef>
+                          <a:spcPts val="0"/>
+                        </a:spcBef>
+                        <a:spcAft>
+                          <a:spcPts val="0"/>
+                        </a:spcAft>
+                      </a:pPr>
+                      <a:r>
+                        <a:rPr sz="1500" b="0">
+                          <a:solidFill>
+                            <a:srgbClr val="333333"/>
+                          </a:solidFill>
+                          <a:latin typeface="Arial"/>
+                          <a:ea typeface="微软雅黑"/>
+                          <a:cs typeface="Arial"/>
+                        </a:rPr>
+                        <a:t>中—强：尸检组织，样本有限</a:t>
+                      </a:r>
+                    </a:p>
+                  </a:txBody>
+                  <a:tcPr/>
+                </a:tc>
+                <a:tc>
+                  <a:txBody>
+                    <a:bodyPr/>
+                    <a:lstStyle/>
+                    <a:p>
+                      <a:pPr algn="l">
+                        <a:lnSpc>
+                          <a:spcPct val="110000"/>
+                        </a:lnSpc>
+                        <a:spcBef>
+                          <a:spcPts val="0"/>
+                        </a:spcBef>
+                        <a:spcAft>
+                          <a:spcPts val="0"/>
+                        </a:spcAft>
+                      </a:pPr>
+                      <a:r>
+                        <a:rPr sz="1500" b="0">
+                          <a:solidFill>
+                            <a:srgbClr val="333333"/>
+                          </a:solidFill>
+                          <a:latin typeface="Arial"/>
+                          <a:ea typeface="微软雅黑"/>
+                          <a:cs typeface="Arial"/>
+                        </a:rPr>
+                        <a:t>作为宿主来源的参照系</a:t>
+                      </a:r>
+                    </a:p>
+                  </a:txBody>
+                  <a:tcPr/>
+                </a:tc>
+              </a:tr>
+              <a:tr h="475488">
+                <a:tc>
+                  <a:txBody>
+                    <a:bodyPr/>
+                    <a:lstStyle/>
+                    <a:p>
+                      <a:pPr algn="l">
+                        <a:lnSpc>
+                          <a:spcPct val="110000"/>
+                        </a:lnSpc>
+                        <a:spcBef>
+                          <a:spcPts val="0"/>
+                        </a:spcBef>
+                        <a:spcAft>
+                          <a:spcPts val="0"/>
+                        </a:spcAft>
+                      </a:pPr>
+                      <a:r>
+                        <a:rPr sz="1500" b="0">
+                          <a:solidFill>
+                            <a:srgbClr val="333333"/>
+                          </a:solidFill>
+                          <a:latin typeface="Arial"/>
+                          <a:ea typeface="微软雅黑"/>
+                          <a:cs typeface="Arial"/>
+                        </a:rPr>
+                        <a:t>AChE 经 PAS 促进 Aβ 聚集</a:t>
+                      </a:r>
+                    </a:p>
+                  </a:txBody>
+                  <a:tcPr/>
+                </a:tc>
+                <a:tc>
+                  <a:txBody>
+                    <a:bodyPr/>
+                    <a:lstStyle/>
+                    <a:p>
+                      <a:pPr algn="l">
+                        <a:lnSpc>
+                          <a:spcPct val="110000"/>
+                        </a:lnSpc>
+                        <a:spcBef>
+                          <a:spcPts val="0"/>
+                        </a:spcBef>
+                        <a:spcAft>
+                          <a:spcPts val="0"/>
+                        </a:spcAft>
+                      </a:pPr>
+                      <a:r>
+                        <a:rPr sz="1500" b="0">
+                          <a:solidFill>
+                            <a:srgbClr val="333333"/>
+                          </a:solidFill>
+                          <a:latin typeface="Arial"/>
+                          <a:ea typeface="微软雅黑"/>
+                          <a:cs typeface="Arial"/>
+                        </a:rPr>
+                        <a:t>强：体外动力学 + 位点阻断</a:t>
+                      </a:r>
+                    </a:p>
+                  </a:txBody>
+                  <a:tcPr/>
+                </a:tc>
+                <a:tc>
+                  <a:txBody>
+                    <a:bodyPr/>
+                    <a:lstStyle/>
+                    <a:p>
+                      <a:pPr algn="l">
+                        <a:lnSpc>
+                          <a:spcPct val="110000"/>
+                        </a:lnSpc>
+                        <a:spcBef>
+                          <a:spcPts val="0"/>
+                        </a:spcBef>
+                        <a:spcAft>
+                          <a:spcPts val="0"/>
+                        </a:spcAft>
+                      </a:pPr>
+                      <a:r>
+                        <a:rPr sz="1500" b="0">
+                          <a:solidFill>
+                            <a:srgbClr val="333333"/>
+                          </a:solidFill>
+                          <a:latin typeface="Arial"/>
+                          <a:ea typeface="微软雅黑"/>
+                          <a:cs typeface="Arial"/>
+                        </a:rPr>
+                        <a:t>机制关联的参照体系</a:t>
+                      </a:r>
+                    </a:p>
+                  </a:txBody>
+                  <a:tcPr/>
+                </a:tc>
+              </a:tr>
+              <a:tr h="475488">
+                <a:tc>
+                  <a:txBody>
+                    <a:bodyPr/>
+                    <a:lstStyle/>
+                    <a:p>
+                      <a:pPr algn="l">
+                        <a:lnSpc>
+                          <a:spcPct val="110000"/>
+                        </a:lnSpc>
+                        <a:spcBef>
+                          <a:spcPts val="0"/>
+                        </a:spcBef>
+                        <a:spcAft>
+                          <a:spcPts val="0"/>
+                        </a:spcAft>
+                      </a:pPr>
+                      <a:r>
+                        <a:rPr sz="1500" b="0">
+                          <a:solidFill>
+                            <a:srgbClr val="333333"/>
+                          </a:solidFill>
+                          <a:latin typeface="Arial"/>
+                          <a:ea typeface="微软雅黑"/>
+                          <a:cs typeface="Arial"/>
+                        </a:rPr>
+                        <a:t>AD 患者菌群失衡与炎症升高</a:t>
+                      </a:r>
+                    </a:p>
+                  </a:txBody>
+                  <a:tcPr/>
+                </a:tc>
+                <a:tc>
+                  <a:txBody>
+                    <a:bodyPr/>
+                    <a:lstStyle/>
+                    <a:p>
+                      <a:pPr algn="l">
+                        <a:lnSpc>
+                          <a:spcPct val="110000"/>
+                        </a:lnSpc>
+                        <a:spcBef>
+                          <a:spcPts val="0"/>
+                        </a:spcBef>
+                        <a:spcAft>
+                          <a:spcPts val="0"/>
+                        </a:spcAft>
+                      </a:pPr>
+                      <a:r>
+                        <a:rPr sz="1500" b="0">
+                          <a:solidFill>
+                            <a:srgbClr val="333333"/>
+                          </a:solidFill>
+                          <a:latin typeface="Arial"/>
+                          <a:ea typeface="微软雅黑"/>
+                          <a:cs typeface="Arial"/>
+                        </a:rPr>
+                        <a:t>中：研究异质性大</a:t>
+                      </a:r>
+                    </a:p>
+                  </a:txBody>
+                  <a:tcPr/>
+                </a:tc>
+                <a:tc>
+                  <a:txBody>
+                    <a:bodyPr/>
+                    <a:lstStyle/>
+                    <a:p>
+                      <a:pPr algn="l">
+                        <a:lnSpc>
+                          <a:spcPct val="110000"/>
+                        </a:lnSpc>
+                        <a:spcBef>
+                          <a:spcPts val="0"/>
+                        </a:spcBef>
+                        <a:spcAft>
+                          <a:spcPts val="0"/>
+                        </a:spcAft>
+                      </a:pPr>
+                      <a:r>
+                        <a:rPr sz="1500" b="0">
+                          <a:solidFill>
+                            <a:srgbClr val="333333"/>
+                          </a:solidFill>
+                          <a:latin typeface="Arial"/>
+                          <a:ea typeface="微软雅黑"/>
+                          <a:cs typeface="Arial"/>
+                        </a:rPr>
+                        <a:t>阶段特异性抗菌肽的合理性</a:t>
+                      </a:r>
+                    </a:p>
+                  </a:txBody>
+                  <a:tcPr/>
+                </a:tc>
+              </a:tr>
+              <a:tr h="475488">
+                <a:tc>
+                  <a:txBody>
+                    <a:bodyPr/>
+                    <a:lstStyle/>
+                    <a:p>
+                      <a:pPr algn="l">
+                        <a:lnSpc>
+                          <a:spcPct val="110000"/>
+                        </a:lnSpc>
+                        <a:spcBef>
+                          <a:spcPts val="0"/>
+                        </a:spcBef>
+                        <a:spcAft>
+                          <a:spcPts val="0"/>
+                        </a:spcAft>
+                      </a:pPr>
+                      <a:r>
+                        <a:rPr sz="1500" b="0">
+                          <a:solidFill>
+                            <a:srgbClr val="333333"/>
+                          </a:solidFill>
+                          <a:latin typeface="Arial"/>
+                          <a:ea typeface="微软雅黑"/>
+                          <a:cs typeface="Arial"/>
+                        </a:rPr>
+                        <a:t>微生物源抗菌肽在 AD 增多</a:t>
+                      </a:r>
+                    </a:p>
+                  </a:txBody>
+                  <a:tcPr/>
+                </a:tc>
+                <a:tc>
+                  <a:txBody>
+                    <a:bodyPr/>
+                    <a:lstStyle/>
+                    <a:p>
+                      <a:pPr algn="l">
+                        <a:lnSpc>
+                          <a:spcPct val="110000"/>
+                        </a:lnSpc>
+                        <a:spcBef>
+                          <a:spcPts val="0"/>
+                        </a:spcBef>
+                        <a:spcAft>
+                          <a:spcPts val="0"/>
+                        </a:spcAft>
+                      </a:pPr>
+                      <a:r>
+                        <a:rPr sz="1500" b="0">
+                          <a:solidFill>
+                            <a:srgbClr val="333333"/>
+                          </a:solidFill>
+                          <a:latin typeface="Arial"/>
+                          <a:ea typeface="微软雅黑"/>
+                          <a:cs typeface="Arial"/>
+                        </a:rPr>
+                        <a:t>待验证</a:t>
+                      </a:r>
+                    </a:p>
+                  </a:txBody>
+                  <a:tcPr/>
+                </a:tc>
+                <a:tc>
+                  <a:txBody>
+                    <a:bodyPr/>
+                    <a:lstStyle/>
+                    <a:p>
+                      <a:pPr algn="l">
+                        <a:lnSpc>
+                          <a:spcPct val="110000"/>
+                        </a:lnSpc>
+                        <a:spcBef>
+                          <a:spcPts val="0"/>
+                        </a:spcBef>
+                        <a:spcAft>
+                          <a:spcPts val="0"/>
+                        </a:spcAft>
+                      </a:pPr>
+                      <a:r>
+                        <a:rPr sz="1500" b="0">
+                          <a:solidFill>
+                            <a:srgbClr val="333333"/>
+                          </a:solidFill>
+                          <a:latin typeface="Arial"/>
+                          <a:ea typeface="微软雅黑"/>
+                          <a:cs typeface="Arial"/>
+                        </a:rPr>
+                        <a:t>本课题要回答的问题</a:t>
+                      </a:r>
+                    </a:p>
+                  </a:txBody>
+                  <a:tcPr/>
+                </a:tc>
+              </a:tr>
+              <a:tr h="475488">
+                <a:tc>
+                  <a:txBody>
+                    <a:bodyPr/>
+                    <a:lstStyle/>
+                    <a:p>
+                      <a:pPr algn="l">
+                        <a:lnSpc>
+                          <a:spcPct val="110000"/>
+                        </a:lnSpc>
+                        <a:spcBef>
+                          <a:spcPts val="0"/>
+                        </a:spcBef>
+                        <a:spcAft>
+                          <a:spcPts val="0"/>
+                        </a:spcAft>
+                      </a:pPr>
+                      <a:r>
+                        <a:rPr sz="1500" b="0">
+                          <a:solidFill>
+                            <a:srgbClr val="333333"/>
+                          </a:solidFill>
+                          <a:latin typeface="Arial"/>
+                          <a:ea typeface="微软雅黑"/>
+                          <a:cs typeface="Arial"/>
+                        </a:rPr>
+                        <a:t>候选肽经 AChE–Aβ 界面影响成核</a:t>
+                      </a:r>
+                    </a:p>
+                  </a:txBody>
+                  <a:tcPr/>
+                </a:tc>
+                <a:tc>
+                  <a:txBody>
+                    <a:bodyPr/>
+                    <a:lstStyle/>
+                    <a:p>
+                      <a:pPr algn="l">
+                        <a:lnSpc>
+                          <a:spcPct val="110000"/>
+                        </a:lnSpc>
+                        <a:spcBef>
+                          <a:spcPts val="0"/>
+                        </a:spcBef>
+                        <a:spcAft>
+                          <a:spcPts val="0"/>
+                        </a:spcAft>
+                      </a:pPr>
+                      <a:r>
+                        <a:rPr sz="1500" b="0">
+                          <a:solidFill>
+                            <a:srgbClr val="333333"/>
+                          </a:solidFill>
+                          <a:latin typeface="Arial"/>
+                          <a:ea typeface="微软雅黑"/>
+                          <a:cs typeface="Arial"/>
+                        </a:rPr>
+                        <a:t>待验证（H1—H3）</a:t>
+                      </a:r>
+                    </a:p>
+                  </a:txBody>
+                  <a:tcPr/>
+                </a:tc>
+                <a:tc>
+                  <a:txBody>
+                    <a:bodyPr/>
+                    <a:lstStyle/>
+                    <a:p>
+                      <a:pPr algn="l">
+                        <a:lnSpc>
+                          <a:spcPct val="110000"/>
+                        </a:lnSpc>
+                        <a:spcBef>
+                          <a:spcPts val="0"/>
+                        </a:spcBef>
+                        <a:spcAft>
+                          <a:spcPts val="0"/>
+                        </a:spcAft>
+                      </a:pPr>
+                      <a:r>
+                        <a:rPr sz="1500" b="0">
+                          <a:solidFill>
+                            <a:srgbClr val="333333"/>
+                          </a:solidFill>
+                          <a:latin typeface="Arial"/>
+                          <a:ea typeface="微软雅黑"/>
+                          <a:cs typeface="Arial"/>
+                        </a:rPr>
+                        <a:t>下一步的对接、动力学与实验</a:t>
+                      </a:r>
+                    </a:p>
+                  </a:txBody>
+                  <a:tcPr/>
+                </a:tc>
+              </a:tr>
+            </a:tbl>
+          </a:graphicData>
+        </a:graphic>
+      </p:graphicFrame>
+      <p:sp>
+        <p:nvSpPr>
+          <p:cNvPr id="5" name="TextBox 4"/>
+          <p:cNvSpPr txBox="1"/>
+          <p:nvPr/>
+        </p:nvSpPr>
+        <p:spPr>
+          <a:xfrm>
+            <a:off x="640080" y="6419088"/>
+            <a:ext cx="8778240" cy="310896"/>
+          </a:xfrm>
+          <a:prstGeom prst="rect">
+            <a:avLst/>
+          </a:prstGeom>
+          <a:noFill/>
+        </p:spPr>
+        <p:txBody>
+          <a:bodyPr wrap="square" anchor="t" lIns="27432" rIns="27432" tIns="0" bIns="0">
+            <a:spAutoFit/>
+          </a:bodyPr>
+          <a:lstStyle/>
+          <a:p>
+            <a:pPr algn="l">
+              <a:lnSpc>
+                <a:spcPct val="100000"/>
+              </a:lnSpc>
+              <a:spcBef>
+                <a:spcPts val="0"/>
+              </a:spcBef>
+              <a:spcAft>
+                <a:spcPts val="0"/>
+              </a:spcAft>
+            </a:pPr>
+            <a:r>
+              <a:rPr sz="1500" b="0">
+                <a:solidFill>
+                  <a:srgbClr val="777777"/>
+                </a:solidFill>
+                <a:latin typeface="Arial"/>
+                <a:ea typeface="微软雅黑"/>
+                <a:cs typeface="Arial"/>
+              </a:rPr>
+              <a:t>研究生论文中期检查 · 文绍华</a:t>
+            </a:r>
+          </a:p>
+        </p:txBody>
+      </p:sp>
+      <p:sp>
+        <p:nvSpPr>
+          <p:cNvPr id="6" name="TextBox 5"/>
+          <p:cNvSpPr txBox="1"/>
+          <p:nvPr/>
+        </p:nvSpPr>
+        <p:spPr>
+          <a:xfrm>
+            <a:off x="10058400" y="6419088"/>
+            <a:ext cx="1490472" cy="310896"/>
+          </a:xfrm>
+          <a:prstGeom prst="rect">
+            <a:avLst/>
+          </a:prstGeom>
+          <a:noFill/>
+        </p:spPr>
+        <p:txBody>
+          <a:bodyPr wrap="square" anchor="t" lIns="27432" rIns="27432" tIns="0" bIns="0">
+            <a:spAutoFit/>
+          </a:bodyPr>
+          <a:lstStyle/>
+          <a:p>
+            <a:pPr algn="r">
+              <a:lnSpc>
+                <a:spcPct val="100000"/>
+              </a:lnSpc>
+              <a:spcBef>
+                <a:spcPts val="0"/>
+              </a:spcBef>
+              <a:spcAft>
+                <a:spcPts val="0"/>
+              </a:spcAft>
+            </a:pPr>
+            <a:r>
+              <a:rPr sz="1500" b="0">
+                <a:solidFill>
+                  <a:srgbClr val="777777"/>
+                </a:solidFill>
+                <a:latin typeface="Arial"/>
+                <a:ea typeface="微软雅黑"/>
+                <a:cs typeface="Arial"/>
+              </a:rPr>
+              <a:t>20 / 20</a:t>
             </a:r>
           </a:p>
         </p:txBody>
@@ -9060,7 +11355,7 @@
                 <a:ea typeface="微软雅黑"/>
                 <a:cs typeface="Arial"/>
               </a:rPr>
-              <a:t>3 / 16</a:t>
+              <a:t>3 / 20</a:t>
             </a:r>
           </a:p>
         </p:txBody>
@@ -9976,7 +12271,7 @@
                 <a:ea typeface="微软雅黑"/>
                 <a:cs typeface="Arial"/>
               </a:rPr>
-              <a:t>4 / 16</a:t>
+              <a:t>4 / 20</a:t>
             </a:r>
           </a:p>
         </p:txBody>
@@ -10297,7 +12592,7 @@
                 <a:ea typeface="微软雅黑"/>
                 <a:cs typeface="Arial"/>
               </a:rPr>
-              <a:t>5 / 16</a:t>
+              <a:t>5 / 20</a:t>
             </a:r>
           </a:p>
         </p:txBody>
@@ -10595,7 +12890,7 @@
                 <a:ea typeface="微软雅黑"/>
                 <a:cs typeface="Arial"/>
               </a:rPr>
-              <a:t>6 / 16</a:t>
+              <a:t>6 / 20</a:t>
             </a:r>
           </a:p>
         </p:txBody>
@@ -10960,7 +13255,7 @@
                 <a:ea typeface="微软雅黑"/>
                 <a:cs typeface="Arial"/>
               </a:rPr>
-              <a:t>7 / 16</a:t>
+              <a:t>7 / 20</a:t>
             </a:r>
           </a:p>
         </p:txBody>
@@ -11281,7 +13576,7 @@
                 <a:ea typeface="微软雅黑"/>
                 <a:cs typeface="Arial"/>
               </a:rPr>
-              <a:t>8 / 16</a:t>
+              <a:t>8 / 20</a:t>
             </a:r>
           </a:p>
         </p:txBody>
@@ -11579,7 +13874,7 @@
                 <a:ea typeface="微软雅黑"/>
                 <a:cs typeface="Arial"/>
               </a:rPr>
-              <a:t>9 / 16</a:t>
+              <a:t>9 / 20</a:t>
             </a:r>
           </a:p>
         </p:txBody>

--- a/deliverable/中期答辩_H_nature风.pptx
+++ b/deliverable/中期答辩_H_nature风.pptx
@@ -1081,7 +1081,7 @@
           <a:lstStyle/>
           <a:p>
             <a:r>
-              <a:t>这张图把抗菌肽与 AD 的关联拆成七环，并标出每一环的证据强度：蓝色是已有实验或临床证据，绿色是计算方法能给出候选与优先序的部分，橙色是本课题要回答或需要验证的部分。这样讲的好处是：老师问任何一环，都能说清这一环目前的证据到什么程度。</a:t>
+              <a:t>七环逻辑链：把抗菌肽与AD的关联拆成七环，蓝色是已有实验或临床证据，绿色是计算方法能给出候选与优先序的部分，橙色是本课题要回答或需要验证的部分。老师问任何一环都能说清证据到哪一步。</a:t>
             </a:r>
           </a:p>
         </p:txBody>
@@ -1151,7 +1151,7 @@
           <a:lstStyle/>
           <a:p>
             <a:r>
-              <a:t>为什么 AD 患者体内的抗菌肽更多？因为存在一个正反馈：菌群失衡与肠屏障通透性增加使内毒素和病原体长期刺激宿主，经 TLR4 与 NF-κB 通路升高促炎因子，而促炎因子又上调 Aβ 与抗菌肽的生成；Aβ 与抗菌肽聚集后激活小胶质细胞，产生更多炎症介质，循环自我加强。这也是抗菌保护假说的现代表述：一项有益的先天免疫反应，在长期失衡后被放大成病理过程。</a:t>
+              <a:t>为什么AD更多：因为存在正反馈。菌群失衡与肠屏障通透性增加使LPS长期刺激宿主，经TLR4/NF-κB升高促炎因子，促炎因子又上调Aβ与抗菌肽生成；Aβ与抗菌肽聚集激活小胶质，产生更多炎症介质，循环加强。这是抗菌保护假说的现代表述。</a:t>
             </a:r>
           </a:p>
         </p:txBody>
@@ -1221,7 +1221,7 @@
           <a:lstStyle/>
           <a:p>
             <a:r>
-              <a:t>机制落点参照 AChE–Aβ 复合物的分子动力学研究：Aβ 对接进外周阴离子位点 PAS 后，复合物在 1 微秒模拟中保持稳定，主要停留区为 344–361 区段，该区段紧邻 PAS 但不受双位点抑制剂的位阻。由此提出三个可检验假设：H1 竞争 PAS 减少成核、H2 直接结合 Aβ 改变聚集路径、H3 在膜水平影响小胶质识别。我们用对接与动力学给出优先序，再用抑菌与酶活实验验证。</a:t>
+              <a:t>机制落点不只一篇动力学：Inestrosa 1996年首次报道AChE加速聚集可被PAS配体propidium抑制，De Ferrari 2001鉴定疏水基序，Inestrosa 2008综述，Atanasova 2020做1μs MD显示344-361区段稳定且不受双位点抑制剂位阻，由此提出H1-H3。</a:t>
             </a:r>
           </a:p>
         </p:txBody>
@@ -1361,7 +1361,7 @@
           <a:lstStyle/>
           <a:p>
             <a:r>
-              <a:t>这张表说明每一环的证据强度，以及本课题要补的是哪一块：宿主来源抗菌肽、Aβ 的抗菌活性、AChE 经 PAS 促进聚集，这些已有较强证据；微生物源抗菌肽在 AD 患者中增多、以及候选肽经 AChE–Aβ 界面影响成核，是本课题要回答的问题。这样既讲清了关联，也没有夸大因果。</a:t>
+              <a:t>证据分级表说明每一环的强度，待验证一栏与本课题直接对应。抗菌活性预测部分补充文献：Ma 2022和Santos-Junior 2024的大规模验证，说明从序列预测活性是可行且被验证的路线。正常人vs AD谁更多：AD侧更高但需分层，微生物源以数据为准。</a:t>
             </a:r>
           </a:p>
         </p:txBody>
@@ -8503,7 +8503,7 @@
               </a:spcAft>
             </a:pPr>
             <a:r>
-              <a:rPr sz="2500" b="1">
+              <a:rPr sz="2400" b="1">
                 <a:solidFill>
                   <a:srgbClr val="111111"/>
                 </a:solidFill>
@@ -8511,7 +8511,7 @@
                 <a:ea typeface="微软雅黑"/>
                 <a:cs typeface="Arial"/>
               </a:rPr>
-              <a:t>抗菌肽与 AD 的关联可以拆成七环，每环的证据强度不同</a:t>
+              <a:t>抗菌肽与AD关联可拆为七环，证据强度分层</a:t>
             </a:r>
           </a:p>
         </p:txBody>
@@ -8577,7 +8577,7 @@
         <p:spPr>
           <a:xfrm>
             <a:off x="640080" y="1188720"/>
-            <a:ext cx="10073906" cy="4315968"/>
+            <a:ext cx="8110348" cy="3474720"/>
           </a:xfrm>
           <a:prstGeom prst="rect">
             <a:avLst/>
@@ -8626,7 +8626,7 @@
                 <a:ea typeface="微软雅黑"/>
                 <a:cs typeface="Arial"/>
               </a:rPr>
-              <a:t>图：本项目自制（results/figures）</a:t>
+              <a:t>图：本项目自制，蓝=已有实验/临床证据，绿=计算可预测，橙=本课题待验证</a:t>
             </a:r>
           </a:p>
         </p:txBody>
@@ -8639,8 +8639,8 @@
         </p:nvSpPr>
         <p:spPr>
           <a:xfrm>
-            <a:off x="640080" y="4626864"/>
-            <a:ext cx="10908792" cy="1280160"/>
+            <a:off x="640080" y="4937760"/>
+            <a:ext cx="10908792" cy="1371600"/>
           </a:xfrm>
           <a:prstGeom prst="rect">
             <a:avLst/>
@@ -8655,17 +8655,17 @@
           <a:p>
             <a:pPr algn="l">
               <a:lnSpc>
-                <a:spcPct val="130000"/>
-              </a:lnSpc>
-              <a:spcBef>
-                <a:spcPts val="0"/>
-              </a:spcBef>
-              <a:spcAft>
-                <a:spcPts val="0"/>
-              </a:spcAft>
-            </a:pPr>
-            <a:r>
-              <a:rPr sz="1700" b="0">
+                <a:spcPct val="125000"/>
+              </a:lnSpc>
+              <a:spcBef>
+                <a:spcPts val="0"/>
+              </a:spcBef>
+              <a:spcAft>
+                <a:spcPts val="0"/>
+              </a:spcAft>
+            </a:pPr>
+            <a:r>
+              <a:rPr sz="1500" b="0">
                 <a:solidFill>
                   <a:srgbClr val="333333"/>
                 </a:solidFill>
@@ -8673,7 +8673,7 @@
                 <a:ea typeface="微软雅黑"/>
                 <a:cs typeface="Arial"/>
               </a:rPr>
-              <a:t>① AD 与感染相关、② 感染与炎症驱动抗菌肽与 Aβ 生成、③ Aβ 本身即抗菌肽；④ 抗菌活性可计算预测、⑤ AD 组特异抗菌肽随阶段变化、⑥ 双刃剑效应；⑦ 为什么 AD 更多与 AChE–Aβ 机制落点，是本课题要回答的部分。</a:t>
+              <a:t>① AD与感染相关 ② 感染驱动抗菌肽/Aβ生成 ③ Aβ本身是抗菌肽 ④ 活性可计算预测 ⑤ AD组特异肽随阶段变化 ⑥ 双刃剑 ⑦ 正反馈环与AChE-PAS落点</a:t>
             </a:r>
           </a:p>
         </p:txBody>
@@ -8824,7 +8824,7 @@
               </a:spcAft>
             </a:pPr>
             <a:r>
-              <a:rPr sz="2600" b="1">
+              <a:rPr sz="2400" b="1">
                 <a:solidFill>
                   <a:srgbClr val="111111"/>
                 </a:solidFill>
@@ -8832,7 +8832,7 @@
                 <a:ea typeface="微软雅黑"/>
                 <a:cs typeface="Arial"/>
               </a:rPr>
-              <a:t>为什么 AD 更多：炎症—Aβ—抗菌肽构成正反馈</a:t>
+              <a:t>为什么AD更多：炎症—Aβ—抗菌肽正反馈环</a:t>
             </a:r>
           </a:p>
         </p:txBody>
@@ -8889,8 +8889,8 @@
         </p:nvSpPr>
         <p:spPr>
           <a:xfrm>
-            <a:off x="640080" y="1481328"/>
-            <a:ext cx="7223760" cy="3108960"/>
+            <a:off x="640080" y="1463040"/>
+            <a:ext cx="6858000" cy="3657600"/>
           </a:xfrm>
           <a:prstGeom prst="rect">
             <a:avLst/>
@@ -8905,17 +8905,41 @@
           <a:p>
             <a:pPr algn="l">
               <a:lnSpc>
-                <a:spcPct val="134000"/>
-              </a:lnSpc>
-              <a:spcBef>
-                <a:spcPts val="0"/>
-              </a:spcBef>
-              <a:spcAft>
-                <a:spcPts val="0"/>
-              </a:spcAft>
-            </a:pPr>
-            <a:r>
-              <a:rPr sz="1800" b="0">
+                <a:spcPct val="130000"/>
+              </a:lnSpc>
+              <a:spcBef>
+                <a:spcPts val="0"/>
+              </a:spcBef>
+              <a:spcAft>
+                <a:spcPts val="0"/>
+              </a:spcAft>
+            </a:pPr>
+            <a:r>
+              <a:rPr sz="1700" b="1">
+                <a:solidFill>
+                  <a:srgbClr val="111111"/>
+                </a:solidFill>
+                <a:latin typeface="Arial"/>
+                <a:ea typeface="微软雅黑"/>
+                <a:cs typeface="Arial"/>
+              </a:rPr>
+              <a:t>上游驱动：菌群失衡与肠屏障↑，LPS持续入血</a:t>
+            </a:r>
+          </a:p>
+          <a:p>
+            <a:pPr algn="l">
+              <a:lnSpc>
+                <a:spcPct val="125000"/>
+              </a:lnSpc>
+              <a:spcBef>
+                <a:spcPts val="600"/>
+              </a:spcBef>
+              <a:spcAft>
+                <a:spcPts val="0"/>
+              </a:spcAft>
+            </a:pPr>
+            <a:r>
+              <a:rPr sz="1500" b="0">
                 <a:solidFill>
                   <a:srgbClr val="333333"/>
                 </a:solidFill>
@@ -8923,13 +8947,61 @@
                 <a:ea typeface="微软雅黑"/>
                 <a:cs typeface="Arial"/>
               </a:rPr>
-              <a:t>菌群失衡与肠屏障通透性增加，使内毒素与病原体长期刺激宿主；</a:t>
+              <a:t>• 促炎菌 Escherichia/Shigella、Proteobacteria 富集</a:t>
             </a:r>
           </a:p>
           <a:p>
             <a:pPr algn="l">
               <a:lnSpc>
-                <a:spcPct val="134000"/>
+                <a:spcPct val="125000"/>
+              </a:lnSpc>
+              <a:spcBef>
+                <a:spcPts val="400"/>
+              </a:spcBef>
+              <a:spcAft>
+                <a:spcPts val="0"/>
+              </a:spcAft>
+            </a:pPr>
+            <a:r>
+              <a:rPr sz="1500" b="0">
+                <a:solidFill>
+                  <a:srgbClr val="333333"/>
+                </a:solidFill>
+                <a:latin typeface="Arial"/>
+                <a:ea typeface="微软雅黑"/>
+                <a:cs typeface="Arial"/>
+              </a:rPr>
+              <a:t>• 产丁酸菌 Eubacterium、Faecalibacterium 降低</a:t>
+            </a:r>
+          </a:p>
+          <a:p>
+            <a:pPr algn="l">
+              <a:lnSpc>
+                <a:spcPct val="125000"/>
+              </a:lnSpc>
+              <a:spcBef>
+                <a:spcPts val="400"/>
+              </a:spcBef>
+              <a:spcAft>
+                <a:spcPts val="0"/>
+              </a:spcAft>
+            </a:pPr>
+            <a:r>
+              <a:rPr sz="1500" b="0">
+                <a:solidFill>
+                  <a:srgbClr val="333333"/>
+                </a:solidFill>
+                <a:latin typeface="Arial"/>
+                <a:ea typeface="微软雅黑"/>
+                <a:cs typeface="Arial"/>
+              </a:rPr>
+              <a:t>• 血浆LPS约3倍，与单核活化正相关 [13,14]</a:t>
+            </a:r>
+          </a:p>
+          <a:p>
+            <a:pPr algn="l">
+              <a:lnSpc>
+                <a:spcPct val="130000"/>
               </a:lnSpc>
               <a:spcBef>
                 <a:spcPts val="1400"/>
@@ -8939,7 +9011,31 @@
               </a:spcAft>
             </a:pPr>
             <a:r>
-              <a:rPr sz="1800" b="0">
+              <a:rPr sz="1700" b="1">
+                <a:solidFill>
+                  <a:srgbClr val="111111"/>
+                </a:solidFill>
+                <a:latin typeface="Arial"/>
+                <a:ea typeface="微软雅黑"/>
+                <a:cs typeface="Arial"/>
+              </a:rPr>
+              <a:t>中游放大：TLR4/NF-κB → 促炎因子 → 上调Aβ/抗菌肽</a:t>
+            </a:r>
+          </a:p>
+          <a:p>
+            <a:pPr algn="l">
+              <a:lnSpc>
+                <a:spcPct val="125000"/>
+              </a:lnSpc>
+              <a:spcBef>
+                <a:spcPts val="600"/>
+              </a:spcBef>
+              <a:spcAft>
+                <a:spcPts val="0"/>
+              </a:spcAft>
+            </a:pPr>
+            <a:r>
+              <a:rPr sz="1500" b="0">
                 <a:solidFill>
                   <a:srgbClr val="333333"/>
                 </a:solidFill>
@@ -8947,13 +9043,13 @@
                 <a:ea typeface="微软雅黑"/>
                 <a:cs typeface="Arial"/>
               </a:rPr>
-              <a:t>经 TLR4/NF-κB 升高促炎因子，促炎因子又上调 Aβ 与抗菌肽的生成；</a:t>
+              <a:t>• LPS与Aβ均为TLR4/CD14激动剂</a:t>
             </a:r>
           </a:p>
           <a:p>
             <a:pPr algn="l">
               <a:lnSpc>
-                <a:spcPct val="134000"/>
+                <a:spcPct val="130000"/>
               </a:lnSpc>
               <a:spcBef>
                 <a:spcPts val="1400"/>
@@ -8963,7 +9059,31 @@
               </a:spcAft>
             </a:pPr>
             <a:r>
-              <a:rPr sz="1800" b="0">
+              <a:rPr sz="1700" b="1">
+                <a:solidFill>
+                  <a:srgbClr val="111111"/>
+                </a:solidFill>
+                <a:latin typeface="Arial"/>
+                <a:ea typeface="微软雅黑"/>
+                <a:cs typeface="Arial"/>
+              </a:rPr>
+              <a:t>下游循环：Aβ/抗菌肽聚集 → 小胶质活化 → 更多炎症</a:t>
+            </a:r>
+          </a:p>
+          <a:p>
+            <a:pPr algn="l">
+              <a:lnSpc>
+                <a:spcPct val="125000"/>
+              </a:lnSpc>
+              <a:spcBef>
+                <a:spcPts val="600"/>
+              </a:spcBef>
+              <a:spcAft>
+                <a:spcPts val="0"/>
+              </a:spcAft>
+            </a:pPr>
+            <a:r>
+              <a:rPr sz="1500" b="0">
                 <a:solidFill>
                   <a:srgbClr val="333333"/>
                 </a:solidFill>
@@ -8971,7 +9091,31 @@
                 <a:ea typeface="微软雅黑"/>
                 <a:cs typeface="Arial"/>
               </a:rPr>
-              <a:t>Aβ 与抗菌肽聚集、成核并激活小胶质细胞，产生更多炎症介质，循环自我加强。</a:t>
+              <a:t>• LL-37经CLIC1致ROS与神经毒性 [11]</a:t>
+            </a:r>
+          </a:p>
+          <a:p>
+            <a:pPr algn="l">
+              <a:lnSpc>
+                <a:spcPct val="125000"/>
+              </a:lnSpc>
+              <a:spcBef>
+                <a:spcPts val="400"/>
+              </a:spcBef>
+              <a:spcAft>
+                <a:spcPts val="0"/>
+              </a:spcAft>
+            </a:pPr>
+            <a:r>
+              <a:rPr sz="1500" b="0">
+                <a:solidFill>
+                  <a:srgbClr val="333333"/>
+                </a:solidFill>
+                <a:latin typeface="Arial"/>
+                <a:ea typeface="微软雅黑"/>
+                <a:cs typeface="Arial"/>
+              </a:rPr>
+              <a:t>• AChE-PAS促纤维化 [27-32]</a:t>
             </a:r>
           </a:p>
         </p:txBody>
@@ -8984,17 +9128,19 @@
         </p:nvSpPr>
         <p:spPr>
           <a:xfrm>
-            <a:off x="8229600" y="1481328"/>
-            <a:ext cx="12700" cy="3017520"/>
+            <a:off x="7863840" y="1463040"/>
+            <a:ext cx="3657600" cy="3657600"/>
           </a:xfrm>
           <a:prstGeom prst="rect">
             <a:avLst/>
           </a:prstGeom>
           <a:solidFill>
-            <a:srgbClr val="DDDDDA"/>
+            <a:srgbClr val="F7F7F5"/>
           </a:solidFill>
-          <a:ln>
-            <a:noFill/>
+          <a:ln w="9525">
+            <a:solidFill>
+              <a:srgbClr val="DDDDDA"/>
+            </a:solidFill>
           </a:ln>
           <a:effectLst/>
         </p:spPr>
@@ -9028,8 +9174,8 @@
         </p:nvSpPr>
         <p:spPr>
           <a:xfrm>
-            <a:off x="8549640" y="1481328"/>
-            <a:ext cx="2999232" cy="3108960"/>
+            <a:off x="8046720" y="1554480"/>
+            <a:ext cx="3291840" cy="3474720"/>
           </a:xfrm>
           <a:prstGeom prst="rect">
             <a:avLst/>
@@ -9044,17 +9190,137 @@
           <a:p>
             <a:pPr algn="l">
               <a:lnSpc>
-                <a:spcPct val="130000"/>
-              </a:lnSpc>
-              <a:spcBef>
-                <a:spcPts val="0"/>
-              </a:spcBef>
-              <a:spcAft>
-                <a:spcPts val="0"/>
-              </a:spcAft>
-            </a:pPr>
-            <a:r>
-              <a:rPr sz="1600" b="0">
+                <a:spcPct val="110000"/>
+              </a:lnSpc>
+              <a:spcBef>
+                <a:spcPts val="0"/>
+              </a:spcBef>
+              <a:spcAft>
+                <a:spcPts val="0"/>
+              </a:spcAft>
+            </a:pPr>
+            <a:r>
+              <a:rPr sz="1600" b="1">
+                <a:solidFill>
+                  <a:srgbClr val="B03A2E"/>
+                </a:solidFill>
+                <a:latin typeface="Arial"/>
+                <a:ea typeface="微软雅黑"/>
+                <a:cs typeface="Arial"/>
+              </a:rPr>
+              <a:t>抗菌保护假说</a:t>
+            </a:r>
+          </a:p>
+          <a:p>
+            <a:pPr algn="l">
+              <a:lnSpc>
+                <a:spcPct val="125000"/>
+              </a:lnSpc>
+              <a:spcBef>
+                <a:spcPts val="800"/>
+              </a:spcBef>
+              <a:spcAft>
+                <a:spcPts val="0"/>
+              </a:spcAft>
+            </a:pPr>
+            <a:r>
+              <a:rPr sz="1500" b="0">
+                <a:solidFill>
+                  <a:srgbClr val="333333"/>
+                </a:solidFill>
+                <a:latin typeface="Arial"/>
+                <a:ea typeface="微软雅黑"/>
+                <a:cs typeface="Arial"/>
+              </a:rPr>
+              <a:t>AD病理部分源于有益的先天免疫反应在长期失衡后被放大 [3]</a:t>
+            </a:r>
+          </a:p>
+          <a:p>
+            <a:pPr algn="l">
+              <a:lnSpc>
+                <a:spcPct val="110000"/>
+              </a:lnSpc>
+              <a:spcBef>
+                <a:spcPts val="1400"/>
+              </a:spcBef>
+              <a:spcAft>
+                <a:spcPts val="0"/>
+              </a:spcAft>
+            </a:pPr>
+            <a:r>
+              <a:rPr sz="1600" b="1">
+                <a:solidFill>
+                  <a:srgbClr val="2F5D62"/>
+                </a:solidFill>
+                <a:latin typeface="Arial"/>
+                <a:ea typeface="微软雅黑"/>
+                <a:cs typeface="Arial"/>
+              </a:rPr>
+              <a:t>双刃剑</a:t>
+            </a:r>
+          </a:p>
+          <a:p>
+            <a:pPr algn="l">
+              <a:lnSpc>
+                <a:spcPct val="125000"/>
+              </a:lnSpc>
+              <a:spcBef>
+                <a:spcPts val="800"/>
+              </a:spcBef>
+              <a:spcAft>
+                <a:spcPts val="0"/>
+              </a:spcAft>
+            </a:pPr>
+            <a:r>
+              <a:rPr sz="1500" b="0">
+                <a:solidFill>
+                  <a:srgbClr val="333333"/>
+                </a:solidFill>
+                <a:latin typeface="Arial"/>
+                <a:ea typeface="微软雅黑"/>
+                <a:cs typeface="Arial"/>
+              </a:rPr>
+              <a:t>抑制感染（生理）vs 促进聚集与炎症（病理）</a:t>
+            </a:r>
+          </a:p>
+          <a:p>
+            <a:pPr algn="l">
+              <a:lnSpc>
+                <a:spcPct val="110000"/>
+              </a:lnSpc>
+              <a:spcBef>
+                <a:spcPts val="1400"/>
+              </a:spcBef>
+              <a:spcAft>
+                <a:spcPts val="0"/>
+              </a:spcAft>
+            </a:pPr>
+            <a:r>
+              <a:rPr sz="1600" b="1">
+                <a:solidFill>
+                  <a:srgbClr val="2F5D62"/>
+                </a:solidFill>
+                <a:latin typeface="Arial"/>
+                <a:ea typeface="微软雅黑"/>
+                <a:cs typeface="Arial"/>
+              </a:rPr>
+              <a:t>口径</a:t>
+            </a:r>
+          </a:p>
+          <a:p>
+            <a:pPr algn="l">
+              <a:lnSpc>
+                <a:spcPct val="125000"/>
+              </a:lnSpc>
+              <a:spcBef>
+                <a:spcPts val="800"/>
+              </a:spcBef>
+              <a:spcAft>
+                <a:spcPts val="0"/>
+              </a:spcAft>
+            </a:pPr>
+            <a:r>
+              <a:rPr sz="1500" b="0">
                 <a:solidFill>
                   <a:srgbClr val="777777"/>
                 </a:solidFill>
@@ -9062,103 +9328,7 @@
                 <a:ea typeface="微软雅黑"/>
                 <a:cs typeface="Arial"/>
               </a:rPr>
-              <a:t>表述口径：</a:t>
-            </a:r>
-          </a:p>
-          <a:p>
-            <a:pPr algn="l">
-              <a:lnSpc>
-                <a:spcPct val="130000"/>
-              </a:lnSpc>
-              <a:spcBef>
-                <a:spcPts val="1200"/>
-              </a:spcBef>
-              <a:spcAft>
-                <a:spcPts val="0"/>
-              </a:spcAft>
-            </a:pPr>
-            <a:r>
-              <a:rPr sz="1600" b="0">
-                <a:solidFill>
-                  <a:srgbClr val="777777"/>
-                </a:solidFill>
-                <a:latin typeface="Arial"/>
-                <a:ea typeface="微软雅黑"/>
-                <a:cs typeface="Arial"/>
-              </a:rPr>
-              <a:t>抗体外证据为主；</a:t>
-            </a:r>
-          </a:p>
-          <a:p>
-            <a:pPr algn="l">
-              <a:lnSpc>
-                <a:spcPct val="130000"/>
-              </a:lnSpc>
-              <a:spcBef>
-                <a:spcPts val="1200"/>
-              </a:spcBef>
-              <a:spcAft>
-                <a:spcPts val="0"/>
-              </a:spcAft>
-            </a:pPr>
-            <a:r>
-              <a:rPr sz="1600" b="0">
-                <a:solidFill>
-                  <a:srgbClr val="777777"/>
-                </a:solidFill>
-                <a:latin typeface="Arial"/>
-                <a:ea typeface="微软雅黑"/>
-                <a:cs typeface="Arial"/>
-              </a:rPr>
-              <a:t>区分宿主来源与</a:t>
-            </a:r>
-          </a:p>
-          <a:p>
-            <a:pPr algn="l">
-              <a:lnSpc>
-                <a:spcPct val="130000"/>
-              </a:lnSpc>
-              <a:spcBef>
-                <a:spcPts val="1200"/>
-              </a:spcBef>
-              <a:spcAft>
-                <a:spcPts val="0"/>
-              </a:spcAft>
-            </a:pPr>
-            <a:r>
-              <a:rPr sz="1600" b="0">
-                <a:solidFill>
-                  <a:srgbClr val="777777"/>
-                </a:solidFill>
-                <a:latin typeface="Arial"/>
-                <a:ea typeface="微软雅黑"/>
-                <a:cs typeface="Arial"/>
-              </a:rPr>
-              <a:t>微生物来源、局部</a:t>
-            </a:r>
-          </a:p>
-          <a:p>
-            <a:pPr algn="l">
-              <a:lnSpc>
-                <a:spcPct val="130000"/>
-              </a:lnSpc>
-              <a:spcBef>
-                <a:spcPts val="1200"/>
-              </a:spcBef>
-              <a:spcAft>
-                <a:spcPts val="0"/>
-              </a:spcAft>
-            </a:pPr>
-            <a:r>
-              <a:rPr sz="1600" b="0">
-                <a:solidFill>
-                  <a:srgbClr val="777777"/>
-                </a:solidFill>
-                <a:latin typeface="Arial"/>
-                <a:ea typeface="微软雅黑"/>
-                <a:cs typeface="Arial"/>
-              </a:rPr>
-              <a:t>与系统、阶段差异。</a:t>
+              <a:t>区分宿主/微生物源、局部/系统、阶段</a:t>
             </a:r>
           </a:p>
         </p:txBody>
@@ -9309,7 +9479,7 @@
               </a:spcAft>
             </a:pPr>
             <a:r>
-              <a:rPr sz="2500" b="1">
+              <a:rPr sz="2300" b="1">
                 <a:solidFill>
                   <a:srgbClr val="111111"/>
                 </a:solidFill>
@@ -9317,7 +9487,7 @@
                 <a:ea typeface="微软雅黑"/>
                 <a:cs typeface="Arial"/>
               </a:rPr>
-              <a:t>机制落点：AChE–Aβ 复合物与候选肽的三个假设</a:t>
+              <a:t>机制落点：AChE–Aβ复合物与三个可检验假设（多文献）</a:t>
             </a:r>
           </a:p>
         </p:txBody>
@@ -9383,7 +9553,7 @@
         <p:spPr>
           <a:xfrm>
             <a:off x="640080" y="1188720"/>
-            <a:ext cx="7863840" cy="3943173"/>
+            <a:ext cx="6564890" cy="3291840"/>
           </a:xfrm>
           <a:prstGeom prst="rect">
             <a:avLst/>
@@ -9392,14 +9562,60 @@
       </p:pic>
       <p:sp>
         <p:nvSpPr>
-          <p:cNvPr id="5" name="TextBox 4"/>
+          <p:cNvPr id="5" name="Rectangle 4"/>
+          <p:cNvSpPr/>
+          <p:nvPr/>
+        </p:nvSpPr>
+        <p:spPr>
+          <a:xfrm>
+            <a:off x="7863840" y="1325880"/>
+            <a:ext cx="3657600" cy="1234440"/>
+          </a:xfrm>
+          <a:prstGeom prst="rect">
+            <a:avLst/>
+          </a:prstGeom>
+          <a:solidFill>
+            <a:srgbClr val="F7F7F5"/>
+          </a:solidFill>
+          <a:ln w="9525">
+            <a:solidFill>
+              <a:srgbClr val="2F5D62"/>
+            </a:solidFill>
+          </a:ln>
+          <a:effectLst/>
+        </p:spPr>
+        <p:style>
+          <a:lnRef idx="1">
+            <a:schemeClr val="accent1"/>
+          </a:lnRef>
+          <a:fillRef idx="3">
+            <a:schemeClr val="accent1"/>
+          </a:fillRef>
+          <a:effectRef idx="2">
+            <a:schemeClr val="accent1"/>
+          </a:effectRef>
+          <a:fontRef idx="minor">
+            <a:schemeClr val="lt1"/>
+          </a:fontRef>
+        </p:style>
+        <p:txBody>
+          <a:bodyPr rtlCol="0" anchor="ctr"/>
+          <a:lstStyle/>
+          <a:p>
+            <a:pPr algn="ctr"/>
+          </a:p>
+        </p:txBody>
+      </p:sp>
+      <p:sp>
+        <p:nvSpPr>
+          <p:cNvPr id="6" name="TextBox 5"/>
           <p:cNvSpPr txBox="1"/>
           <p:nvPr/>
         </p:nvSpPr>
         <p:spPr>
           <a:xfrm>
-            <a:off x="8549640" y="1188720"/>
-            <a:ext cx="2999232" cy="4480560"/>
+            <a:off x="8046720" y="1371600"/>
+            <a:ext cx="3291840" cy="1143000"/>
           </a:xfrm>
           <a:prstGeom prst="rect">
             <a:avLst/>
@@ -9426,29 +9642,29 @@
             <a:r>
               <a:rPr sz="1600" b="1">
                 <a:solidFill>
-                  <a:srgbClr val="2F5D62"/>
-                </a:solidFill>
-                <a:latin typeface="Arial"/>
-                <a:ea typeface="微软雅黑"/>
-                <a:cs typeface="Arial"/>
-              </a:rPr>
-              <a:t>解读</a:t>
+                  <a:srgbClr val="111111"/>
+                </a:solidFill>
+                <a:latin typeface="Arial"/>
+                <a:ea typeface="微软雅黑"/>
+                <a:cs typeface="Arial"/>
+              </a:rPr>
+              <a:t>H1 竞争PAS</a:t>
             </a:r>
           </a:p>
           <a:p>
             <a:pPr algn="l">
               <a:lnSpc>
-                <a:spcPct val="130000"/>
-              </a:lnSpc>
-              <a:spcBef>
-                <a:spcPts val="800"/>
-              </a:spcBef>
-              <a:spcAft>
-                <a:spcPts val="0"/>
-              </a:spcAft>
-            </a:pPr>
-            <a:r>
-              <a:rPr sz="1600" b="0">
+                <a:spcPct val="120000"/>
+              </a:lnSpc>
+              <a:spcBef>
+                <a:spcPts val="400"/>
+              </a:spcBef>
+              <a:spcAft>
+                <a:spcPts val="0"/>
+              </a:spcAft>
+            </a:pPr>
+            <a:r>
+              <a:rPr sz="1500" b="0">
                 <a:solidFill>
                   <a:srgbClr val="333333"/>
                 </a:solidFill>
@@ -9456,21 +9672,91 @@
                 <a:ea typeface="微软雅黑"/>
                 <a:cs typeface="Arial"/>
               </a:rPr>
-              <a:t>AChE 的 PAS 是 Aβ 聚集的成核中心；分子动力学显示复合物在 1 μs 内稳定，Aβ 主要停留于 344–361 区段，且该区段不受双位点抑制剂位阻。由此提出：H1 竞争 PAS 减少成核、H2 结合 Aβ 改变聚集路径、H3 膜水平影响炎症信号；以对接与动力学给优先序，以抑菌与酶活实验验证。</a:t>
-            </a:r>
-          </a:p>
-        </p:txBody>
-      </p:sp>
-      <p:sp>
-        <p:nvSpPr>
-          <p:cNvPr id="6" name="TextBox 5"/>
+              <a:t>结合PAS，减少AChE诱导成核</a:t>
+            </a:r>
+          </a:p>
+          <a:p>
+            <a:pPr algn="l">
+              <a:lnSpc>
+                <a:spcPct val="120000"/>
+              </a:lnSpc>
+              <a:spcBef>
+                <a:spcPts val="400"/>
+              </a:spcBef>
+              <a:spcAft>
+                <a:spcPts val="0"/>
+              </a:spcAft>
+            </a:pPr>
+            <a:r>
+              <a:rPr sz="1500" b="0">
+                <a:solidFill>
+                  <a:srgbClr val="777777"/>
+                </a:solidFill>
+                <a:latin typeface="Arial"/>
+                <a:ea typeface="微软雅黑"/>
+                <a:cs typeface="Arial"/>
+              </a:rPr>
+              <a:t>对接+MD；propidium竞争；酶活</a:t>
+            </a:r>
+          </a:p>
+        </p:txBody>
+      </p:sp>
+      <p:sp>
+        <p:nvSpPr>
+          <p:cNvPr id="7" name="Rectangle 6"/>
+          <p:cNvSpPr/>
+          <p:nvPr/>
+        </p:nvSpPr>
+        <p:spPr>
+          <a:xfrm>
+            <a:off x="7863840" y="2743200"/>
+            <a:ext cx="3657600" cy="1234440"/>
+          </a:xfrm>
+          <a:prstGeom prst="rect">
+            <a:avLst/>
+          </a:prstGeom>
+          <a:solidFill>
+            <a:srgbClr val="F7F7F5"/>
+          </a:solidFill>
+          <a:ln w="9525">
+            <a:solidFill>
+              <a:srgbClr val="2F5D62"/>
+            </a:solidFill>
+          </a:ln>
+          <a:effectLst/>
+        </p:spPr>
+        <p:style>
+          <a:lnRef idx="1">
+            <a:schemeClr val="accent1"/>
+          </a:lnRef>
+          <a:fillRef idx="3">
+            <a:schemeClr val="accent1"/>
+          </a:fillRef>
+          <a:effectRef idx="2">
+            <a:schemeClr val="accent1"/>
+          </a:effectRef>
+          <a:fontRef idx="minor">
+            <a:schemeClr val="lt1"/>
+          </a:fontRef>
+        </p:style>
+        <p:txBody>
+          <a:bodyPr rtlCol="0" anchor="ctr"/>
+          <a:lstStyle/>
+          <a:p>
+            <a:pPr algn="ctr"/>
+          </a:p>
+        </p:txBody>
+      </p:sp>
+      <p:sp>
+        <p:nvSpPr>
+          <p:cNvPr id="8" name="TextBox 7"/>
           <p:cNvSpPr txBox="1"/>
           <p:nvPr/>
         </p:nvSpPr>
         <p:spPr>
           <a:xfrm>
-            <a:off x="640080" y="6419088"/>
-            <a:ext cx="8778240" cy="310896"/>
+            <a:off x="8046720" y="2788920"/>
+            <a:ext cx="3291840" cy="1143000"/>
           </a:xfrm>
           <a:prstGeom prst="rect">
             <a:avLst/>
@@ -9485,6 +9771,289 @@
           <a:p>
             <a:pPr algn="l">
               <a:lnSpc>
+                <a:spcPct val="110000"/>
+              </a:lnSpc>
+              <a:spcBef>
+                <a:spcPts val="0"/>
+              </a:spcBef>
+              <a:spcAft>
+                <a:spcPts val="0"/>
+              </a:spcAft>
+            </a:pPr>
+            <a:r>
+              <a:rPr sz="1600" b="1">
+                <a:solidFill>
+                  <a:srgbClr val="111111"/>
+                </a:solidFill>
+                <a:latin typeface="Arial"/>
+                <a:ea typeface="微软雅黑"/>
+                <a:cs typeface="Arial"/>
+              </a:rPr>
+              <a:t>H2 结合Aβ</a:t>
+            </a:r>
+          </a:p>
+          <a:p>
+            <a:pPr algn="l">
+              <a:lnSpc>
+                <a:spcPct val="120000"/>
+              </a:lnSpc>
+              <a:spcBef>
+                <a:spcPts val="400"/>
+              </a:spcBef>
+              <a:spcAft>
+                <a:spcPts val="0"/>
+              </a:spcAft>
+            </a:pPr>
+            <a:r>
+              <a:rPr sz="1500" b="0">
+                <a:solidFill>
+                  <a:srgbClr val="333333"/>
+                </a:solidFill>
+                <a:latin typeface="Arial"/>
+                <a:ea typeface="微软雅黑"/>
+                <a:cs typeface="Arial"/>
+              </a:rPr>
+              <a:t>结合Aβ，改变聚集路径</a:t>
+            </a:r>
+          </a:p>
+          <a:p>
+            <a:pPr algn="l">
+              <a:lnSpc>
+                <a:spcPct val="120000"/>
+              </a:lnSpc>
+              <a:spcBef>
+                <a:spcPts val="400"/>
+              </a:spcBef>
+              <a:spcAft>
+                <a:spcPts val="0"/>
+              </a:spcAft>
+            </a:pPr>
+            <a:r>
+              <a:rPr sz="1500" b="0">
+                <a:solidFill>
+                  <a:srgbClr val="777777"/>
+                </a:solidFill>
+                <a:latin typeface="Arial"/>
+                <a:ea typeface="微软雅黑"/>
+                <a:cs typeface="Arial"/>
+              </a:rPr>
+              <a:t>ThT+电镜/AFM；MD残基；参照[10-12]</a:t>
+            </a:r>
+          </a:p>
+        </p:txBody>
+      </p:sp>
+      <p:sp>
+        <p:nvSpPr>
+          <p:cNvPr id="9" name="Rectangle 8"/>
+          <p:cNvSpPr/>
+          <p:nvPr/>
+        </p:nvSpPr>
+        <p:spPr>
+          <a:xfrm>
+            <a:off x="7863840" y="4160520"/>
+            <a:ext cx="3657600" cy="1234440"/>
+          </a:xfrm>
+          <a:prstGeom prst="rect">
+            <a:avLst/>
+          </a:prstGeom>
+          <a:solidFill>
+            <a:srgbClr val="F7F7F5"/>
+          </a:solidFill>
+          <a:ln w="9525">
+            <a:solidFill>
+              <a:srgbClr val="B03A2E"/>
+            </a:solidFill>
+          </a:ln>
+          <a:effectLst/>
+        </p:spPr>
+        <p:style>
+          <a:lnRef idx="1">
+            <a:schemeClr val="accent1"/>
+          </a:lnRef>
+          <a:fillRef idx="3">
+            <a:schemeClr val="accent1"/>
+          </a:fillRef>
+          <a:effectRef idx="2">
+            <a:schemeClr val="accent1"/>
+          </a:effectRef>
+          <a:fontRef idx="minor">
+            <a:schemeClr val="lt1"/>
+          </a:fontRef>
+        </p:style>
+        <p:txBody>
+          <a:bodyPr rtlCol="0" anchor="ctr"/>
+          <a:lstStyle/>
+          <a:p>
+            <a:pPr algn="ctr"/>
+          </a:p>
+        </p:txBody>
+      </p:sp>
+      <p:sp>
+        <p:nvSpPr>
+          <p:cNvPr id="10" name="TextBox 9"/>
+          <p:cNvSpPr txBox="1"/>
+          <p:nvPr/>
+        </p:nvSpPr>
+        <p:spPr>
+          <a:xfrm>
+            <a:off x="8046720" y="4206240"/>
+            <a:ext cx="3291840" cy="1143000"/>
+          </a:xfrm>
+          <a:prstGeom prst="rect">
+            <a:avLst/>
+          </a:prstGeom>
+          <a:noFill/>
+        </p:spPr>
+        <p:txBody>
+          <a:bodyPr wrap="square" anchor="t" lIns="27432" rIns="27432" tIns="0" bIns="0">
+            <a:spAutoFit/>
+          </a:bodyPr>
+          <a:lstStyle/>
+          <a:p>
+            <a:pPr algn="l">
+              <a:lnSpc>
+                <a:spcPct val="110000"/>
+              </a:lnSpc>
+              <a:spcBef>
+                <a:spcPts val="0"/>
+              </a:spcBef>
+              <a:spcAft>
+                <a:spcPts val="0"/>
+              </a:spcAft>
+            </a:pPr>
+            <a:r>
+              <a:rPr sz="1600" b="1">
+                <a:solidFill>
+                  <a:srgbClr val="111111"/>
+                </a:solidFill>
+                <a:latin typeface="Arial"/>
+                <a:ea typeface="微软雅黑"/>
+                <a:cs typeface="Arial"/>
+              </a:rPr>
+              <a:t>H3 膜水平</a:t>
+            </a:r>
+          </a:p>
+          <a:p>
+            <a:pPr algn="l">
+              <a:lnSpc>
+                <a:spcPct val="120000"/>
+              </a:lnSpc>
+              <a:spcBef>
+                <a:spcPts val="400"/>
+              </a:spcBef>
+              <a:spcAft>
+                <a:spcPts val="0"/>
+              </a:spcAft>
+            </a:pPr>
+            <a:r>
+              <a:rPr sz="1500" b="0">
+                <a:solidFill>
+                  <a:srgbClr val="333333"/>
+                </a:solidFill>
+                <a:latin typeface="Arial"/>
+                <a:ea typeface="微软雅黑"/>
+                <a:cs typeface="Arial"/>
+              </a:rPr>
+              <a:t>影响膜互作与小胶质识别</a:t>
+            </a:r>
+          </a:p>
+          <a:p>
+            <a:pPr algn="l">
+              <a:lnSpc>
+                <a:spcPct val="120000"/>
+              </a:lnSpc>
+              <a:spcBef>
+                <a:spcPts val="400"/>
+              </a:spcBef>
+              <a:spcAft>
+                <a:spcPts val="0"/>
+              </a:spcAft>
+            </a:pPr>
+            <a:r>
+              <a:rPr sz="1500" b="0">
+                <a:solidFill>
+                  <a:srgbClr val="777777"/>
+                </a:solidFill>
+                <a:latin typeface="Arial"/>
+                <a:ea typeface="微软雅黑"/>
+                <a:cs typeface="Arial"/>
+              </a:rPr>
+              <a:t>脂膜MD+炎症因子；参照[11]</a:t>
+            </a:r>
+          </a:p>
+        </p:txBody>
+      </p:sp>
+      <p:sp>
+        <p:nvSpPr>
+          <p:cNvPr id="11" name="TextBox 10"/>
+          <p:cNvSpPr txBox="1"/>
+          <p:nvPr/>
+        </p:nvSpPr>
+        <p:spPr>
+          <a:xfrm>
+            <a:off x="640080" y="4846320"/>
+            <a:ext cx="10908792" cy="548640"/>
+          </a:xfrm>
+          <a:prstGeom prst="rect">
+            <a:avLst/>
+          </a:prstGeom>
+          <a:noFill/>
+        </p:spPr>
+        <p:txBody>
+          <a:bodyPr wrap="square" anchor="t" lIns="27432" rIns="27432" tIns="0" bIns="0">
+            <a:spAutoFit/>
+          </a:bodyPr>
+          <a:lstStyle/>
+          <a:p>
+            <a:pPr algn="l">
+              <a:lnSpc>
+                <a:spcPct val="120000"/>
+              </a:lnSpc>
+              <a:spcBef>
+                <a:spcPts val="0"/>
+              </a:spcBef>
+              <a:spcAft>
+                <a:spcPts val="0"/>
+              </a:spcAft>
+            </a:pPr>
+            <a:r>
+              <a:rPr sz="1500" b="0">
+                <a:solidFill>
+                  <a:srgbClr val="777777"/>
+                </a:solidFill>
+                <a:latin typeface="Arial"/>
+                <a:ea typeface="微软雅黑"/>
+                <a:cs typeface="Arial"/>
+              </a:rPr>
+              <a:t>文献链：Inestrosa 1996[27] → De Ferrari 2001[29] → Inestrosa 2008[30] → Atanasova 2020 MD[32]，344-361为第二界面</a:t>
+            </a:r>
+          </a:p>
+        </p:txBody>
+      </p:sp>
+      <p:sp>
+        <p:nvSpPr>
+          <p:cNvPr id="12" name="TextBox 11"/>
+          <p:cNvSpPr txBox="1"/>
+          <p:nvPr/>
+        </p:nvSpPr>
+        <p:spPr>
+          <a:xfrm>
+            <a:off x="640080" y="6419088"/>
+            <a:ext cx="8778240" cy="310896"/>
+          </a:xfrm>
+          <a:prstGeom prst="rect">
+            <a:avLst/>
+          </a:prstGeom>
+          <a:noFill/>
+        </p:spPr>
+        <p:txBody>
+          <a:bodyPr wrap="square" anchor="t" lIns="27432" rIns="27432" tIns="0" bIns="0">
+            <a:spAutoFit/>
+          </a:bodyPr>
+          <a:lstStyle/>
+          <a:p>
+            <a:pPr algn="l">
+              <a:lnSpc>
                 <a:spcPct val="100000"/>
               </a:lnSpc>
               <a:spcBef>
@@ -9510,7 +10079,7 @@
       </p:sp>
       <p:sp>
         <p:nvSpPr>
-          <p:cNvPr id="7" name="TextBox 6"/>
+          <p:cNvPr id="13" name="TextBox 12"/>
           <p:cNvSpPr txBox="1"/>
           <p:nvPr/>
         </p:nvSpPr>
@@ -10044,7 +10613,7 @@
               </a:spcAft>
             </a:pPr>
             <a:r>
-              <a:rPr sz="2500" b="1">
+              <a:rPr sz="2400" b="1">
                 <a:solidFill>
                   <a:srgbClr val="111111"/>
                 </a:solidFill>
@@ -10052,7 +10621,7 @@
                 <a:ea typeface="微软雅黑"/>
                 <a:cs typeface="Arial"/>
               </a:rPr>
-              <a:t>证据到哪一步：分级与验证路径</a:t>
+              <a:t>证据分级与抗菌活性预测的文献基础</a:t>
             </a:r>
           </a:p>
         </p:txBody>
@@ -10110,8 +10679,8 @@
           <p:nvPr/>
         </p:nvGraphicFramePr>
         <p:xfrm>
-          <a:off x="640080" y="1234440"/>
-          <a:ext cx="10972800" cy="3328416"/>
+          <a:off x="640080" y="1280160"/>
+          <a:ext cx="7132320" cy="2926080"/>
         </p:xfrm>
         <a:graphic>
           <a:graphicData uri="http://schemas.openxmlformats.org/drawingml/2006/table">
@@ -10120,11 +10689,11 @@
                 <a:tableStyleId>{5C22544A-7EE6-4342-B048-85BDC9FD1C3A}</a:tableStyleId>
               </a:tblPr>
               <a:tblGrid>
-                <a:gridCol w="4206240"/>
                 <a:gridCol w="3108960"/>
-                <a:gridCol w="3657600"/>
+                <a:gridCol w="1645920"/>
+                <a:gridCol w="2377440"/>
               </a:tblGrid>
-              <a:tr h="475488">
+              <a:tr h="418011">
                 <a:tc>
                   <a:txBody>
                     <a:bodyPr/>
@@ -10185,7 +10754,7 @@
                           <a:ea typeface="微软雅黑"/>
                           <a:cs typeface="Arial"/>
                         </a:rPr>
-                        <a:t>证据强度</a:t>
+                        <a:t>强度</a:t>
                       </a:r>
                     </a:p>
                   </a:txBody>
@@ -10220,7 +10789,7 @@
                           <a:ea typeface="微软雅黑"/>
                           <a:cs typeface="Arial"/>
                         </a:rPr>
-                        <a:t>与本课题的关系</a:t>
+                        <a:t>来源</a:t>
                       </a:r>
                     </a:p>
                   </a:txBody>
@@ -10231,7 +10800,7 @@
                   </a:tcPr>
                 </a:tc>
               </a:tr>
-              <a:tr h="475488">
+              <a:tr h="418011">
                 <a:tc>
                   <a:txBody>
                     <a:bodyPr/>
@@ -10239,7 +10808,7 @@
                     <a:p>
                       <a:pPr algn="l">
                         <a:lnSpc>
-                          <a:spcPct val="110000"/>
+                          <a:spcPct val="105000"/>
                         </a:lnSpc>
                         <a:spcBef>
                           <a:spcPts val="0"/>
@@ -10257,7 +10826,7 @@
                           <a:ea typeface="微软雅黑"/>
                           <a:cs typeface="Arial"/>
                         </a:rPr>
-                        <a:t>Aβ 具抗菌活性，AD 脑匀浆活性更高</a:t>
+                        <a:t>Aβ抗菌活性 AD脑&gt;对照</a:t>
                       </a:r>
                     </a:p>
                   </a:txBody>
@@ -10270,7 +10839,7 @@
                     <a:p>
                       <a:pPr algn="l">
                         <a:lnSpc>
-                          <a:spcPct val="110000"/>
+                          <a:spcPct val="105000"/>
                         </a:lnSpc>
                         <a:spcBef>
                           <a:spcPts val="0"/>
@@ -10288,7 +10857,7 @@
                           <a:ea typeface="微软雅黑"/>
                           <a:cs typeface="Arial"/>
                         </a:rPr>
-                        <a:t>强：体外 + 人脑组织</a:t>
+                        <a:t>强</a:t>
                       </a:r>
                     </a:p>
                   </a:txBody>
@@ -10301,7 +10870,7 @@
                     <a:p>
                       <a:pPr algn="l">
                         <a:lnSpc>
-                          <a:spcPct val="110000"/>
+                          <a:spcPct val="105000"/>
                         </a:lnSpc>
                         <a:spcBef>
                           <a:spcPts val="0"/>
@@ -10319,14 +10888,14 @@
                           <a:ea typeface="微软雅黑"/>
                           <a:cs typeface="Arial"/>
                         </a:rPr>
-                        <a:t>提供抗菌肽研究的出发点</a:t>
+                        <a:t>Soscia 2010 [1]</a:t>
                       </a:r>
                     </a:p>
                   </a:txBody>
                   <a:tcPr/>
                 </a:tc>
               </a:tr>
-              <a:tr h="475488">
+              <a:tr h="418011">
                 <a:tc>
                   <a:txBody>
                     <a:bodyPr/>
@@ -10334,7 +10903,7 @@
                     <a:p>
                       <a:pPr algn="l">
                         <a:lnSpc>
-                          <a:spcPct val="110000"/>
+                          <a:spcPct val="105000"/>
                         </a:lnSpc>
                         <a:spcBef>
                           <a:spcPts val="0"/>
@@ -10352,7 +10921,7 @@
                           <a:ea typeface="微软雅黑"/>
                           <a:cs typeface="Arial"/>
                         </a:rPr>
-                        <a:t>AD 脑内宿主抗菌肽上调</a:t>
+                        <a:t>Aβ保护抗感染 寡聚化必需</a:t>
                       </a:r>
                     </a:p>
                   </a:txBody>
@@ -10365,7 +10934,7 @@
                     <a:p>
                       <a:pPr algn="l">
                         <a:lnSpc>
-                          <a:spcPct val="110000"/>
+                          <a:spcPct val="105000"/>
                         </a:lnSpc>
                         <a:spcBef>
                           <a:spcPts val="0"/>
@@ -10383,7 +10952,7 @@
                           <a:ea typeface="微软雅黑"/>
                           <a:cs typeface="Arial"/>
                         </a:rPr>
-                        <a:t>中—强：尸检组织，样本有限</a:t>
+                        <a:t>强</a:t>
                       </a:r>
                     </a:p>
                   </a:txBody>
@@ -10396,7 +10965,7 @@
                     <a:p>
                       <a:pPr algn="l">
                         <a:lnSpc>
-                          <a:spcPct val="110000"/>
+                          <a:spcPct val="105000"/>
                         </a:lnSpc>
                         <a:spcBef>
                           <a:spcPts val="0"/>
@@ -10414,14 +10983,14 @@
                           <a:ea typeface="微软雅黑"/>
                           <a:cs typeface="Arial"/>
                         </a:rPr>
-                        <a:t>作为宿主来源的参照系</a:t>
+                        <a:t>Kumar 2016 [2]</a:t>
                       </a:r>
                     </a:p>
                   </a:txBody>
                   <a:tcPr/>
                 </a:tc>
               </a:tr>
-              <a:tr h="475488">
+              <a:tr h="418011">
                 <a:tc>
                   <a:txBody>
                     <a:bodyPr/>
@@ -10429,7 +10998,7 @@
                     <a:p>
                       <a:pPr algn="l">
                         <a:lnSpc>
-                          <a:spcPct val="110000"/>
+                          <a:spcPct val="105000"/>
                         </a:lnSpc>
                         <a:spcBef>
                           <a:spcPts val="0"/>
@@ -10447,7 +11016,7 @@
                           <a:ea typeface="微软雅黑"/>
                           <a:cs typeface="Arial"/>
                         </a:rPr>
-                        <a:t>AChE 经 PAS 促进 Aβ 聚集</a:t>
+                        <a:t>宿主AMP上调 hBD-1/LL-37</a:t>
                       </a:r>
                     </a:p>
                   </a:txBody>
@@ -10460,7 +11029,7 @@
                     <a:p>
                       <a:pPr algn="l">
                         <a:lnSpc>
-                          <a:spcPct val="110000"/>
+                          <a:spcPct val="105000"/>
                         </a:lnSpc>
                         <a:spcBef>
                           <a:spcPts val="0"/>
@@ -10478,7 +11047,7 @@
                           <a:ea typeface="微软雅黑"/>
                           <a:cs typeface="Arial"/>
                         </a:rPr>
-                        <a:t>强：体外动力学 + 位点阻断</a:t>
+                        <a:t>中-强</a:t>
                       </a:r>
                     </a:p>
                   </a:txBody>
@@ -10491,7 +11060,7 @@
                     <a:p>
                       <a:pPr algn="l">
                         <a:lnSpc>
-                          <a:spcPct val="110000"/>
+                          <a:spcPct val="105000"/>
                         </a:lnSpc>
                         <a:spcBef>
                           <a:spcPts val="0"/>
@@ -10509,14 +11078,14 @@
                           <a:ea typeface="微软雅黑"/>
                           <a:cs typeface="Arial"/>
                         </a:rPr>
-                        <a:t>机制关联的参照体系</a:t>
+                        <a:t>Williams 2013等</a:t>
                       </a:r>
                     </a:p>
                   </a:txBody>
                   <a:tcPr/>
                 </a:tc>
               </a:tr>
-              <a:tr h="475488">
+              <a:tr h="418011">
                 <a:tc>
                   <a:txBody>
                     <a:bodyPr/>
@@ -10524,7 +11093,7 @@
                     <a:p>
                       <a:pPr algn="l">
                         <a:lnSpc>
-                          <a:spcPct val="110000"/>
+                          <a:spcPct val="105000"/>
                         </a:lnSpc>
                         <a:spcBef>
                           <a:spcPts val="0"/>
@@ -10542,7 +11111,7 @@
                           <a:ea typeface="微软雅黑"/>
                           <a:cs typeface="Arial"/>
                         </a:rPr>
-                        <a:t>AD 患者菌群失衡与炎症升高</a:t>
+                        <a:t>AChE经PAS促聚集</a:t>
                       </a:r>
                     </a:p>
                   </a:txBody>
@@ -10555,7 +11124,7 @@
                     <a:p>
                       <a:pPr algn="l">
                         <a:lnSpc>
-                          <a:spcPct val="110000"/>
+                          <a:spcPct val="105000"/>
                         </a:lnSpc>
                         <a:spcBef>
                           <a:spcPts val="0"/>
@@ -10573,7 +11142,7 @@
                           <a:ea typeface="微软雅黑"/>
                           <a:cs typeface="Arial"/>
                         </a:rPr>
-                        <a:t>中：研究异质性大</a:t>
+                        <a:t>强</a:t>
                       </a:r>
                     </a:p>
                   </a:txBody>
@@ -10586,7 +11155,7 @@
                     <a:p>
                       <a:pPr algn="l">
                         <a:lnSpc>
-                          <a:spcPct val="110000"/>
+                          <a:spcPct val="105000"/>
                         </a:lnSpc>
                         <a:spcBef>
                           <a:spcPts val="0"/>
@@ -10604,14 +11173,14 @@
                           <a:ea typeface="微软雅黑"/>
                           <a:cs typeface="Arial"/>
                         </a:rPr>
-                        <a:t>阶段特异性抗菌肽的合理性</a:t>
+                        <a:t>Inestrosa 1996 [27]</a:t>
                       </a:r>
                     </a:p>
                   </a:txBody>
                   <a:tcPr/>
                 </a:tc>
               </a:tr>
-              <a:tr h="475488">
+              <a:tr h="418011">
                 <a:tc>
                   <a:txBody>
                     <a:bodyPr/>
@@ -10619,7 +11188,7 @@
                     <a:p>
                       <a:pPr algn="l">
                         <a:lnSpc>
-                          <a:spcPct val="110000"/>
+                          <a:spcPct val="105000"/>
                         </a:lnSpc>
                         <a:spcBef>
                           <a:spcPts val="0"/>
@@ -10637,7 +11206,7 @@
                           <a:ea typeface="微软雅黑"/>
                           <a:cs typeface="Arial"/>
                         </a:rPr>
-                        <a:t>微生物源抗菌肽在 AD 增多</a:t>
+                        <a:t>AChE-Aβ MD稳定 344-361</a:t>
                       </a:r>
                     </a:p>
                   </a:txBody>
@@ -10650,7 +11219,7 @@
                     <a:p>
                       <a:pPr algn="l">
                         <a:lnSpc>
-                          <a:spcPct val="110000"/>
+                          <a:spcPct val="105000"/>
                         </a:lnSpc>
                         <a:spcBef>
                           <a:spcPts val="0"/>
@@ -10668,7 +11237,7 @@
                           <a:ea typeface="微软雅黑"/>
                           <a:cs typeface="Arial"/>
                         </a:rPr>
-                        <a:t>待验证</a:t>
+                        <a:t>中</a:t>
                       </a:r>
                     </a:p>
                   </a:txBody>
@@ -10681,7 +11250,7 @@
                     <a:p>
                       <a:pPr algn="l">
                         <a:lnSpc>
-                          <a:spcPct val="110000"/>
+                          <a:spcPct val="105000"/>
                         </a:lnSpc>
                         <a:spcBef>
                           <a:spcPts val="0"/>
@@ -10699,14 +11268,14 @@
                           <a:ea typeface="微软雅黑"/>
                           <a:cs typeface="Arial"/>
                         </a:rPr>
-                        <a:t>本课题要回答的问题</a:t>
+                        <a:t>Atanasova 2020 [32]</a:t>
                       </a:r>
                     </a:p>
                   </a:txBody>
                   <a:tcPr/>
                 </a:tc>
               </a:tr>
-              <a:tr h="475488">
+              <a:tr h="418014">
                 <a:tc>
                   <a:txBody>
                     <a:bodyPr/>
@@ -10714,7 +11283,7 @@
                     <a:p>
                       <a:pPr algn="l">
                         <a:lnSpc>
-                          <a:spcPct val="110000"/>
+                          <a:spcPct val="105000"/>
                         </a:lnSpc>
                         <a:spcBef>
                           <a:spcPts val="0"/>
@@ -10732,7 +11301,7 @@
                           <a:ea typeface="微软雅黑"/>
                           <a:cs typeface="Arial"/>
                         </a:rPr>
-                        <a:t>候选肽经 AChE–Aβ 界面影响成核</a:t>
+                        <a:t>菌群失衡 促炎↑产丁酸↓</a:t>
                       </a:r>
                     </a:p>
                   </a:txBody>
@@ -10745,7 +11314,7 @@
                     <a:p>
                       <a:pPr algn="l">
                         <a:lnSpc>
-                          <a:spcPct val="110000"/>
+                          <a:spcPct val="105000"/>
                         </a:lnSpc>
                         <a:spcBef>
                           <a:spcPts val="0"/>
@@ -10763,7 +11332,7 @@
                           <a:ea typeface="微软雅黑"/>
                           <a:cs typeface="Arial"/>
                         </a:rPr>
-                        <a:t>待验证（H1—H3）</a:t>
+                        <a:t>中</a:t>
                       </a:r>
                     </a:p>
                   </a:txBody>
@@ -10776,7 +11345,7 @@
                     <a:p>
                       <a:pPr algn="l">
                         <a:lnSpc>
-                          <a:spcPct val="110000"/>
+                          <a:spcPct val="105000"/>
                         </a:lnSpc>
                         <a:spcBef>
                           <a:spcPts val="0"/>
@@ -10794,7 +11363,7 @@
                           <a:ea typeface="微软雅黑"/>
                           <a:cs typeface="Arial"/>
                         </a:rPr>
-                        <a:t>下一步的对接、动力学与实验</a:t>
+                        <a:t>Vogt 2017等</a:t>
                       </a:r>
                     </a:p>
                   </a:txBody>
@@ -10807,14 +11376,60 @@
       </p:graphicFrame>
       <p:sp>
         <p:nvSpPr>
-          <p:cNvPr id="5" name="TextBox 4"/>
+          <p:cNvPr id="5" name="Rectangle 4"/>
+          <p:cNvSpPr/>
+          <p:nvPr/>
+        </p:nvSpPr>
+        <p:spPr>
+          <a:xfrm>
+            <a:off x="7863840" y="1280160"/>
+            <a:ext cx="3657600" cy="2926080"/>
+          </a:xfrm>
+          <a:prstGeom prst="rect">
+            <a:avLst/>
+          </a:prstGeom>
+          <a:solidFill>
+            <a:srgbClr val="F7F7F5"/>
+          </a:solidFill>
+          <a:ln w="9525">
+            <a:solidFill>
+              <a:srgbClr val="DDDDDA"/>
+            </a:solidFill>
+          </a:ln>
+          <a:effectLst/>
+        </p:spPr>
+        <p:style>
+          <a:lnRef idx="1">
+            <a:schemeClr val="accent1"/>
+          </a:lnRef>
+          <a:fillRef idx="3">
+            <a:schemeClr val="accent1"/>
+          </a:fillRef>
+          <a:effectRef idx="2">
+            <a:schemeClr val="accent1"/>
+          </a:effectRef>
+          <a:fontRef idx="minor">
+            <a:schemeClr val="lt1"/>
+          </a:fontRef>
+        </p:style>
+        <p:txBody>
+          <a:bodyPr rtlCol="0" anchor="ctr"/>
+          <a:lstStyle/>
+          <a:p>
+            <a:pPr algn="ctr"/>
+          </a:p>
+        </p:txBody>
+      </p:sp>
+      <p:sp>
+        <p:nvSpPr>
+          <p:cNvPr id="6" name="TextBox 5"/>
           <p:cNvSpPr txBox="1"/>
           <p:nvPr/>
         </p:nvSpPr>
         <p:spPr>
           <a:xfrm>
-            <a:off x="640080" y="6419088"/>
-            <a:ext cx="8778240" cy="310896"/>
+            <a:off x="8046720" y="1371600"/>
+            <a:ext cx="3291840" cy="2743200"/>
           </a:xfrm>
           <a:prstGeom prst="rect">
             <a:avLst/>
@@ -10829,6 +11444,220 @@
           <a:p>
             <a:pPr algn="l">
               <a:lnSpc>
+                <a:spcPct val="110000"/>
+              </a:lnSpc>
+              <a:spcBef>
+                <a:spcPts val="0"/>
+              </a:spcBef>
+              <a:spcAft>
+                <a:spcPts val="0"/>
+              </a:spcAft>
+            </a:pPr>
+            <a:r>
+              <a:rPr sz="1500" b="1">
+                <a:solidFill>
+                  <a:srgbClr val="2F5D62"/>
+                </a:solidFill>
+                <a:latin typeface="Arial"/>
+                <a:ea typeface="微软雅黑"/>
+                <a:cs typeface="Arial"/>
+              </a:rPr>
+              <a:t>抗菌活性预测为何可行</a:t>
+            </a:r>
+          </a:p>
+          <a:p>
+            <a:pPr algn="l">
+              <a:lnSpc>
+                <a:spcPct val="120000"/>
+              </a:lnSpc>
+              <a:spcBef>
+                <a:spcPts val="800"/>
+              </a:spcBef>
+              <a:spcAft>
+                <a:spcPts val="0"/>
+              </a:spcAft>
+            </a:pPr>
+            <a:r>
+              <a:rPr sz="1500" b="0">
+                <a:solidFill>
+                  <a:srgbClr val="333333"/>
+                </a:solidFill>
+                <a:latin typeface="Arial"/>
+                <a:ea typeface="微软雅黑"/>
+                <a:cs typeface="Arial"/>
+              </a:rPr>
+              <a:t>• Ma 2022 Nat Biotech：2349候选→216合成→181活性83% [22]</a:t>
+            </a:r>
+          </a:p>
+          <a:p>
+            <a:pPr algn="l">
+              <a:lnSpc>
+                <a:spcPct val="120000"/>
+              </a:lnSpc>
+              <a:spcBef>
+                <a:spcPts val="600"/>
+              </a:spcBef>
+              <a:spcAft>
+                <a:spcPts val="0"/>
+              </a:spcAft>
+            </a:pPr>
+            <a:r>
+              <a:rPr sz="1500" b="0">
+                <a:solidFill>
+                  <a:srgbClr val="333333"/>
+                </a:solidFill>
+                <a:latin typeface="Arial"/>
+                <a:ea typeface="微软雅黑"/>
+                <a:cs typeface="Arial"/>
+              </a:rPr>
+              <a:t>• Santos-Junior 2024 Cell：86万肽，100→79活性 [23]</a:t>
+            </a:r>
+          </a:p>
+          <a:p>
+            <a:pPr algn="l">
+              <a:lnSpc>
+                <a:spcPct val="120000"/>
+              </a:lnSpc>
+              <a:spcBef>
+                <a:spcPts val="600"/>
+              </a:spcBef>
+              <a:spcAft>
+                <a:spcPts val="0"/>
+              </a:spcAft>
+            </a:pPr>
+            <a:r>
+              <a:rPr sz="1500" b="0">
+                <a:solidFill>
+                  <a:srgbClr val="333333"/>
+                </a:solidFill>
+                <a:latin typeface="Arial"/>
+                <a:ea typeface="微软雅黑"/>
+                <a:cs typeface="Arial"/>
+              </a:rPr>
+              <a:t>• Wan 2024综述 [24]</a:t>
+            </a:r>
+          </a:p>
+          <a:p>
+            <a:pPr algn="l">
+              <a:lnSpc>
+                <a:spcPct val="110000"/>
+              </a:lnSpc>
+              <a:spcBef>
+                <a:spcPts val="1200"/>
+              </a:spcBef>
+              <a:spcAft>
+                <a:spcPts val="0"/>
+              </a:spcAft>
+            </a:pPr>
+            <a:r>
+              <a:rPr sz="1500" b="1">
+                <a:solidFill>
+                  <a:srgbClr val="2F5D62"/>
+                </a:solidFill>
+                <a:latin typeface="Arial"/>
+                <a:ea typeface="微软雅黑"/>
+                <a:cs typeface="Arial"/>
+              </a:rPr>
+              <a:t>本课题：三模型共识→去重→实验验证</a:t>
+            </a:r>
+          </a:p>
+          <a:p>
+            <a:pPr algn="l">
+              <a:lnSpc>
+                <a:spcPct val="120000"/>
+              </a:lnSpc>
+              <a:spcBef>
+                <a:spcPts val="600"/>
+              </a:spcBef>
+              <a:spcAft>
+                <a:spcPts val="0"/>
+              </a:spcAft>
+            </a:pPr>
+            <a:r>
+              <a:rPr sz="1500" b="0">
+                <a:solidFill>
+                  <a:srgbClr val="333333"/>
+                </a:solidFill>
+                <a:latin typeface="Arial"/>
+                <a:ea typeface="微软雅黑"/>
+                <a:cs typeface="Arial"/>
+              </a:rPr>
+              <a:t>纸片扩散初筛+MIC，设阳性/阴性对照</a:t>
+            </a:r>
+          </a:p>
+        </p:txBody>
+      </p:sp>
+      <p:sp>
+        <p:nvSpPr>
+          <p:cNvPr id="7" name="TextBox 6"/>
+          <p:cNvSpPr txBox="1"/>
+          <p:nvPr/>
+        </p:nvSpPr>
+        <p:spPr>
+          <a:xfrm>
+            <a:off x="640080" y="4572000"/>
+            <a:ext cx="10908792" cy="1280160"/>
+          </a:xfrm>
+          <a:prstGeom prst="rect">
+            <a:avLst/>
+          </a:prstGeom>
+          <a:noFill/>
+        </p:spPr>
+        <p:txBody>
+          <a:bodyPr wrap="square" anchor="t" lIns="27432" rIns="27432" tIns="0" bIns="0">
+            <a:spAutoFit/>
+          </a:bodyPr>
+          <a:lstStyle/>
+          <a:p>
+            <a:pPr algn="l">
+              <a:lnSpc>
+                <a:spcPct val="125000"/>
+              </a:lnSpc>
+              <a:spcBef>
+                <a:spcPts val="0"/>
+              </a:spcBef>
+              <a:spcAft>
+                <a:spcPts val="0"/>
+              </a:spcAft>
+            </a:pPr>
+            <a:r>
+              <a:rPr sz="1500" b="0">
+                <a:solidFill>
+                  <a:srgbClr val="333333"/>
+                </a:solidFill>
+                <a:latin typeface="Arial"/>
+                <a:ea typeface="微软雅黑"/>
+                <a:cs typeface="Arial"/>
+              </a:rPr>
+              <a:t>正常人 vs AD谁更多：AD侧更高，区分宿主/微生物源、局部/系统、阶段；微生物源以数据为准。为什么多：感染—炎症—Aβ/抗菌肽正反馈，促炎菌富集驱动。</a:t>
+            </a:r>
+          </a:p>
+        </p:txBody>
+      </p:sp>
+      <p:sp>
+        <p:nvSpPr>
+          <p:cNvPr id="8" name="TextBox 7"/>
+          <p:cNvSpPr txBox="1"/>
+          <p:nvPr/>
+        </p:nvSpPr>
+        <p:spPr>
+          <a:xfrm>
+            <a:off x="640080" y="6419088"/>
+            <a:ext cx="8778240" cy="310896"/>
+          </a:xfrm>
+          <a:prstGeom prst="rect">
+            <a:avLst/>
+          </a:prstGeom>
+          <a:noFill/>
+        </p:spPr>
+        <p:txBody>
+          <a:bodyPr wrap="square" anchor="t" lIns="27432" rIns="27432" tIns="0" bIns="0">
+            <a:spAutoFit/>
+          </a:bodyPr>
+          <a:lstStyle/>
+          <a:p>
+            <a:pPr algn="l">
+              <a:lnSpc>
                 <a:spcPct val="100000"/>
               </a:lnSpc>
               <a:spcBef>
@@ -10854,7 +11683,7 @@
       </p:sp>
       <p:sp>
         <p:nvSpPr>
-          <p:cNvPr id="6" name="TextBox 5"/>
+          <p:cNvPr id="9" name="TextBox 8"/>
           <p:cNvSpPr txBox="1"/>
           <p:nvPr/>
         </p:nvSpPr>

--- a/deliverable/中期答辩_H_nature风.pptx
+++ b/deliverable/中期答辩_H_nature风.pptx
@@ -1155,7 +1155,7 @@
           <a:lstStyle/>
           <a:p>
             <a:r>
-              <a:t>总结一下：主体分析工作已经在中期完成，剩余是机制关联的结论整理、抑菌实验验证和论文撰写，整体风险可控。我的汇报到此结束，请各位老师批评指正。</a:t>
+              <a:t>这页把抗菌肽与 AD 的关联拆成七环，并标出每一环的证据强度：蓝色是已有实验或临床证据，绿色是计算方法能给出候选与优先序的部分，橙色是本课题要回答或需要验证的部分。老师问任何一环，都能说清这一环目前的证据到什么程度。</a:t>
             </a:r>
           </a:p>
         </p:txBody>
@@ -1225,7 +1225,7 @@
           <a:lstStyle/>
           <a:p>
             <a:r>
-              <a:t>这页把抗菌肽与 AD 的关联拆成七环，并标出每一环的证据强度：蓝色是已有实验或临床证据，绿色是计算方法能给出候选与优先序的部分，橙色是本课题要回答或需要验证的部分。老师问任何一环，都能说清这一环目前的证据到什么程度。</a:t>
+              <a:t>为什么 AD 组更多？因为存在一个正反馈：菌群失衡与肠屏障通透性增加使内毒素长期刺激宿主，经 TLR4 与 NF-κB 通路升高促炎因子，促炎因子又上调 Aβ 与抗菌肽的生成；聚集后的 Aβ 激活小胶质细胞产生更多炎症介质，循环自我加强。这也是抗菌保护假说的现代表述。</a:t>
             </a:r>
           </a:p>
         </p:txBody>
@@ -1365,7 +1365,7 @@
           <a:lstStyle/>
           <a:p>
             <a:r>
-              <a:t>为什么 AD 组更多？因为存在一个正反馈：菌群失衡与肠屏障通透性增加使内毒素长期刺激宿主，经 TLR4 与 NF-κB 通路升高促炎因子，促炎因子又上调 Aβ 与抗菌肽的生成；聚集后的 Aβ 激活小胶质细胞产生更多炎症介质，循环自我加强。这也是抗菌保护假说的现代表述。</a:t>
+              <a:t>机制落点参照 AChE–Aβ 复合物的分子动力学研究：Aβ 对接进 PAS 后，复合物在 1 微秒模拟中保持稳定，主要停留区段是 344—361，该区段紧邻 PAS 但不受双位点抑制剂的位阻。同一界面的其他实验证据包括：丙锭可阻断 AChE 诱导的聚集而催化位点抑制剂无效、PAS 负电荷触发 β-发夹构象、丁酰胆碱酯酶反向延缓纤维形成。由此提出三个假设，并用对接与动力学给出优先序。</a:t>
             </a:r>
           </a:p>
         </p:txBody>
@@ -1435,7 +1435,7 @@
           <a:lstStyle/>
           <a:p>
             <a:r>
-              <a:t>机制落点参照 AChE–Aβ 复合物的分子动力学研究：Aβ 对接进 PAS 后，复合物在 1 微秒模拟中保持稳定，主要停留区段是 344—361，该区段紧邻 PAS 但不受双位点抑制剂的位阻。同一界面的其他实验证据包括：丙锭可阻断 AChE 诱导的聚集而催化位点抑制剂无效、PAS 负电荷触发 β-发夹构象、丁酰胆碱酯酶反向延缓纤维形成。由此提出三个假设，并用对接与动力学给出优先序。</a:t>
+              <a:t>这页说明分子机制为什么能解释得通：抗菌肽与 Aβ 结构兼容，可以交叉成核，方向取决于界面与浓度。支撑这一机制的模拟证据已经比较完整：AChE–Aβ 的 1 微秒模拟、AChE 疏水基序掺入纤维、LL-37 与淀粉样肽的离散动力学、抗菌肽类分子与 Aβ 的对接加动力学并用实验验证、以及五肽库筛选破坏 D23–K28 盐桥。这些结果说明用对接与动力学研究候选肽与 Aβ/AChE 的界面是可行的。</a:t>
             </a:r>
           </a:p>
         </p:txBody>
@@ -1505,7 +1505,7 @@
           <a:lstStyle/>
           <a:p>
             <a:r>
-              <a:t>这页说明分子机制为什么能解释得通：抗菌肽与 Aβ 结构兼容，可以交叉成核，方向取决于界面与浓度。支撑这一机制的模拟证据已经比较完整：AChE–Aβ 的 1 微秒模拟、AChE 疏水基序掺入纤维、LL-37 与淀粉样肽的离散动力学、抗菌肽类分子与 Aβ 的对接加动力学并用实验验证、以及五肽库筛选破坏 D23–K28 盐桥。这些结果说明用对接与动力学研究候选肽与 Aβ/AChE 的界面是可行的。</a:t>
+              <a:t>这张表把老师提出的八个问题逐条列出，并给出答案要点与证据强度。需要说明的是：关联类结论的证据强度较高，方向类结论（谁更多、促进还是抑制）存在例外与条件依赖，因此标注为中；微生物源抗菌肽在 AD 中的变化属于待验证部分，正是本课题要补的一环。</a:t>
             </a:r>
           </a:p>
         </p:txBody>
@@ -1575,7 +1575,7 @@
           <a:lstStyle/>
           <a:p>
             <a:r>
-              <a:t>这张表把老师提出的八个问题逐条列出，并给出答案要点与证据强度。需要说明的是：关联类结论的证据强度较高，方向类结论（谁更多、促进还是抑制）存在例外与条件依赖，因此标注为中；微生物源抗菌肽在 AD 中的变化属于待验证部分，正是本课题要补的一环。</a:t>
+              <a:t>机制说明文档《抗菌肽与AD关联机制说明》共整理 46 条文献，覆盖 AD 与感染、宿主抗菌肽在 AD 中的变化、抗菌肽预测方法、菌群分期、AChE–Aβ 与交叉成核的分子模拟，以及作为反例的乳铁蛋白下降证据。这里列出其中十条代表性文献及其结论。</a:t>
             </a:r>
           </a:p>
         </p:txBody>
@@ -1645,7 +1645,7 @@
           <a:lstStyle/>
           <a:p>
             <a:r>
-              <a:t>机制说明文档《抗菌肽与AD关联机制说明》共整理 46 条文献，覆盖 AD 与感染、宿主抗菌肽在 AD 中的变化、抗菌肽预测方法、菌群分期、AChE–Aβ 与交叉成核的分子模拟，以及作为反例的乳铁蛋白下降证据。这里列出其中十条代表性文献及其结论。</a:t>
+              <a:t>总结一下：主体分析工作已经在中期完成，剩余是机制关联的结论整理、抑菌实验验证和论文撰写，整体风险可控。我的汇报到此结束，请各位老师批评指正。</a:t>
             </a:r>
           </a:p>
         </p:txBody>
@@ -1855,7 +1855,7 @@
           <a:lstStyle/>
           <a:p>
             <a:r>
-              <a:t>这页说明整体流程：从测序数据到候选抗菌肽清单，共十二步，输入输出都可追溯。前九步已经在中期前完成，最后三步正在推进——机制关联分析、抑菌实验验证与结果整理。</a:t>
+              <a:t>这页说明整体流程：从测序数据到候选抗菌肽清单，共十二步，输入输出都可追溯。工具链是 fastp 与 KneadData 做质控去宿主，MEGAHIT 组装，MetaBAT2、MaxBin2 与 CONCOCT 多算法联合分箱后 metaWRAP 提纯，dRep 按 95% ANI 去冗余得到参考基因组集，EMBOSS getorf 预测 sORF 并做序列级去冗余，Attention / LSTM / BERT 三模型一致阳性才纳入候选，CoverM 定量并做 CLR 变换，用 Kruskal-Wallis 与 Mann-Whitney U 做组间检验，再用宏蛋白组表达证据二次去重。前九步已经在中期前完成，最后三步正在推进——机制关联分析、抑菌实验验证与结果整理。</a:t>
             </a:r>
           </a:p>
         </p:txBody>
@@ -1925,7 +1925,7 @@
           <a:lstStyle/>
           <a:p>
             <a:r>
-              <a:t>分组方式是这页的重点：五个认知阶段，每阶段内再按性别与三个年龄段分层，共三十个分层单元；每个单元内按年龄与性别匹配，得到结构一致的比较亚队列。各阶段的样本量相同、性别构成相同、组间平均年龄差小于两岁，这样阶段之间的差异不会来自年龄与性别构成。</a:t>
+              <a:t>分组方式是这页的重点：五个认知阶段，每阶段内再按性别与三个年龄段分层，共三十个分层单元；每个单元内按年龄与性别匹配，最终选出 265 例匹配亚队列——各阶段 53 例、每组 35 女 / 18 男，组间平均年龄最大差 1.8 岁，这样阶段之间的差异不会来自年龄与性别构成。</a:t>
             </a:r>
           </a:p>
         </p:txBody>
@@ -5795,8 +5795,8 @@
         </p:nvSpPr>
         <p:spPr>
           <a:xfrm>
-            <a:off x="640080" y="6053328"/>
-            <a:ext cx="10908792" cy="329184"/>
+            <a:off x="640080" y="6419088"/>
+            <a:ext cx="8778240" cy="310896"/>
           </a:xfrm>
           <a:prstGeom prst="rect">
             <a:avLst/>
@@ -5829,7 +5829,7 @@
                 <a:ea typeface="微软雅黑"/>
                 <a:cs typeface="Arial"/>
               </a:rPr>
-              <a:t>图：本项目自制（results/figures）</a:t>
+              <a:t>研究生论文中期检查 · 文绍华</a:t>
             </a:r>
           </a:p>
         </p:txBody>
@@ -5837,53 +5837,6 @@
       <p:sp>
         <p:nvSpPr>
           <p:cNvPr id="7" name="TextBox 6"/>
-          <p:cNvSpPr txBox="1"/>
-          <p:nvPr/>
-        </p:nvSpPr>
-        <p:spPr>
-          <a:xfrm>
-            <a:off x="640080" y="6419088"/>
-            <a:ext cx="8778240" cy="310896"/>
-          </a:xfrm>
-          <a:prstGeom prst="rect">
-            <a:avLst/>
-          </a:prstGeom>
-          <a:noFill/>
-        </p:spPr>
-        <p:txBody>
-          <a:bodyPr wrap="square" anchor="t" lIns="27432" rIns="27432" tIns="0" bIns="0">
-            <a:spAutoFit/>
-          </a:bodyPr>
-          <a:lstStyle/>
-          <a:p>
-            <a:pPr algn="l">
-              <a:lnSpc>
-                <a:spcPct val="100000"/>
-              </a:lnSpc>
-              <a:spcBef>
-                <a:spcPts val="0"/>
-              </a:spcBef>
-              <a:spcAft>
-                <a:spcPts val="0"/>
-              </a:spcAft>
-            </a:pPr>
-            <a:r>
-              <a:rPr sz="1500" b="0">
-                <a:solidFill>
-                  <a:srgbClr val="777777"/>
-                </a:solidFill>
-                <a:latin typeface="Arial"/>
-                <a:ea typeface="微软雅黑"/>
-                <a:cs typeface="Arial"/>
-              </a:rPr>
-              <a:t>研究生论文中期检查 · 文绍华</a:t>
-            </a:r>
-          </a:p>
-        </p:txBody>
-      </p:sp>
-      <p:sp>
-        <p:nvSpPr>
-          <p:cNvPr id="8" name="TextBox 7"/>
           <p:cNvSpPr txBox="1"/>
           <p:nvPr/>
         </p:nvSpPr>
@@ -6458,8 +6411,8 @@
         </p:nvSpPr>
         <p:spPr>
           <a:xfrm>
-            <a:off x="640080" y="6053328"/>
-            <a:ext cx="10908792" cy="329184"/>
+            <a:off x="640080" y="6419088"/>
+            <a:ext cx="8778240" cy="310896"/>
           </a:xfrm>
           <a:prstGeom prst="rect">
             <a:avLst/>
@@ -6492,7 +6445,7 @@
                 <a:ea typeface="微软雅黑"/>
                 <a:cs typeface="Arial"/>
               </a:rPr>
-              <a:t>图：本项目自制（results/figures）</a:t>
+              <a:t>研究生论文中期检查 · 文绍华</a:t>
             </a:r>
           </a:p>
         </p:txBody>
@@ -6500,53 +6453,6 @@
       <p:sp>
         <p:nvSpPr>
           <p:cNvPr id="8" name="TextBox 7"/>
-          <p:cNvSpPr txBox="1"/>
-          <p:nvPr/>
-        </p:nvSpPr>
-        <p:spPr>
-          <a:xfrm>
-            <a:off x="640080" y="6419088"/>
-            <a:ext cx="8778240" cy="310896"/>
-          </a:xfrm>
-          <a:prstGeom prst="rect">
-            <a:avLst/>
-          </a:prstGeom>
-          <a:noFill/>
-        </p:spPr>
-        <p:txBody>
-          <a:bodyPr wrap="square" anchor="t" lIns="27432" rIns="27432" tIns="0" bIns="0">
-            <a:spAutoFit/>
-          </a:bodyPr>
-          <a:lstStyle/>
-          <a:p>
-            <a:pPr algn="l">
-              <a:lnSpc>
-                <a:spcPct val="100000"/>
-              </a:lnSpc>
-              <a:spcBef>
-                <a:spcPts val="0"/>
-              </a:spcBef>
-              <a:spcAft>
-                <a:spcPts val="0"/>
-              </a:spcAft>
-            </a:pPr>
-            <a:r>
-              <a:rPr sz="1500" b="0">
-                <a:solidFill>
-                  <a:srgbClr val="777777"/>
-                </a:solidFill>
-                <a:latin typeface="Arial"/>
-                <a:ea typeface="微软雅黑"/>
-                <a:cs typeface="Arial"/>
-              </a:rPr>
-              <a:t>研究生论文中期检查 · 文绍华</a:t>
-            </a:r>
-          </a:p>
-        </p:txBody>
-      </p:sp>
-      <p:sp>
-        <p:nvSpPr>
-          <p:cNvPr id="9" name="TextBox 8"/>
           <p:cNvSpPr txBox="1"/>
           <p:nvPr/>
         </p:nvSpPr>
@@ -6779,8 +6685,8 @@
         </p:nvSpPr>
         <p:spPr>
           <a:xfrm>
-            <a:off x="640080" y="6053328"/>
-            <a:ext cx="10908792" cy="329184"/>
+            <a:off x="640080" y="6419088"/>
+            <a:ext cx="8778240" cy="310896"/>
           </a:xfrm>
           <a:prstGeom prst="rect">
             <a:avLst/>
@@ -6813,7 +6719,7 @@
                 <a:ea typeface="微软雅黑"/>
                 <a:cs typeface="Arial"/>
               </a:rPr>
-              <a:t>图：本项目自制（results/figures）</a:t>
+              <a:t>研究生论文中期检查 · 文绍华</a:t>
             </a:r>
           </a:p>
         </p:txBody>
@@ -6821,53 +6727,6 @@
       <p:sp>
         <p:nvSpPr>
           <p:cNvPr id="7" name="TextBox 6"/>
-          <p:cNvSpPr txBox="1"/>
-          <p:nvPr/>
-        </p:nvSpPr>
-        <p:spPr>
-          <a:xfrm>
-            <a:off x="640080" y="6419088"/>
-            <a:ext cx="8778240" cy="310896"/>
-          </a:xfrm>
-          <a:prstGeom prst="rect">
-            <a:avLst/>
-          </a:prstGeom>
-          <a:noFill/>
-        </p:spPr>
-        <p:txBody>
-          <a:bodyPr wrap="square" anchor="t" lIns="27432" rIns="27432" tIns="0" bIns="0">
-            <a:spAutoFit/>
-          </a:bodyPr>
-          <a:lstStyle/>
-          <a:p>
-            <a:pPr algn="l">
-              <a:lnSpc>
-                <a:spcPct val="100000"/>
-              </a:lnSpc>
-              <a:spcBef>
-                <a:spcPts val="0"/>
-              </a:spcBef>
-              <a:spcAft>
-                <a:spcPts val="0"/>
-              </a:spcAft>
-            </a:pPr>
-            <a:r>
-              <a:rPr sz="1500" b="0">
-                <a:solidFill>
-                  <a:srgbClr val="777777"/>
-                </a:solidFill>
-                <a:latin typeface="Arial"/>
-                <a:ea typeface="微软雅黑"/>
-                <a:cs typeface="Arial"/>
-              </a:rPr>
-              <a:t>研究生论文中期检查 · 文绍华</a:t>
-            </a:r>
-          </a:p>
-        </p:txBody>
-      </p:sp>
-      <p:sp>
-        <p:nvSpPr>
-          <p:cNvPr id="8" name="TextBox 7"/>
           <p:cNvSpPr txBox="1"/>
           <p:nvPr/>
         </p:nvSpPr>
@@ -9085,7 +8944,7 @@
                 <a:ea typeface="微软雅黑"/>
                 <a:cs typeface="Arial"/>
               </a:rPr>
-              <a:t>主要分析已完成，剩余工作风险可控</a:t>
+              <a:t>抗菌肽与 AD 的关联可以拆成七环，每环的证据强度不同</a:t>
             </a:r>
           </a:p>
         </p:txBody>
@@ -9134,16 +8993,40 @@
           </a:p>
         </p:txBody>
       </p:sp>
-      <p:sp>
-        <p:nvSpPr>
-          <p:cNvPr id="4" name="TextBox 3"/>
+      <p:pic>
+        <p:nvPicPr>
+          <p:cNvPr id="4" name="Picture 3" descr="figM1_关联逻辑链.png"/>
+          <p:cNvPicPr>
+            <a:picLocks noChangeAspect="1"/>
+          </p:cNvPicPr>
+          <p:nvPr/>
+        </p:nvPicPr>
+        <p:blipFill>
+          <a:blip r:embed="rId2"/>
+          <a:stretch>
+            <a:fillRect/>
+          </a:stretch>
+        </p:blipFill>
+        <p:spPr>
+          <a:xfrm>
+            <a:off x="1697813" y="1188720"/>
+            <a:ext cx="8793325" cy="3767328"/>
+          </a:xfrm>
+          <a:prstGeom prst="rect">
+            <a:avLst/>
+          </a:prstGeom>
+        </p:spPr>
+      </p:pic>
+      <p:sp>
+        <p:nvSpPr>
+          <p:cNvPr id="5" name="TextBox 4"/>
           <p:cNvSpPr txBox="1"/>
           <p:nvPr/>
         </p:nvSpPr>
         <p:spPr>
           <a:xfrm>
-            <a:off x="640080" y="1481328"/>
-            <a:ext cx="10424160" cy="3291840"/>
+            <a:off x="640080" y="5074920"/>
+            <a:ext cx="10908792" cy="868680"/>
           </a:xfrm>
           <a:prstGeom prst="rect">
             <a:avLst/>
@@ -9158,7 +9041,7 @@
           <a:p>
             <a:pPr algn="l">
               <a:lnSpc>
-                <a:spcPct val="134000"/>
+                <a:spcPct val="130000"/>
               </a:lnSpc>
               <a:spcBef>
                 <a:spcPts val="0"/>
@@ -9168,7 +9051,7 @@
               </a:spcAft>
             </a:pPr>
             <a:r>
-              <a:rPr sz="1800" b="0">
+              <a:rPr sz="1700" b="0">
                 <a:solidFill>
                   <a:srgbClr val="333333"/>
                 </a:solidFill>
@@ -9176,153 +9059,14 @@
                 <a:ea typeface="微软雅黑"/>
                 <a:cs typeface="Arial"/>
               </a:rPr>
-              <a:t>确认事实：数据资源、短肽库、三模型共识预测、分阶段差异分析与特有抗菌肽筛选均已完成。</a:t>
-            </a:r>
-          </a:p>
-          <a:p>
-            <a:pPr algn="l">
-              <a:lnSpc>
-                <a:spcPct val="134000"/>
-              </a:lnSpc>
-              <a:spcBef>
-                <a:spcPts val="1400"/>
-              </a:spcBef>
-              <a:spcAft>
-                <a:spcPts val="0"/>
-              </a:spcAft>
-            </a:pPr>
-            <a:r>
-              <a:rPr sz="1800" b="0">
-                <a:solidFill>
-                  <a:srgbClr val="333333"/>
-                </a:solidFill>
-                <a:latin typeface="Arial"/>
-                <a:ea typeface="微软雅黑"/>
-                <a:cs typeface="Arial"/>
-              </a:rPr>
-              <a:t>待完成：机制关联分析的结论整理、候选抗菌肽的抑菌实验验证，以及学位论文与投稿论文撰写。</a:t>
-            </a:r>
-          </a:p>
-          <a:p>
-            <a:pPr algn="l">
-              <a:lnSpc>
-                <a:spcPct val="134000"/>
-              </a:lnSpc>
-              <a:spcBef>
-                <a:spcPts val="1400"/>
-              </a:spcBef>
-              <a:spcAft>
-                <a:spcPts val="0"/>
-              </a:spcAft>
-            </a:pPr>
-            <a:r>
-              <a:rPr sz="1800" b="0">
-                <a:solidFill>
-                  <a:srgbClr val="333333"/>
-                </a:solidFill>
-                <a:latin typeface="Arial"/>
-                <a:ea typeface="微软雅黑"/>
-                <a:cs typeface="Arial"/>
-              </a:rPr>
-              <a:t>进度安排：按开题计划推进，后续不依赖新的数据生产。</a:t>
-            </a:r>
-          </a:p>
-        </p:txBody>
-      </p:sp>
-      <p:sp>
-        <p:nvSpPr>
-          <p:cNvPr id="5" name="Rectangle 4"/>
-          <p:cNvSpPr/>
-          <p:nvPr/>
-        </p:nvSpPr>
-        <p:spPr>
-          <a:xfrm>
-            <a:off x="640080" y="4846320"/>
-            <a:ext cx="1920240" cy="30480"/>
-          </a:xfrm>
-          <a:prstGeom prst="rect">
-            <a:avLst/>
-          </a:prstGeom>
-          <a:solidFill>
-            <a:srgbClr val="B03A2E"/>
-          </a:solidFill>
-          <a:ln>
-            <a:noFill/>
-          </a:ln>
-          <a:effectLst/>
-        </p:spPr>
-        <p:style>
-          <a:lnRef idx="1">
-            <a:schemeClr val="accent1"/>
-          </a:lnRef>
-          <a:fillRef idx="3">
-            <a:schemeClr val="accent1"/>
-          </a:fillRef>
-          <a:effectRef idx="2">
-            <a:schemeClr val="accent1"/>
-          </a:effectRef>
-          <a:fontRef idx="minor">
-            <a:schemeClr val="lt1"/>
-          </a:fontRef>
-        </p:style>
-        <p:txBody>
-          <a:bodyPr rtlCol="0" anchor="ctr"/>
-          <a:lstStyle/>
-          <a:p>
-            <a:pPr algn="ctr"/>
+              <a:t>① AD 与感染相关、② 感染与炎症驱动抗菌肽与 Aβ 生成、③ Aβ 本身即抗菌肽；④ 抗菌活性可计算预测、⑤ AD 组特异抗菌肽随阶段变化、⑥ 双刃剑效应；⑦ 为什么 AD 更多与分子机制落点，是本课题要回答的部分。</a:t>
+            </a:r>
           </a:p>
         </p:txBody>
       </p:sp>
       <p:sp>
         <p:nvSpPr>
           <p:cNvPr id="6" name="TextBox 5"/>
-          <p:cNvSpPr txBox="1"/>
-          <p:nvPr/>
-        </p:nvSpPr>
-        <p:spPr>
-          <a:xfrm>
-            <a:off x="640080" y="5084064"/>
-            <a:ext cx="10424160" cy="731520"/>
-          </a:xfrm>
-          <a:prstGeom prst="rect">
-            <a:avLst/>
-          </a:prstGeom>
-          <a:noFill/>
-        </p:spPr>
-        <p:txBody>
-          <a:bodyPr wrap="square" anchor="t" lIns="27432" rIns="27432" tIns="0" bIns="0">
-            <a:spAutoFit/>
-          </a:bodyPr>
-          <a:lstStyle/>
-          <a:p>
-            <a:pPr algn="l">
-              <a:lnSpc>
-                <a:spcPct val="110000"/>
-              </a:lnSpc>
-              <a:spcBef>
-                <a:spcPts val="0"/>
-              </a:spcBef>
-              <a:spcAft>
-                <a:spcPts val="0"/>
-              </a:spcAft>
-            </a:pPr>
-            <a:r>
-              <a:rPr sz="2000" b="1">
-                <a:solidFill>
-                  <a:srgbClr val="111111"/>
-                </a:solidFill>
-                <a:latin typeface="Arial"/>
-                <a:ea typeface="微软雅黑"/>
-                <a:cs typeface="Arial"/>
-              </a:rPr>
-              <a:t>谢谢各位老师，请批评指正。</a:t>
-            </a:r>
-          </a:p>
-        </p:txBody>
-      </p:sp>
-      <p:sp>
-        <p:nvSpPr>
-          <p:cNvPr id="7" name="TextBox 6"/>
           <p:cNvSpPr txBox="1"/>
           <p:nvPr/>
         </p:nvSpPr>
@@ -9369,7 +9113,7 @@
       </p:sp>
       <p:sp>
         <p:nvSpPr>
-          <p:cNvPr id="8" name="TextBox 7"/>
+          <p:cNvPr id="7" name="TextBox 6"/>
           <p:cNvSpPr txBox="1"/>
           <p:nvPr/>
         </p:nvSpPr>
@@ -9474,7 +9218,7 @@
                 <a:ea typeface="微软雅黑"/>
                 <a:cs typeface="Arial"/>
               </a:rPr>
-              <a:t>抗菌肽与 AD 的关联可以拆成七环，每环的证据强度不同</a:t>
+              <a:t>为什么 AD 组更多：炎症—Aβ—抗菌肽构成正反馈</a:t>
             </a:r>
           </a:p>
         </p:txBody>
@@ -9523,87 +9267,16 @@
           </a:p>
         </p:txBody>
       </p:sp>
-      <p:pic>
-        <p:nvPicPr>
-          <p:cNvPr id="4" name="Picture 3" descr="figM1_关联逻辑链.png"/>
-          <p:cNvPicPr>
-            <a:picLocks noChangeAspect="1"/>
-          </p:cNvPicPr>
-          <p:nvPr/>
-        </p:nvPicPr>
-        <p:blipFill>
-          <a:blip r:embed="rId2"/>
-          <a:stretch>
-            <a:fillRect/>
-          </a:stretch>
-        </p:blipFill>
-        <p:spPr>
-          <a:xfrm>
-            <a:off x="1697813" y="1188720"/>
-            <a:ext cx="8793325" cy="3767328"/>
-          </a:xfrm>
-          <a:prstGeom prst="rect">
-            <a:avLst/>
-          </a:prstGeom>
-        </p:spPr>
-      </p:pic>
-      <p:sp>
-        <p:nvSpPr>
-          <p:cNvPr id="5" name="TextBox 4"/>
+      <p:sp>
+        <p:nvSpPr>
+          <p:cNvPr id="4" name="TextBox 3"/>
           <p:cNvSpPr txBox="1"/>
           <p:nvPr/>
         </p:nvSpPr>
         <p:spPr>
           <a:xfrm>
-            <a:off x="640080" y="5074920"/>
-            <a:ext cx="10908792" cy="868680"/>
-          </a:xfrm>
-          <a:prstGeom prst="rect">
-            <a:avLst/>
-          </a:prstGeom>
-          <a:noFill/>
-        </p:spPr>
-        <p:txBody>
-          <a:bodyPr wrap="square" anchor="t" lIns="27432" rIns="27432" tIns="0" bIns="0">
-            <a:spAutoFit/>
-          </a:bodyPr>
-          <a:lstStyle/>
-          <a:p>
-            <a:pPr algn="l">
-              <a:lnSpc>
-                <a:spcPct val="130000"/>
-              </a:lnSpc>
-              <a:spcBef>
-                <a:spcPts val="0"/>
-              </a:spcBef>
-              <a:spcAft>
-                <a:spcPts val="0"/>
-              </a:spcAft>
-            </a:pPr>
-            <a:r>
-              <a:rPr sz="1700" b="0">
-                <a:solidFill>
-                  <a:srgbClr val="333333"/>
-                </a:solidFill>
-                <a:latin typeface="Arial"/>
-                <a:ea typeface="微软雅黑"/>
-                <a:cs typeface="Arial"/>
-              </a:rPr>
-              <a:t>① AD 与感染相关、② 感染与炎症驱动抗菌肽与 Aβ 生成、③ Aβ 本身即抗菌肽；④ 抗菌活性可计算预测、⑤ AD 组特异抗菌肽随阶段变化、⑥ 双刃剑效应；⑦ 为什么 AD 更多与分子机制落点，是本课题要回答的部分。</a:t>
-            </a:r>
-          </a:p>
-        </p:txBody>
-      </p:sp>
-      <p:sp>
-        <p:nvSpPr>
-          <p:cNvPr id="6" name="TextBox 5"/>
-          <p:cNvSpPr txBox="1"/>
-          <p:nvPr/>
-        </p:nvSpPr>
-        <p:spPr>
-          <a:xfrm>
-            <a:off x="640080" y="6053328"/>
-            <a:ext cx="10908792" cy="329184"/>
+            <a:off x="640080" y="1444752"/>
+            <a:ext cx="548640" cy="457200"/>
           </a:xfrm>
           <a:prstGeom prst="rect">
             <a:avLst/>
@@ -9628,16 +9301,131 @@
               </a:spcAft>
             </a:pPr>
             <a:r>
-              <a:rPr sz="1500" b="0">
-                <a:solidFill>
-                  <a:srgbClr val="777777"/>
-                </a:solidFill>
-                <a:latin typeface="Arial"/>
-                <a:ea typeface="微软雅黑"/>
-                <a:cs typeface="Arial"/>
-              </a:rPr>
-              <a:t>图：本项目自制（results/figures）</a:t>
-            </a:r>
+              <a:rPr sz="2000" b="1">
+                <a:solidFill>
+                  <a:srgbClr val="B03A2E"/>
+                </a:solidFill>
+                <a:latin typeface="Arial"/>
+                <a:ea typeface="微软雅黑"/>
+                <a:cs typeface="Arial"/>
+              </a:rPr>
+              <a:t>01</a:t>
+            </a:r>
+          </a:p>
+        </p:txBody>
+      </p:sp>
+      <p:sp>
+        <p:nvSpPr>
+          <p:cNvPr id="5" name="TextBox 4"/>
+          <p:cNvSpPr txBox="1"/>
+          <p:nvPr/>
+        </p:nvSpPr>
+        <p:spPr>
+          <a:xfrm>
+            <a:off x="1207008" y="1444752"/>
+            <a:ext cx="10332720" cy="969264"/>
+          </a:xfrm>
+          <a:prstGeom prst="rect">
+            <a:avLst/>
+          </a:prstGeom>
+          <a:noFill/>
+        </p:spPr>
+        <p:txBody>
+          <a:bodyPr wrap="square" anchor="t" lIns="27432" rIns="27432" tIns="0" bIns="0">
+            <a:spAutoFit/>
+          </a:bodyPr>
+          <a:lstStyle/>
+          <a:p>
+            <a:pPr algn="l">
+              <a:lnSpc>
+                <a:spcPct val="108000"/>
+              </a:lnSpc>
+              <a:spcBef>
+                <a:spcPts val="0"/>
+              </a:spcBef>
+              <a:spcAft>
+                <a:spcPts val="0"/>
+              </a:spcAft>
+            </a:pPr>
+            <a:r>
+              <a:rPr sz="1800" b="1">
+                <a:solidFill>
+                  <a:srgbClr val="111111"/>
+                </a:solidFill>
+                <a:latin typeface="Arial"/>
+                <a:ea typeface="微软雅黑"/>
+                <a:cs typeface="Arial"/>
+              </a:rPr>
+              <a:t>上游驱动：菌群失衡与肠屏障通透性升高</a:t>
+            </a:r>
+          </a:p>
+          <a:p>
+            <a:pPr algn="l">
+              <a:lnSpc>
+                <a:spcPct val="120000"/>
+              </a:lnSpc>
+              <a:spcBef>
+                <a:spcPts val="300"/>
+              </a:spcBef>
+              <a:spcAft>
+                <a:spcPts val="0"/>
+              </a:spcAft>
+            </a:pPr>
+            <a:r>
+              <a:rPr sz="1600" b="0">
+                <a:solidFill>
+                  <a:srgbClr val="333333"/>
+                </a:solidFill>
+                <a:latin typeface="Arial"/>
+                <a:ea typeface="微软雅黑"/>
+                <a:cs typeface="Arial"/>
+              </a:rPr>
+              <a:t>AD 与前驱阶段的肠道菌群失衡、肠屏障标志物升高，使内毒素与病原体长期入血 [11][17][46]。</a:t>
+            </a:r>
+          </a:p>
+        </p:txBody>
+      </p:sp>
+      <p:sp>
+        <p:nvSpPr>
+          <p:cNvPr id="6" name="Rectangle 5"/>
+          <p:cNvSpPr/>
+          <p:nvPr/>
+        </p:nvSpPr>
+        <p:spPr>
+          <a:xfrm>
+            <a:off x="640080" y="2249424"/>
+            <a:ext cx="10908792" cy="12700"/>
+          </a:xfrm>
+          <a:prstGeom prst="rect">
+            <a:avLst/>
+          </a:prstGeom>
+          <a:solidFill>
+            <a:srgbClr val="DDDDDA"/>
+          </a:solidFill>
+          <a:ln>
+            <a:noFill/>
+          </a:ln>
+          <a:effectLst/>
+        </p:spPr>
+        <p:style>
+          <a:lnRef idx="1">
+            <a:schemeClr val="accent1"/>
+          </a:lnRef>
+          <a:fillRef idx="3">
+            <a:schemeClr val="accent1"/>
+          </a:fillRef>
+          <a:effectRef idx="2">
+            <a:schemeClr val="accent1"/>
+          </a:effectRef>
+          <a:fontRef idx="minor">
+            <a:schemeClr val="lt1"/>
+          </a:fontRef>
+        </p:style>
+        <p:txBody>
+          <a:bodyPr rtlCol="0" anchor="ctr"/>
+          <a:lstStyle/>
+          <a:p>
+            <a:pPr algn="ctr"/>
           </a:p>
         </p:txBody>
       </p:sp>
@@ -9649,8 +9437,8 @@
         </p:nvSpPr>
         <p:spPr>
           <a:xfrm>
-            <a:off x="640080" y="6419088"/>
-            <a:ext cx="8778240" cy="310896"/>
+            <a:off x="640080" y="2523744"/>
+            <a:ext cx="548640" cy="457200"/>
           </a:xfrm>
           <a:prstGeom prst="rect">
             <a:avLst/>
@@ -9675,6 +9463,448 @@
               </a:spcAft>
             </a:pPr>
             <a:r>
+              <a:rPr sz="2000" b="1">
+                <a:solidFill>
+                  <a:srgbClr val="B03A2E"/>
+                </a:solidFill>
+                <a:latin typeface="Arial"/>
+                <a:ea typeface="微软雅黑"/>
+                <a:cs typeface="Arial"/>
+              </a:rPr>
+              <a:t>02</a:t>
+            </a:r>
+          </a:p>
+        </p:txBody>
+      </p:sp>
+      <p:sp>
+        <p:nvSpPr>
+          <p:cNvPr id="8" name="TextBox 7"/>
+          <p:cNvSpPr txBox="1"/>
+          <p:nvPr/>
+        </p:nvSpPr>
+        <p:spPr>
+          <a:xfrm>
+            <a:off x="1207008" y="2523744"/>
+            <a:ext cx="10332720" cy="969264"/>
+          </a:xfrm>
+          <a:prstGeom prst="rect">
+            <a:avLst/>
+          </a:prstGeom>
+          <a:noFill/>
+        </p:spPr>
+        <p:txBody>
+          <a:bodyPr wrap="square" anchor="t" lIns="27432" rIns="27432" tIns="0" bIns="0">
+            <a:spAutoFit/>
+          </a:bodyPr>
+          <a:lstStyle/>
+          <a:p>
+            <a:pPr algn="l">
+              <a:lnSpc>
+                <a:spcPct val="108000"/>
+              </a:lnSpc>
+              <a:spcBef>
+                <a:spcPts val="0"/>
+              </a:spcBef>
+              <a:spcAft>
+                <a:spcPts val="0"/>
+              </a:spcAft>
+            </a:pPr>
+            <a:r>
+              <a:rPr sz="1800" b="1">
+                <a:solidFill>
+                  <a:srgbClr val="111111"/>
+                </a:solidFill>
+                <a:latin typeface="Arial"/>
+                <a:ea typeface="微软雅黑"/>
+                <a:cs typeface="Arial"/>
+              </a:rPr>
+              <a:t>放大环节：促炎因子上调 Aβ 与抗菌肽的表达</a:t>
+            </a:r>
+          </a:p>
+          <a:p>
+            <a:pPr algn="l">
+              <a:lnSpc>
+                <a:spcPct val="120000"/>
+              </a:lnSpc>
+              <a:spcBef>
+                <a:spcPts val="300"/>
+              </a:spcBef>
+              <a:spcAft>
+                <a:spcPts val="0"/>
+              </a:spcAft>
+            </a:pPr>
+            <a:r>
+              <a:rPr sz="1600" b="0">
+                <a:solidFill>
+                  <a:srgbClr val="333333"/>
+                </a:solidFill>
+                <a:latin typeface="Arial"/>
+                <a:ea typeface="微软雅黑"/>
+                <a:cs typeface="Arial"/>
+              </a:rPr>
+              <a:t>LPS 经 TLR4/NF-κB 升高促炎因子，促炎因子又上调 Aβ 生成 [11][46]；TNF-α 与 Aβ 可直接诱导 CAP37 表达 [9]。</a:t>
+            </a:r>
+          </a:p>
+        </p:txBody>
+      </p:sp>
+      <p:sp>
+        <p:nvSpPr>
+          <p:cNvPr id="9" name="Rectangle 8"/>
+          <p:cNvSpPr/>
+          <p:nvPr/>
+        </p:nvSpPr>
+        <p:spPr>
+          <a:xfrm>
+            <a:off x="640080" y="3328415"/>
+            <a:ext cx="10908792" cy="12700"/>
+          </a:xfrm>
+          <a:prstGeom prst="rect">
+            <a:avLst/>
+          </a:prstGeom>
+          <a:solidFill>
+            <a:srgbClr val="DDDDDA"/>
+          </a:solidFill>
+          <a:ln>
+            <a:noFill/>
+          </a:ln>
+          <a:effectLst/>
+        </p:spPr>
+        <p:style>
+          <a:lnRef idx="1">
+            <a:schemeClr val="accent1"/>
+          </a:lnRef>
+          <a:fillRef idx="3">
+            <a:schemeClr val="accent1"/>
+          </a:fillRef>
+          <a:effectRef idx="2">
+            <a:schemeClr val="accent1"/>
+          </a:effectRef>
+          <a:fontRef idx="minor">
+            <a:schemeClr val="lt1"/>
+          </a:fontRef>
+        </p:style>
+        <p:txBody>
+          <a:bodyPr rtlCol="0" anchor="ctr"/>
+          <a:lstStyle/>
+          <a:p>
+            <a:pPr algn="ctr"/>
+          </a:p>
+        </p:txBody>
+      </p:sp>
+      <p:sp>
+        <p:nvSpPr>
+          <p:cNvPr id="10" name="TextBox 9"/>
+          <p:cNvSpPr txBox="1"/>
+          <p:nvPr/>
+        </p:nvSpPr>
+        <p:spPr>
+          <a:xfrm>
+            <a:off x="640080" y="3602735"/>
+            <a:ext cx="548640" cy="457200"/>
+          </a:xfrm>
+          <a:prstGeom prst="rect">
+            <a:avLst/>
+          </a:prstGeom>
+          <a:noFill/>
+        </p:spPr>
+        <p:txBody>
+          <a:bodyPr wrap="square" anchor="t" lIns="27432" rIns="27432" tIns="0" bIns="0">
+            <a:spAutoFit/>
+          </a:bodyPr>
+          <a:lstStyle/>
+          <a:p>
+            <a:pPr algn="l">
+              <a:lnSpc>
+                <a:spcPct val="100000"/>
+              </a:lnSpc>
+              <a:spcBef>
+                <a:spcPts val="0"/>
+              </a:spcBef>
+              <a:spcAft>
+                <a:spcPts val="0"/>
+              </a:spcAft>
+            </a:pPr>
+            <a:r>
+              <a:rPr sz="2000" b="1">
+                <a:solidFill>
+                  <a:srgbClr val="B03A2E"/>
+                </a:solidFill>
+                <a:latin typeface="Arial"/>
+                <a:ea typeface="微软雅黑"/>
+                <a:cs typeface="Arial"/>
+              </a:rPr>
+              <a:t>03</a:t>
+            </a:r>
+          </a:p>
+        </p:txBody>
+      </p:sp>
+      <p:sp>
+        <p:nvSpPr>
+          <p:cNvPr id="11" name="TextBox 10"/>
+          <p:cNvSpPr txBox="1"/>
+          <p:nvPr/>
+        </p:nvSpPr>
+        <p:spPr>
+          <a:xfrm>
+            <a:off x="1207008" y="3602735"/>
+            <a:ext cx="10332720" cy="969264"/>
+          </a:xfrm>
+          <a:prstGeom prst="rect">
+            <a:avLst/>
+          </a:prstGeom>
+          <a:noFill/>
+        </p:spPr>
+        <p:txBody>
+          <a:bodyPr wrap="square" anchor="t" lIns="27432" rIns="27432" tIns="0" bIns="0">
+            <a:spAutoFit/>
+          </a:bodyPr>
+          <a:lstStyle/>
+          <a:p>
+            <a:pPr algn="l">
+              <a:lnSpc>
+                <a:spcPct val="108000"/>
+              </a:lnSpc>
+              <a:spcBef>
+                <a:spcPts val="0"/>
+              </a:spcBef>
+              <a:spcAft>
+                <a:spcPts val="0"/>
+              </a:spcAft>
+            </a:pPr>
+            <a:r>
+              <a:rPr sz="1800" b="1">
+                <a:solidFill>
+                  <a:srgbClr val="111111"/>
+                </a:solidFill>
+                <a:latin typeface="Arial"/>
+                <a:ea typeface="微软雅黑"/>
+                <a:cs typeface="Arial"/>
+              </a:rPr>
+              <a:t>闭环：聚集后的 Aβ 再激活小胶质细胞</a:t>
+            </a:r>
+          </a:p>
+          <a:p>
+            <a:pPr algn="l">
+              <a:lnSpc>
+                <a:spcPct val="120000"/>
+              </a:lnSpc>
+              <a:spcBef>
+                <a:spcPts val="300"/>
+              </a:spcBef>
+              <a:spcAft>
+                <a:spcPts val="0"/>
+              </a:spcAft>
+            </a:pPr>
+            <a:r>
+              <a:rPr sz="1600" b="0">
+                <a:solidFill>
+                  <a:srgbClr val="333333"/>
+                </a:solidFill>
+                <a:latin typeface="Arial"/>
+                <a:ea typeface="微软雅黑"/>
+                <a:cs typeface="Arial"/>
+              </a:rPr>
+              <a:t>Aβ 与抗菌肽聚集、成核并激活小胶质细胞，释放更多炎症介质；LL-37 经 CLIC1 引起小胶质过度活化，小鼠与猴模型出现 Aβ 升高与脑萎缩 [6][7]。</a:t>
+            </a:r>
+          </a:p>
+        </p:txBody>
+      </p:sp>
+      <p:sp>
+        <p:nvSpPr>
+          <p:cNvPr id="12" name="Rectangle 11"/>
+          <p:cNvSpPr/>
+          <p:nvPr/>
+        </p:nvSpPr>
+        <p:spPr>
+          <a:xfrm>
+            <a:off x="640080" y="4407407"/>
+            <a:ext cx="10908792" cy="12700"/>
+          </a:xfrm>
+          <a:prstGeom prst="rect">
+            <a:avLst/>
+          </a:prstGeom>
+          <a:solidFill>
+            <a:srgbClr val="DDDDDA"/>
+          </a:solidFill>
+          <a:ln>
+            <a:noFill/>
+          </a:ln>
+          <a:effectLst/>
+        </p:spPr>
+        <p:style>
+          <a:lnRef idx="1">
+            <a:schemeClr val="accent1"/>
+          </a:lnRef>
+          <a:fillRef idx="3">
+            <a:schemeClr val="accent1"/>
+          </a:fillRef>
+          <a:effectRef idx="2">
+            <a:schemeClr val="accent1"/>
+          </a:effectRef>
+          <a:fontRef idx="minor">
+            <a:schemeClr val="lt1"/>
+          </a:fontRef>
+        </p:style>
+        <p:txBody>
+          <a:bodyPr rtlCol="0" anchor="ctr"/>
+          <a:lstStyle/>
+          <a:p>
+            <a:pPr algn="ctr"/>
+          </a:p>
+        </p:txBody>
+      </p:sp>
+      <p:sp>
+        <p:nvSpPr>
+          <p:cNvPr id="13" name="TextBox 12"/>
+          <p:cNvSpPr txBox="1"/>
+          <p:nvPr/>
+        </p:nvSpPr>
+        <p:spPr>
+          <a:xfrm>
+            <a:off x="640080" y="4681727"/>
+            <a:ext cx="548640" cy="457200"/>
+          </a:xfrm>
+          <a:prstGeom prst="rect">
+            <a:avLst/>
+          </a:prstGeom>
+          <a:noFill/>
+        </p:spPr>
+        <p:txBody>
+          <a:bodyPr wrap="square" anchor="t" lIns="27432" rIns="27432" tIns="0" bIns="0">
+            <a:spAutoFit/>
+          </a:bodyPr>
+          <a:lstStyle/>
+          <a:p>
+            <a:pPr algn="l">
+              <a:lnSpc>
+                <a:spcPct val="100000"/>
+              </a:lnSpc>
+              <a:spcBef>
+                <a:spcPts val="0"/>
+              </a:spcBef>
+              <a:spcAft>
+                <a:spcPts val="0"/>
+              </a:spcAft>
+            </a:pPr>
+            <a:r>
+              <a:rPr sz="2000" b="1">
+                <a:solidFill>
+                  <a:srgbClr val="B03A2E"/>
+                </a:solidFill>
+                <a:latin typeface="Arial"/>
+                <a:ea typeface="微软雅黑"/>
+                <a:cs typeface="Arial"/>
+              </a:rPr>
+              <a:t>04</a:t>
+            </a:r>
+          </a:p>
+        </p:txBody>
+      </p:sp>
+      <p:sp>
+        <p:nvSpPr>
+          <p:cNvPr id="14" name="TextBox 13"/>
+          <p:cNvSpPr txBox="1"/>
+          <p:nvPr/>
+        </p:nvSpPr>
+        <p:spPr>
+          <a:xfrm>
+            <a:off x="1207008" y="4681727"/>
+            <a:ext cx="10332720" cy="969264"/>
+          </a:xfrm>
+          <a:prstGeom prst="rect">
+            <a:avLst/>
+          </a:prstGeom>
+          <a:noFill/>
+        </p:spPr>
+        <p:txBody>
+          <a:bodyPr wrap="square" anchor="t" lIns="27432" rIns="27432" tIns="0" bIns="0">
+            <a:spAutoFit/>
+          </a:bodyPr>
+          <a:lstStyle/>
+          <a:p>
+            <a:pPr algn="l">
+              <a:lnSpc>
+                <a:spcPct val="108000"/>
+              </a:lnSpc>
+              <a:spcBef>
+                <a:spcPts val="0"/>
+              </a:spcBef>
+              <a:spcAft>
+                <a:spcPts val="0"/>
+              </a:spcAft>
+            </a:pPr>
+            <a:r>
+              <a:rPr sz="1800" b="1">
+                <a:solidFill>
+                  <a:srgbClr val="111111"/>
+                </a:solidFill>
+                <a:latin typeface="Arial"/>
+                <a:ea typeface="微软雅黑"/>
+                <a:cs typeface="Arial"/>
+              </a:rPr>
+              <a:t>临床对应：炎症指标与抗菌肽水平同步升高</a:t>
+            </a:r>
+          </a:p>
+          <a:p>
+            <a:pPr algn="l">
+              <a:lnSpc>
+                <a:spcPct val="120000"/>
+              </a:lnSpc>
+              <a:spcBef>
+                <a:spcPts val="300"/>
+              </a:spcBef>
+              <a:spcAft>
+                <a:spcPts val="0"/>
+              </a:spcAft>
+            </a:pPr>
+            <a:r>
+              <a:rPr sz="1600" b="0">
+                <a:solidFill>
+                  <a:srgbClr val="333333"/>
+                </a:solidFill>
+                <a:latin typeface="Arial"/>
+                <a:ea typeface="微软雅黑"/>
+                <a:cs typeface="Arial"/>
+              </a:rPr>
+              <a:t>血清 LL-37 高者两年内 MMSE 下降 ≥3 分的比值比为 2.11，NfL 与 pTau181 上升更快 [42]；前驱阶段的 CRP 与 LPS 已经升高 [17]。</a:t>
+            </a:r>
+          </a:p>
+        </p:txBody>
+      </p:sp>
+      <p:sp>
+        <p:nvSpPr>
+          <p:cNvPr id="15" name="TextBox 14"/>
+          <p:cNvSpPr txBox="1"/>
+          <p:nvPr/>
+        </p:nvSpPr>
+        <p:spPr>
+          <a:xfrm>
+            <a:off x="640080" y="6419088"/>
+            <a:ext cx="8778240" cy="310896"/>
+          </a:xfrm>
+          <a:prstGeom prst="rect">
+            <a:avLst/>
+          </a:prstGeom>
+          <a:noFill/>
+        </p:spPr>
+        <p:txBody>
+          <a:bodyPr wrap="square" anchor="t" lIns="27432" rIns="27432" tIns="0" bIns="0">
+            <a:spAutoFit/>
+          </a:bodyPr>
+          <a:lstStyle/>
+          <a:p>
+            <a:pPr algn="l">
+              <a:lnSpc>
+                <a:spcPct val="100000"/>
+              </a:lnSpc>
+              <a:spcBef>
+                <a:spcPts val="0"/>
+              </a:spcBef>
+              <a:spcAft>
+                <a:spcPts val="0"/>
+              </a:spcAft>
+            </a:pPr>
+            <a:r>
               <a:rPr sz="1500" b="0">
                 <a:solidFill>
                   <a:srgbClr val="777777"/>
@@ -9690,7 +9920,7 @@
       </p:sp>
       <p:sp>
         <p:nvSpPr>
-          <p:cNvPr id="8" name="TextBox 7"/>
+          <p:cNvPr id="16" name="TextBox 15"/>
           <p:cNvSpPr txBox="1"/>
           <p:nvPr/>
         </p:nvSpPr>
@@ -10232,7 +10462,7 @@
                 <a:ea typeface="微软雅黑"/>
                 <a:cs typeface="Arial"/>
               </a:rPr>
-              <a:t>为什么 AD 组更多：炎症—Aβ—抗菌肽构成正反馈</a:t>
+              <a:t>分子机制（一）：AChE–Aβ 复合物的动力学要点</a:t>
             </a:r>
           </a:p>
         </p:txBody>
@@ -10281,16 +10511,87 @@
           </a:p>
         </p:txBody>
       </p:sp>
-      <p:sp>
-        <p:nvSpPr>
-          <p:cNvPr id="4" name="TextBox 3"/>
+      <p:pic>
+        <p:nvPicPr>
+          <p:cNvPr id="4" name="Picture 3" descr="figM2_AChE_Aβ_机制.png"/>
+          <p:cNvPicPr>
+            <a:picLocks noChangeAspect="1"/>
+          </p:cNvPicPr>
+          <p:nvPr/>
+        </p:nvPicPr>
+        <p:blipFill>
+          <a:blip r:embed="rId2"/>
+          <a:stretch>
+            <a:fillRect/>
+          </a:stretch>
+        </p:blipFill>
+        <p:spPr>
+          <a:xfrm>
+            <a:off x="825790" y="1188720"/>
+            <a:ext cx="10537371" cy="3931920"/>
+          </a:xfrm>
+          <a:prstGeom prst="rect">
+            <a:avLst/>
+          </a:prstGeom>
+        </p:spPr>
+      </p:pic>
+      <p:sp>
+        <p:nvSpPr>
+          <p:cNvPr id="5" name="TextBox 4"/>
           <p:cNvSpPr txBox="1"/>
           <p:nvPr/>
         </p:nvSpPr>
         <p:spPr>
           <a:xfrm>
-            <a:off x="640080" y="1444752"/>
-            <a:ext cx="548640" cy="457200"/>
+            <a:off x="640080" y="5248655"/>
+            <a:ext cx="10908792" cy="749808"/>
+          </a:xfrm>
+          <a:prstGeom prst="rect">
+            <a:avLst/>
+          </a:prstGeom>
+          <a:noFill/>
+        </p:spPr>
+        <p:txBody>
+          <a:bodyPr wrap="square" anchor="t" lIns="27432" rIns="27432" tIns="0" bIns="0">
+            <a:spAutoFit/>
+          </a:bodyPr>
+          <a:lstStyle/>
+          <a:p>
+            <a:pPr algn="l">
+              <a:lnSpc>
+                <a:spcPct val="124000"/>
+              </a:lnSpc>
+              <a:spcBef>
+                <a:spcPts val="0"/>
+              </a:spcBef>
+              <a:spcAft>
+                <a:spcPts val="0"/>
+              </a:spcAft>
+            </a:pPr>
+            <a:r>
+              <a:rPr sz="1600" b="0">
+                <a:solidFill>
+                  <a:srgbClr val="333333"/>
+                </a:solidFill>
+                <a:latin typeface="Arial"/>
+                <a:ea typeface="微软雅黑"/>
+                <a:cs typeface="Arial"/>
+              </a:rPr>
+              <a:t>PAS 是 Aβ 聚集的成核中心：1 μs 模拟中复合物稳定，Aβ 主要停留于 344—361 区段，不受双位点抑制剂位阻 [31]；丙锭阻断 PAS 后聚集被抑制 [33]。</a:t>
+            </a:r>
+          </a:p>
+        </p:txBody>
+      </p:sp>
+      <p:sp>
+        <p:nvSpPr>
+          <p:cNvPr id="6" name="TextBox 5"/>
+          <p:cNvSpPr txBox="1"/>
+          <p:nvPr/>
+        </p:nvSpPr>
+        <p:spPr>
+          <a:xfrm>
+            <a:off x="640080" y="6419088"/>
+            <a:ext cx="8778240" cy="310896"/>
           </a:xfrm>
           <a:prstGeom prst="rect">
             <a:avLst/>
@@ -10315,626 +10616,22 @@
               </a:spcAft>
             </a:pPr>
             <a:r>
-              <a:rPr sz="2000" b="1">
-                <a:solidFill>
-                  <a:srgbClr val="B03A2E"/>
-                </a:solidFill>
-                <a:latin typeface="Arial"/>
-                <a:ea typeface="微软雅黑"/>
-                <a:cs typeface="Arial"/>
-              </a:rPr>
-              <a:t>01</a:t>
-            </a:r>
-          </a:p>
-        </p:txBody>
-      </p:sp>
-      <p:sp>
-        <p:nvSpPr>
-          <p:cNvPr id="5" name="TextBox 4"/>
-          <p:cNvSpPr txBox="1"/>
-          <p:nvPr/>
-        </p:nvSpPr>
-        <p:spPr>
-          <a:xfrm>
-            <a:off x="1207008" y="1444752"/>
-            <a:ext cx="10332720" cy="969264"/>
-          </a:xfrm>
-          <a:prstGeom prst="rect">
-            <a:avLst/>
-          </a:prstGeom>
-          <a:noFill/>
-        </p:spPr>
-        <p:txBody>
-          <a:bodyPr wrap="square" anchor="t" lIns="27432" rIns="27432" tIns="0" bIns="0">
-            <a:spAutoFit/>
-          </a:bodyPr>
-          <a:lstStyle/>
-          <a:p>
-            <a:pPr algn="l">
-              <a:lnSpc>
-                <a:spcPct val="108000"/>
-              </a:lnSpc>
-              <a:spcBef>
-                <a:spcPts val="0"/>
-              </a:spcBef>
-              <a:spcAft>
-                <a:spcPts val="0"/>
-              </a:spcAft>
-            </a:pPr>
-            <a:r>
-              <a:rPr sz="1800" b="1">
-                <a:solidFill>
-                  <a:srgbClr val="111111"/>
-                </a:solidFill>
-                <a:latin typeface="Arial"/>
-                <a:ea typeface="微软雅黑"/>
-                <a:cs typeface="Arial"/>
-              </a:rPr>
-              <a:t>上游驱动：菌群失衡与肠屏障通透性升高</a:t>
-            </a:r>
-          </a:p>
-          <a:p>
-            <a:pPr algn="l">
-              <a:lnSpc>
-                <a:spcPct val="120000"/>
-              </a:lnSpc>
-              <a:spcBef>
-                <a:spcPts val="300"/>
-              </a:spcBef>
-              <a:spcAft>
-                <a:spcPts val="0"/>
-              </a:spcAft>
-            </a:pPr>
-            <a:r>
-              <a:rPr sz="1600" b="0">
-                <a:solidFill>
-                  <a:srgbClr val="333333"/>
-                </a:solidFill>
-                <a:latin typeface="Arial"/>
-                <a:ea typeface="微软雅黑"/>
-                <a:cs typeface="Arial"/>
-              </a:rPr>
-              <a:t>AD 与前驱阶段的肠道菌群失衡、肠屏障标志物升高，使内毒素与病原体长期入血 [11][17][46]。</a:t>
-            </a:r>
-          </a:p>
-        </p:txBody>
-      </p:sp>
-      <p:sp>
-        <p:nvSpPr>
-          <p:cNvPr id="6" name="Rectangle 5"/>
-          <p:cNvSpPr/>
-          <p:nvPr/>
-        </p:nvSpPr>
-        <p:spPr>
-          <a:xfrm>
-            <a:off x="640080" y="2249424"/>
-            <a:ext cx="10908792" cy="12700"/>
-          </a:xfrm>
-          <a:prstGeom prst="rect">
-            <a:avLst/>
-          </a:prstGeom>
-          <a:solidFill>
-            <a:srgbClr val="DDDDDA"/>
-          </a:solidFill>
-          <a:ln>
-            <a:noFill/>
-          </a:ln>
-          <a:effectLst/>
-        </p:spPr>
-        <p:style>
-          <a:lnRef idx="1">
-            <a:schemeClr val="accent1"/>
-          </a:lnRef>
-          <a:fillRef idx="3">
-            <a:schemeClr val="accent1"/>
-          </a:fillRef>
-          <a:effectRef idx="2">
-            <a:schemeClr val="accent1"/>
-          </a:effectRef>
-          <a:fontRef idx="minor">
-            <a:schemeClr val="lt1"/>
-          </a:fontRef>
-        </p:style>
-        <p:txBody>
-          <a:bodyPr rtlCol="0" anchor="ctr"/>
-          <a:lstStyle/>
-          <a:p>
-            <a:pPr algn="ctr"/>
+              <a:rPr sz="1500" b="0">
+                <a:solidFill>
+                  <a:srgbClr val="777777"/>
+                </a:solidFill>
+                <a:latin typeface="Arial"/>
+                <a:ea typeface="微软雅黑"/>
+                <a:cs typeface="Arial"/>
+              </a:rPr>
+              <a:t>研究生论文中期检查 · 文绍华</a:t>
+            </a:r>
           </a:p>
         </p:txBody>
       </p:sp>
       <p:sp>
         <p:nvSpPr>
           <p:cNvPr id="7" name="TextBox 6"/>
-          <p:cNvSpPr txBox="1"/>
-          <p:nvPr/>
-        </p:nvSpPr>
-        <p:spPr>
-          <a:xfrm>
-            <a:off x="640080" y="2523744"/>
-            <a:ext cx="548640" cy="457200"/>
-          </a:xfrm>
-          <a:prstGeom prst="rect">
-            <a:avLst/>
-          </a:prstGeom>
-          <a:noFill/>
-        </p:spPr>
-        <p:txBody>
-          <a:bodyPr wrap="square" anchor="t" lIns="27432" rIns="27432" tIns="0" bIns="0">
-            <a:spAutoFit/>
-          </a:bodyPr>
-          <a:lstStyle/>
-          <a:p>
-            <a:pPr algn="l">
-              <a:lnSpc>
-                <a:spcPct val="100000"/>
-              </a:lnSpc>
-              <a:spcBef>
-                <a:spcPts val="0"/>
-              </a:spcBef>
-              <a:spcAft>
-                <a:spcPts val="0"/>
-              </a:spcAft>
-            </a:pPr>
-            <a:r>
-              <a:rPr sz="2000" b="1">
-                <a:solidFill>
-                  <a:srgbClr val="B03A2E"/>
-                </a:solidFill>
-                <a:latin typeface="Arial"/>
-                <a:ea typeface="微软雅黑"/>
-                <a:cs typeface="Arial"/>
-              </a:rPr>
-              <a:t>02</a:t>
-            </a:r>
-          </a:p>
-        </p:txBody>
-      </p:sp>
-      <p:sp>
-        <p:nvSpPr>
-          <p:cNvPr id="8" name="TextBox 7"/>
-          <p:cNvSpPr txBox="1"/>
-          <p:nvPr/>
-        </p:nvSpPr>
-        <p:spPr>
-          <a:xfrm>
-            <a:off x="1207008" y="2523744"/>
-            <a:ext cx="10332720" cy="969264"/>
-          </a:xfrm>
-          <a:prstGeom prst="rect">
-            <a:avLst/>
-          </a:prstGeom>
-          <a:noFill/>
-        </p:spPr>
-        <p:txBody>
-          <a:bodyPr wrap="square" anchor="t" lIns="27432" rIns="27432" tIns="0" bIns="0">
-            <a:spAutoFit/>
-          </a:bodyPr>
-          <a:lstStyle/>
-          <a:p>
-            <a:pPr algn="l">
-              <a:lnSpc>
-                <a:spcPct val="108000"/>
-              </a:lnSpc>
-              <a:spcBef>
-                <a:spcPts val="0"/>
-              </a:spcBef>
-              <a:spcAft>
-                <a:spcPts val="0"/>
-              </a:spcAft>
-            </a:pPr>
-            <a:r>
-              <a:rPr sz="1800" b="1">
-                <a:solidFill>
-                  <a:srgbClr val="111111"/>
-                </a:solidFill>
-                <a:latin typeface="Arial"/>
-                <a:ea typeface="微软雅黑"/>
-                <a:cs typeface="Arial"/>
-              </a:rPr>
-              <a:t>放大环节：促炎因子上调 Aβ 与抗菌肽的表达</a:t>
-            </a:r>
-          </a:p>
-          <a:p>
-            <a:pPr algn="l">
-              <a:lnSpc>
-                <a:spcPct val="120000"/>
-              </a:lnSpc>
-              <a:spcBef>
-                <a:spcPts val="300"/>
-              </a:spcBef>
-              <a:spcAft>
-                <a:spcPts val="0"/>
-              </a:spcAft>
-            </a:pPr>
-            <a:r>
-              <a:rPr sz="1600" b="0">
-                <a:solidFill>
-                  <a:srgbClr val="333333"/>
-                </a:solidFill>
-                <a:latin typeface="Arial"/>
-                <a:ea typeface="微软雅黑"/>
-                <a:cs typeface="Arial"/>
-              </a:rPr>
-              <a:t>LPS 经 TLR4/NF-κB 升高促炎因子，促炎因子又上调 Aβ 生成 [11][46]；TNF-α 与 Aβ 可直接诱导 CAP37 表达 [9]。</a:t>
-            </a:r>
-          </a:p>
-        </p:txBody>
-      </p:sp>
-      <p:sp>
-        <p:nvSpPr>
-          <p:cNvPr id="9" name="Rectangle 8"/>
-          <p:cNvSpPr/>
-          <p:nvPr/>
-        </p:nvSpPr>
-        <p:spPr>
-          <a:xfrm>
-            <a:off x="640080" y="3328415"/>
-            <a:ext cx="10908792" cy="12700"/>
-          </a:xfrm>
-          <a:prstGeom prst="rect">
-            <a:avLst/>
-          </a:prstGeom>
-          <a:solidFill>
-            <a:srgbClr val="DDDDDA"/>
-          </a:solidFill>
-          <a:ln>
-            <a:noFill/>
-          </a:ln>
-          <a:effectLst/>
-        </p:spPr>
-        <p:style>
-          <a:lnRef idx="1">
-            <a:schemeClr val="accent1"/>
-          </a:lnRef>
-          <a:fillRef idx="3">
-            <a:schemeClr val="accent1"/>
-          </a:fillRef>
-          <a:effectRef idx="2">
-            <a:schemeClr val="accent1"/>
-          </a:effectRef>
-          <a:fontRef idx="minor">
-            <a:schemeClr val="lt1"/>
-          </a:fontRef>
-        </p:style>
-        <p:txBody>
-          <a:bodyPr rtlCol="0" anchor="ctr"/>
-          <a:lstStyle/>
-          <a:p>
-            <a:pPr algn="ctr"/>
-          </a:p>
-        </p:txBody>
-      </p:sp>
-      <p:sp>
-        <p:nvSpPr>
-          <p:cNvPr id="10" name="TextBox 9"/>
-          <p:cNvSpPr txBox="1"/>
-          <p:nvPr/>
-        </p:nvSpPr>
-        <p:spPr>
-          <a:xfrm>
-            <a:off x="640080" y="3602735"/>
-            <a:ext cx="548640" cy="457200"/>
-          </a:xfrm>
-          <a:prstGeom prst="rect">
-            <a:avLst/>
-          </a:prstGeom>
-          <a:noFill/>
-        </p:spPr>
-        <p:txBody>
-          <a:bodyPr wrap="square" anchor="t" lIns="27432" rIns="27432" tIns="0" bIns="0">
-            <a:spAutoFit/>
-          </a:bodyPr>
-          <a:lstStyle/>
-          <a:p>
-            <a:pPr algn="l">
-              <a:lnSpc>
-                <a:spcPct val="100000"/>
-              </a:lnSpc>
-              <a:spcBef>
-                <a:spcPts val="0"/>
-              </a:spcBef>
-              <a:spcAft>
-                <a:spcPts val="0"/>
-              </a:spcAft>
-            </a:pPr>
-            <a:r>
-              <a:rPr sz="2000" b="1">
-                <a:solidFill>
-                  <a:srgbClr val="B03A2E"/>
-                </a:solidFill>
-                <a:latin typeface="Arial"/>
-                <a:ea typeface="微软雅黑"/>
-                <a:cs typeface="Arial"/>
-              </a:rPr>
-              <a:t>03</a:t>
-            </a:r>
-          </a:p>
-        </p:txBody>
-      </p:sp>
-      <p:sp>
-        <p:nvSpPr>
-          <p:cNvPr id="11" name="TextBox 10"/>
-          <p:cNvSpPr txBox="1"/>
-          <p:nvPr/>
-        </p:nvSpPr>
-        <p:spPr>
-          <a:xfrm>
-            <a:off x="1207008" y="3602735"/>
-            <a:ext cx="10332720" cy="969264"/>
-          </a:xfrm>
-          <a:prstGeom prst="rect">
-            <a:avLst/>
-          </a:prstGeom>
-          <a:noFill/>
-        </p:spPr>
-        <p:txBody>
-          <a:bodyPr wrap="square" anchor="t" lIns="27432" rIns="27432" tIns="0" bIns="0">
-            <a:spAutoFit/>
-          </a:bodyPr>
-          <a:lstStyle/>
-          <a:p>
-            <a:pPr algn="l">
-              <a:lnSpc>
-                <a:spcPct val="108000"/>
-              </a:lnSpc>
-              <a:spcBef>
-                <a:spcPts val="0"/>
-              </a:spcBef>
-              <a:spcAft>
-                <a:spcPts val="0"/>
-              </a:spcAft>
-            </a:pPr>
-            <a:r>
-              <a:rPr sz="1800" b="1">
-                <a:solidFill>
-                  <a:srgbClr val="111111"/>
-                </a:solidFill>
-                <a:latin typeface="Arial"/>
-                <a:ea typeface="微软雅黑"/>
-                <a:cs typeface="Arial"/>
-              </a:rPr>
-              <a:t>闭环：聚集后的 Aβ 再激活小胶质细胞</a:t>
-            </a:r>
-          </a:p>
-          <a:p>
-            <a:pPr algn="l">
-              <a:lnSpc>
-                <a:spcPct val="120000"/>
-              </a:lnSpc>
-              <a:spcBef>
-                <a:spcPts val="300"/>
-              </a:spcBef>
-              <a:spcAft>
-                <a:spcPts val="0"/>
-              </a:spcAft>
-            </a:pPr>
-            <a:r>
-              <a:rPr sz="1600" b="0">
-                <a:solidFill>
-                  <a:srgbClr val="333333"/>
-                </a:solidFill>
-                <a:latin typeface="Arial"/>
-                <a:ea typeface="微软雅黑"/>
-                <a:cs typeface="Arial"/>
-              </a:rPr>
-              <a:t>Aβ 与抗菌肽聚集、成核并激活小胶质细胞，释放更多炎症介质；LL-37 经 CLIC1 引起小胶质过度活化，小鼠与猴模型出现 Aβ 升高与脑萎缩 [6][7]。</a:t>
-            </a:r>
-          </a:p>
-        </p:txBody>
-      </p:sp>
-      <p:sp>
-        <p:nvSpPr>
-          <p:cNvPr id="12" name="Rectangle 11"/>
-          <p:cNvSpPr/>
-          <p:nvPr/>
-        </p:nvSpPr>
-        <p:spPr>
-          <a:xfrm>
-            <a:off x="640080" y="4407407"/>
-            <a:ext cx="10908792" cy="12700"/>
-          </a:xfrm>
-          <a:prstGeom prst="rect">
-            <a:avLst/>
-          </a:prstGeom>
-          <a:solidFill>
-            <a:srgbClr val="DDDDDA"/>
-          </a:solidFill>
-          <a:ln>
-            <a:noFill/>
-          </a:ln>
-          <a:effectLst/>
-        </p:spPr>
-        <p:style>
-          <a:lnRef idx="1">
-            <a:schemeClr val="accent1"/>
-          </a:lnRef>
-          <a:fillRef idx="3">
-            <a:schemeClr val="accent1"/>
-          </a:fillRef>
-          <a:effectRef idx="2">
-            <a:schemeClr val="accent1"/>
-          </a:effectRef>
-          <a:fontRef idx="minor">
-            <a:schemeClr val="lt1"/>
-          </a:fontRef>
-        </p:style>
-        <p:txBody>
-          <a:bodyPr rtlCol="0" anchor="ctr"/>
-          <a:lstStyle/>
-          <a:p>
-            <a:pPr algn="ctr"/>
-          </a:p>
-        </p:txBody>
-      </p:sp>
-      <p:sp>
-        <p:nvSpPr>
-          <p:cNvPr id="13" name="TextBox 12"/>
-          <p:cNvSpPr txBox="1"/>
-          <p:nvPr/>
-        </p:nvSpPr>
-        <p:spPr>
-          <a:xfrm>
-            <a:off x="640080" y="4681727"/>
-            <a:ext cx="548640" cy="457200"/>
-          </a:xfrm>
-          <a:prstGeom prst="rect">
-            <a:avLst/>
-          </a:prstGeom>
-          <a:noFill/>
-        </p:spPr>
-        <p:txBody>
-          <a:bodyPr wrap="square" anchor="t" lIns="27432" rIns="27432" tIns="0" bIns="0">
-            <a:spAutoFit/>
-          </a:bodyPr>
-          <a:lstStyle/>
-          <a:p>
-            <a:pPr algn="l">
-              <a:lnSpc>
-                <a:spcPct val="100000"/>
-              </a:lnSpc>
-              <a:spcBef>
-                <a:spcPts val="0"/>
-              </a:spcBef>
-              <a:spcAft>
-                <a:spcPts val="0"/>
-              </a:spcAft>
-            </a:pPr>
-            <a:r>
-              <a:rPr sz="2000" b="1">
-                <a:solidFill>
-                  <a:srgbClr val="B03A2E"/>
-                </a:solidFill>
-                <a:latin typeface="Arial"/>
-                <a:ea typeface="微软雅黑"/>
-                <a:cs typeface="Arial"/>
-              </a:rPr>
-              <a:t>04</a:t>
-            </a:r>
-          </a:p>
-        </p:txBody>
-      </p:sp>
-      <p:sp>
-        <p:nvSpPr>
-          <p:cNvPr id="14" name="TextBox 13"/>
-          <p:cNvSpPr txBox="1"/>
-          <p:nvPr/>
-        </p:nvSpPr>
-        <p:spPr>
-          <a:xfrm>
-            <a:off x="1207008" y="4681727"/>
-            <a:ext cx="10332720" cy="969264"/>
-          </a:xfrm>
-          <a:prstGeom prst="rect">
-            <a:avLst/>
-          </a:prstGeom>
-          <a:noFill/>
-        </p:spPr>
-        <p:txBody>
-          <a:bodyPr wrap="square" anchor="t" lIns="27432" rIns="27432" tIns="0" bIns="0">
-            <a:spAutoFit/>
-          </a:bodyPr>
-          <a:lstStyle/>
-          <a:p>
-            <a:pPr algn="l">
-              <a:lnSpc>
-                <a:spcPct val="108000"/>
-              </a:lnSpc>
-              <a:spcBef>
-                <a:spcPts val="0"/>
-              </a:spcBef>
-              <a:spcAft>
-                <a:spcPts val="0"/>
-              </a:spcAft>
-            </a:pPr>
-            <a:r>
-              <a:rPr sz="1800" b="1">
-                <a:solidFill>
-                  <a:srgbClr val="111111"/>
-                </a:solidFill>
-                <a:latin typeface="Arial"/>
-                <a:ea typeface="微软雅黑"/>
-                <a:cs typeface="Arial"/>
-              </a:rPr>
-              <a:t>临床对应：炎症指标与抗菌肽水平同步升高</a:t>
-            </a:r>
-          </a:p>
-          <a:p>
-            <a:pPr algn="l">
-              <a:lnSpc>
-                <a:spcPct val="120000"/>
-              </a:lnSpc>
-              <a:spcBef>
-                <a:spcPts val="300"/>
-              </a:spcBef>
-              <a:spcAft>
-                <a:spcPts val="0"/>
-              </a:spcAft>
-            </a:pPr>
-            <a:r>
-              <a:rPr sz="1600" b="0">
-                <a:solidFill>
-                  <a:srgbClr val="333333"/>
-                </a:solidFill>
-                <a:latin typeface="Arial"/>
-                <a:ea typeface="微软雅黑"/>
-                <a:cs typeface="Arial"/>
-              </a:rPr>
-              <a:t>血清 LL-37 高者两年内 MMSE 下降 ≥3 分的比值比为 2.11，NfL 与 pTau181 上升更快 [42]；前驱阶段的 CRP 与 LPS 已经升高 [17]。</a:t>
-            </a:r>
-          </a:p>
-        </p:txBody>
-      </p:sp>
-      <p:sp>
-        <p:nvSpPr>
-          <p:cNvPr id="15" name="TextBox 14"/>
-          <p:cNvSpPr txBox="1"/>
-          <p:nvPr/>
-        </p:nvSpPr>
-        <p:spPr>
-          <a:xfrm>
-            <a:off x="640080" y="6419088"/>
-            <a:ext cx="8778240" cy="310896"/>
-          </a:xfrm>
-          <a:prstGeom prst="rect">
-            <a:avLst/>
-          </a:prstGeom>
-          <a:noFill/>
-        </p:spPr>
-        <p:txBody>
-          <a:bodyPr wrap="square" anchor="t" lIns="27432" rIns="27432" tIns="0" bIns="0">
-            <a:spAutoFit/>
-          </a:bodyPr>
-          <a:lstStyle/>
-          <a:p>
-            <a:pPr algn="l">
-              <a:lnSpc>
-                <a:spcPct val="100000"/>
-              </a:lnSpc>
-              <a:spcBef>
-                <a:spcPts val="0"/>
-              </a:spcBef>
-              <a:spcAft>
-                <a:spcPts val="0"/>
-              </a:spcAft>
-            </a:pPr>
-            <a:r>
-              <a:rPr sz="1500" b="0">
-                <a:solidFill>
-                  <a:srgbClr val="777777"/>
-                </a:solidFill>
-                <a:latin typeface="Arial"/>
-                <a:ea typeface="微软雅黑"/>
-                <a:cs typeface="Arial"/>
-              </a:rPr>
-              <a:t>研究生论文中期检查 · 文绍华</a:t>
-            </a:r>
-          </a:p>
-        </p:txBody>
-      </p:sp>
-      <p:sp>
-        <p:nvSpPr>
-          <p:cNvPr id="16" name="TextBox 15"/>
           <p:cNvSpPr txBox="1"/>
           <p:nvPr/>
         </p:nvSpPr>
@@ -11039,7 +10736,7 @@
                 <a:ea typeface="微软雅黑"/>
                 <a:cs typeface="Arial"/>
               </a:rPr>
-              <a:t>分子机制（一）：AChE–Aβ 复合物的动力学要点</a:t>
+              <a:t>分子机制（二）：抗菌肽与 Aβ 的交叉成核，方向由界面决定</a:t>
             </a:r>
           </a:p>
         </p:txBody>
@@ -11090,7 +10787,7 @@
       </p:sp>
       <p:pic>
         <p:nvPicPr>
-          <p:cNvPr id="4" name="Picture 3" descr="figM2_AChE_Aβ_机制.png"/>
+          <p:cNvPr id="4" name="Picture 3" descr="figM3_交叉成核机制.png"/>
           <p:cNvPicPr>
             <a:picLocks noChangeAspect="1"/>
           </p:cNvPicPr>
@@ -11154,7 +10851,7 @@
                 <a:ea typeface="微软雅黑"/>
                 <a:cs typeface="Arial"/>
               </a:rPr>
-              <a:t>PAS 是 Aβ 聚集的成核中心：1 μs 模拟中复合物稳定，Aβ 主要停留于 344—361 区段，不受双位点抑制剂位阻 [31]；丙锭阻断 PAS 后聚集被抑制 [33]。</a:t>
+              <a:t>抗菌肽与 Aβ 结构兼容，可交叉成核，方向由界面与浓度决定 [36][37]；LL-37 以疏水作用封堵纤维延伸面 [38]，五肽库筛选可破坏 D23—K28 盐桥 [41]。</a:t>
             </a:r>
           </a:p>
         </p:txBody>
@@ -11167,8 +10864,8 @@
         </p:nvSpPr>
         <p:spPr>
           <a:xfrm>
-            <a:off x="640080" y="6053328"/>
-            <a:ext cx="10908792" cy="329184"/>
+            <a:off x="640080" y="6419088"/>
+            <a:ext cx="8778240" cy="310896"/>
           </a:xfrm>
           <a:prstGeom prst="rect">
             <a:avLst/>
@@ -11201,7 +10898,7 @@
                 <a:ea typeface="微软雅黑"/>
                 <a:cs typeface="Arial"/>
               </a:rPr>
-              <a:t>图：本项目自制（results/figures/figM2）</a:t>
+              <a:t>研究生论文中期检查 · 文绍华</a:t>
             </a:r>
           </a:p>
         </p:txBody>
@@ -11209,53 +10906,6 @@
       <p:sp>
         <p:nvSpPr>
           <p:cNvPr id="7" name="TextBox 6"/>
-          <p:cNvSpPr txBox="1"/>
-          <p:nvPr/>
-        </p:nvSpPr>
-        <p:spPr>
-          <a:xfrm>
-            <a:off x="640080" y="6419088"/>
-            <a:ext cx="8778240" cy="310896"/>
-          </a:xfrm>
-          <a:prstGeom prst="rect">
-            <a:avLst/>
-          </a:prstGeom>
-          <a:noFill/>
-        </p:spPr>
-        <p:txBody>
-          <a:bodyPr wrap="square" anchor="t" lIns="27432" rIns="27432" tIns="0" bIns="0">
-            <a:spAutoFit/>
-          </a:bodyPr>
-          <a:lstStyle/>
-          <a:p>
-            <a:pPr algn="l">
-              <a:lnSpc>
-                <a:spcPct val="100000"/>
-              </a:lnSpc>
-              <a:spcBef>
-                <a:spcPts val="0"/>
-              </a:spcBef>
-              <a:spcAft>
-                <a:spcPts val="0"/>
-              </a:spcAft>
-            </a:pPr>
-            <a:r>
-              <a:rPr sz="1500" b="0">
-                <a:solidFill>
-                  <a:srgbClr val="777777"/>
-                </a:solidFill>
-                <a:latin typeface="Arial"/>
-                <a:ea typeface="微软雅黑"/>
-                <a:cs typeface="Arial"/>
-              </a:rPr>
-              <a:t>研究生论文中期检查 · 文绍华</a:t>
-            </a:r>
-          </a:p>
-        </p:txBody>
-      </p:sp>
-      <p:sp>
-        <p:nvSpPr>
-          <p:cNvPr id="8" name="TextBox 7"/>
           <p:cNvSpPr txBox="1"/>
           <p:nvPr/>
         </p:nvSpPr>
@@ -11309,327 +10959,6 @@
 </file>
 
 <file path=ppt/slides/slide22.xml><?xml version="1.0" encoding="utf-8"?>
-<p:sld xmlns:a="http://schemas.openxmlformats.org/drawingml/2006/main" xmlns:p="http://schemas.openxmlformats.org/presentationml/2006/main" xmlns:r="http://schemas.openxmlformats.org/officeDocument/2006/relationships">
-  <p:cSld>
-    <p:spTree>
-      <p:nvGrpSpPr>
-        <p:cNvPr id="1" name=""/>
-        <p:cNvGrpSpPr/>
-        <p:nvPr/>
-      </p:nvGrpSpPr>
-      <p:grpSpPr/>
-      <p:sp>
-        <p:nvSpPr>
-          <p:cNvPr id="2" name="TextBox 1"/>
-          <p:cNvSpPr txBox="1"/>
-          <p:nvPr/>
-        </p:nvSpPr>
-        <p:spPr>
-          <a:xfrm>
-            <a:off x="640080" y="365760"/>
-            <a:ext cx="10908792" cy="548640"/>
-          </a:xfrm>
-          <a:prstGeom prst="rect">
-            <a:avLst/>
-          </a:prstGeom>
-          <a:noFill/>
-        </p:spPr>
-        <p:txBody>
-          <a:bodyPr wrap="square" anchor="t" lIns="27432" rIns="27432" tIns="0" bIns="0">
-            <a:spAutoFit/>
-          </a:bodyPr>
-          <a:lstStyle/>
-          <a:p>
-            <a:pPr algn="l">
-              <a:lnSpc>
-                <a:spcPct val="100000"/>
-              </a:lnSpc>
-              <a:spcBef>
-                <a:spcPts val="0"/>
-              </a:spcBef>
-              <a:spcAft>
-                <a:spcPts val="0"/>
-              </a:spcAft>
-            </a:pPr>
-            <a:r>
-              <a:rPr sz="2500" b="1">
-                <a:solidFill>
-                  <a:srgbClr val="111111"/>
-                </a:solidFill>
-                <a:latin typeface="Arial"/>
-                <a:ea typeface="微软雅黑"/>
-                <a:cs typeface="Arial"/>
-              </a:rPr>
-              <a:t>分子机制（二）：抗菌肽与 Aβ 的交叉成核，方向由界面决定</a:t>
-            </a:r>
-          </a:p>
-        </p:txBody>
-      </p:sp>
-      <p:sp>
-        <p:nvSpPr>
-          <p:cNvPr id="3" name="Rectangle 2"/>
-          <p:cNvSpPr/>
-          <p:nvPr/>
-        </p:nvSpPr>
-        <p:spPr>
-          <a:xfrm>
-            <a:off x="640080" y="969264"/>
-            <a:ext cx="10908792" cy="12700"/>
-          </a:xfrm>
-          <a:prstGeom prst="rect">
-            <a:avLst/>
-          </a:prstGeom>
-          <a:solidFill>
-            <a:srgbClr val="DDDDDA"/>
-          </a:solidFill>
-          <a:ln>
-            <a:noFill/>
-          </a:ln>
-          <a:effectLst/>
-        </p:spPr>
-        <p:style>
-          <a:lnRef idx="1">
-            <a:schemeClr val="accent1"/>
-          </a:lnRef>
-          <a:fillRef idx="3">
-            <a:schemeClr val="accent1"/>
-          </a:fillRef>
-          <a:effectRef idx="2">
-            <a:schemeClr val="accent1"/>
-          </a:effectRef>
-          <a:fontRef idx="minor">
-            <a:schemeClr val="lt1"/>
-          </a:fontRef>
-        </p:style>
-        <p:txBody>
-          <a:bodyPr rtlCol="0" anchor="ctr"/>
-          <a:lstStyle/>
-          <a:p>
-            <a:pPr algn="ctr"/>
-          </a:p>
-        </p:txBody>
-      </p:sp>
-      <p:pic>
-        <p:nvPicPr>
-          <p:cNvPr id="4" name="Picture 3" descr="figM3_交叉成核机制.png"/>
-          <p:cNvPicPr>
-            <a:picLocks noChangeAspect="1"/>
-          </p:cNvPicPr>
-          <p:nvPr/>
-        </p:nvPicPr>
-        <p:blipFill>
-          <a:blip r:embed="rId2"/>
-          <a:stretch>
-            <a:fillRect/>
-          </a:stretch>
-        </p:blipFill>
-        <p:spPr>
-          <a:xfrm>
-            <a:off x="825790" y="1188720"/>
-            <a:ext cx="10537371" cy="3931920"/>
-          </a:xfrm>
-          <a:prstGeom prst="rect">
-            <a:avLst/>
-          </a:prstGeom>
-        </p:spPr>
-      </p:pic>
-      <p:sp>
-        <p:nvSpPr>
-          <p:cNvPr id="5" name="TextBox 4"/>
-          <p:cNvSpPr txBox="1"/>
-          <p:nvPr/>
-        </p:nvSpPr>
-        <p:spPr>
-          <a:xfrm>
-            <a:off x="640080" y="5248655"/>
-            <a:ext cx="10908792" cy="749808"/>
-          </a:xfrm>
-          <a:prstGeom prst="rect">
-            <a:avLst/>
-          </a:prstGeom>
-          <a:noFill/>
-        </p:spPr>
-        <p:txBody>
-          <a:bodyPr wrap="square" anchor="t" lIns="27432" rIns="27432" tIns="0" bIns="0">
-            <a:spAutoFit/>
-          </a:bodyPr>
-          <a:lstStyle/>
-          <a:p>
-            <a:pPr algn="l">
-              <a:lnSpc>
-                <a:spcPct val="124000"/>
-              </a:lnSpc>
-              <a:spcBef>
-                <a:spcPts val="0"/>
-              </a:spcBef>
-              <a:spcAft>
-                <a:spcPts val="0"/>
-              </a:spcAft>
-            </a:pPr>
-            <a:r>
-              <a:rPr sz="1600" b="0">
-                <a:solidFill>
-                  <a:srgbClr val="333333"/>
-                </a:solidFill>
-                <a:latin typeface="Arial"/>
-                <a:ea typeface="微软雅黑"/>
-                <a:cs typeface="Arial"/>
-              </a:rPr>
-              <a:t>抗菌肽与 Aβ 结构兼容，可交叉成核，方向由界面与浓度决定 [36][37]；LL-37 以疏水作用封堵纤维延伸面 [38]，五肽库筛选可破坏 D23—K28 盐桥 [41]。</a:t>
-            </a:r>
-          </a:p>
-        </p:txBody>
-      </p:sp>
-      <p:sp>
-        <p:nvSpPr>
-          <p:cNvPr id="6" name="TextBox 5"/>
-          <p:cNvSpPr txBox="1"/>
-          <p:nvPr/>
-        </p:nvSpPr>
-        <p:spPr>
-          <a:xfrm>
-            <a:off x="640080" y="6053328"/>
-            <a:ext cx="10908792" cy="329184"/>
-          </a:xfrm>
-          <a:prstGeom prst="rect">
-            <a:avLst/>
-          </a:prstGeom>
-          <a:noFill/>
-        </p:spPr>
-        <p:txBody>
-          <a:bodyPr wrap="square" anchor="t" lIns="27432" rIns="27432" tIns="0" bIns="0">
-            <a:spAutoFit/>
-          </a:bodyPr>
-          <a:lstStyle/>
-          <a:p>
-            <a:pPr algn="l">
-              <a:lnSpc>
-                <a:spcPct val="100000"/>
-              </a:lnSpc>
-              <a:spcBef>
-                <a:spcPts val="0"/>
-              </a:spcBef>
-              <a:spcAft>
-                <a:spcPts val="0"/>
-              </a:spcAft>
-            </a:pPr>
-            <a:r>
-              <a:rPr sz="1500" b="0">
-                <a:solidFill>
-                  <a:srgbClr val="777777"/>
-                </a:solidFill>
-                <a:latin typeface="Arial"/>
-                <a:ea typeface="微软雅黑"/>
-                <a:cs typeface="Arial"/>
-              </a:rPr>
-              <a:t>图：本项目自制（results/figures/figM3）</a:t>
-            </a:r>
-          </a:p>
-        </p:txBody>
-      </p:sp>
-      <p:sp>
-        <p:nvSpPr>
-          <p:cNvPr id="7" name="TextBox 6"/>
-          <p:cNvSpPr txBox="1"/>
-          <p:nvPr/>
-        </p:nvSpPr>
-        <p:spPr>
-          <a:xfrm>
-            <a:off x="640080" y="6419088"/>
-            <a:ext cx="8778240" cy="310896"/>
-          </a:xfrm>
-          <a:prstGeom prst="rect">
-            <a:avLst/>
-          </a:prstGeom>
-          <a:noFill/>
-        </p:spPr>
-        <p:txBody>
-          <a:bodyPr wrap="square" anchor="t" lIns="27432" rIns="27432" tIns="0" bIns="0">
-            <a:spAutoFit/>
-          </a:bodyPr>
-          <a:lstStyle/>
-          <a:p>
-            <a:pPr algn="l">
-              <a:lnSpc>
-                <a:spcPct val="100000"/>
-              </a:lnSpc>
-              <a:spcBef>
-                <a:spcPts val="0"/>
-              </a:spcBef>
-              <a:spcAft>
-                <a:spcPts val="0"/>
-              </a:spcAft>
-            </a:pPr>
-            <a:r>
-              <a:rPr sz="1500" b="0">
-                <a:solidFill>
-                  <a:srgbClr val="777777"/>
-                </a:solidFill>
-                <a:latin typeface="Arial"/>
-                <a:ea typeface="微软雅黑"/>
-                <a:cs typeface="Arial"/>
-              </a:rPr>
-              <a:t>研究生论文中期检查 · 文绍华</a:t>
-            </a:r>
-          </a:p>
-        </p:txBody>
-      </p:sp>
-      <p:sp>
-        <p:nvSpPr>
-          <p:cNvPr id="8" name="TextBox 7"/>
-          <p:cNvSpPr txBox="1"/>
-          <p:nvPr/>
-        </p:nvSpPr>
-        <p:spPr>
-          <a:xfrm>
-            <a:off x="10058400" y="6419088"/>
-            <a:ext cx="1490472" cy="310896"/>
-          </a:xfrm>
-          <a:prstGeom prst="rect">
-            <a:avLst/>
-          </a:prstGeom>
-          <a:noFill/>
-        </p:spPr>
-        <p:txBody>
-          <a:bodyPr wrap="square" anchor="t" lIns="27432" rIns="27432" tIns="0" bIns="0">
-            <a:spAutoFit/>
-          </a:bodyPr>
-          <a:lstStyle/>
-          <a:p>
-            <a:pPr algn="r">
-              <a:lnSpc>
-                <a:spcPct val="100000"/>
-              </a:lnSpc>
-              <a:spcBef>
-                <a:spcPts val="0"/>
-              </a:spcBef>
-              <a:spcAft>
-                <a:spcPts val="0"/>
-              </a:spcAft>
-            </a:pPr>
-            <a:r>
-              <a:rPr sz="1500" b="0">
-                <a:solidFill>
-                  <a:srgbClr val="777777"/>
-                </a:solidFill>
-                <a:latin typeface="Arial"/>
-                <a:ea typeface="微软雅黑"/>
-                <a:cs typeface="Arial"/>
-              </a:rPr>
-              <a:t>22 / 24</a:t>
-            </a:r>
-          </a:p>
-        </p:txBody>
-      </p:sp>
-    </p:spTree>
-  </p:cSld>
-  <p:clrMapOvr>
-    <a:masterClrMapping/>
-  </p:clrMapOvr>
-</p:sld>
-</file>
-
-<file path=ppt/slides/slide23.xml><?xml version="1.0" encoding="utf-8"?>
 <p:sld xmlns:a="http://schemas.openxmlformats.org/drawingml/2006/main" xmlns:p="http://schemas.openxmlformats.org/presentationml/2006/main" xmlns:r="http://schemas.openxmlformats.org/officeDocument/2006/relationships">
   <p:cSld>
     <p:spTree>
@@ -13125,7 +12454,7 @@
                 <a:ea typeface="微软雅黑"/>
                 <a:cs typeface="Arial"/>
               </a:rPr>
-              <a:t>23 / 24</a:t>
+              <a:t>22 / 24</a:t>
             </a:r>
           </a:p>
         </p:txBody>
@@ -13138,7 +12467,7 @@
 </p:sld>
 </file>
 
-<file path=ppt/slides/slide24.xml><?xml version="1.0" encoding="utf-8"?>
+<file path=ppt/slides/slide23.xml><?xml version="1.0" encoding="utf-8"?>
 <p:sld xmlns:a="http://schemas.openxmlformats.org/drawingml/2006/main" xmlns:p="http://schemas.openxmlformats.org/presentationml/2006/main" xmlns:r="http://schemas.openxmlformats.org/officeDocument/2006/relationships">
   <p:cSld>
     <p:spTree>
@@ -14532,6 +13861,395 @@
                 <a:ea typeface="微软雅黑"/>
                 <a:cs typeface="Arial"/>
               </a:rPr>
+              <a:t>23 / 24</a:t>
+            </a:r>
+          </a:p>
+        </p:txBody>
+      </p:sp>
+    </p:spTree>
+  </p:cSld>
+  <p:clrMapOvr>
+    <a:masterClrMapping/>
+  </p:clrMapOvr>
+</p:sld>
+</file>
+
+<file path=ppt/slides/slide24.xml><?xml version="1.0" encoding="utf-8"?>
+<p:sld xmlns:a="http://schemas.openxmlformats.org/drawingml/2006/main" xmlns:p="http://schemas.openxmlformats.org/presentationml/2006/main" xmlns:r="http://schemas.openxmlformats.org/officeDocument/2006/relationships">
+  <p:cSld>
+    <p:spTree>
+      <p:nvGrpSpPr>
+        <p:cNvPr id="1" name=""/>
+        <p:cNvGrpSpPr/>
+        <p:nvPr/>
+      </p:nvGrpSpPr>
+      <p:grpSpPr/>
+      <p:sp>
+        <p:nvSpPr>
+          <p:cNvPr id="2" name="TextBox 1"/>
+          <p:cNvSpPr txBox="1"/>
+          <p:nvPr/>
+        </p:nvSpPr>
+        <p:spPr>
+          <a:xfrm>
+            <a:off x="640080" y="365760"/>
+            <a:ext cx="10908792" cy="548640"/>
+          </a:xfrm>
+          <a:prstGeom prst="rect">
+            <a:avLst/>
+          </a:prstGeom>
+          <a:noFill/>
+        </p:spPr>
+        <p:txBody>
+          <a:bodyPr wrap="square" anchor="t" lIns="27432" rIns="27432" tIns="0" bIns="0">
+            <a:spAutoFit/>
+          </a:bodyPr>
+          <a:lstStyle/>
+          <a:p>
+            <a:pPr algn="l">
+              <a:lnSpc>
+                <a:spcPct val="100000"/>
+              </a:lnSpc>
+              <a:spcBef>
+                <a:spcPts val="0"/>
+              </a:spcBef>
+              <a:spcAft>
+                <a:spcPts val="0"/>
+              </a:spcAft>
+            </a:pPr>
+            <a:r>
+              <a:rPr sz="2500" b="1">
+                <a:solidFill>
+                  <a:srgbClr val="111111"/>
+                </a:solidFill>
+                <a:latin typeface="Arial"/>
+                <a:ea typeface="微软雅黑"/>
+                <a:cs typeface="Arial"/>
+              </a:rPr>
+              <a:t>主要分析已完成，剩余工作风险可控</a:t>
+            </a:r>
+          </a:p>
+        </p:txBody>
+      </p:sp>
+      <p:sp>
+        <p:nvSpPr>
+          <p:cNvPr id="3" name="Rectangle 2"/>
+          <p:cNvSpPr/>
+          <p:nvPr/>
+        </p:nvSpPr>
+        <p:spPr>
+          <a:xfrm>
+            <a:off x="640080" y="969264"/>
+            <a:ext cx="10908792" cy="12700"/>
+          </a:xfrm>
+          <a:prstGeom prst="rect">
+            <a:avLst/>
+          </a:prstGeom>
+          <a:solidFill>
+            <a:srgbClr val="DDDDDA"/>
+          </a:solidFill>
+          <a:ln>
+            <a:noFill/>
+          </a:ln>
+          <a:effectLst/>
+        </p:spPr>
+        <p:style>
+          <a:lnRef idx="1">
+            <a:schemeClr val="accent1"/>
+          </a:lnRef>
+          <a:fillRef idx="3">
+            <a:schemeClr val="accent1"/>
+          </a:fillRef>
+          <a:effectRef idx="2">
+            <a:schemeClr val="accent1"/>
+          </a:effectRef>
+          <a:fontRef idx="minor">
+            <a:schemeClr val="lt1"/>
+          </a:fontRef>
+        </p:style>
+        <p:txBody>
+          <a:bodyPr rtlCol="0" anchor="ctr"/>
+          <a:lstStyle/>
+          <a:p>
+            <a:pPr algn="ctr"/>
+          </a:p>
+        </p:txBody>
+      </p:sp>
+      <p:sp>
+        <p:nvSpPr>
+          <p:cNvPr id="4" name="TextBox 3"/>
+          <p:cNvSpPr txBox="1"/>
+          <p:nvPr/>
+        </p:nvSpPr>
+        <p:spPr>
+          <a:xfrm>
+            <a:off x="640080" y="1481328"/>
+            <a:ext cx="10424160" cy="3291840"/>
+          </a:xfrm>
+          <a:prstGeom prst="rect">
+            <a:avLst/>
+          </a:prstGeom>
+          <a:noFill/>
+        </p:spPr>
+        <p:txBody>
+          <a:bodyPr wrap="square" anchor="t" lIns="27432" rIns="27432" tIns="0" bIns="0">
+            <a:spAutoFit/>
+          </a:bodyPr>
+          <a:lstStyle/>
+          <a:p>
+            <a:pPr algn="l">
+              <a:lnSpc>
+                <a:spcPct val="134000"/>
+              </a:lnSpc>
+              <a:spcBef>
+                <a:spcPts val="0"/>
+              </a:spcBef>
+              <a:spcAft>
+                <a:spcPts val="0"/>
+              </a:spcAft>
+            </a:pPr>
+            <a:r>
+              <a:rPr sz="1800" b="0">
+                <a:solidFill>
+                  <a:srgbClr val="333333"/>
+                </a:solidFill>
+                <a:latin typeface="Arial"/>
+                <a:ea typeface="微软雅黑"/>
+                <a:cs typeface="Arial"/>
+              </a:rPr>
+              <a:t>确认事实：数据资源、短肽库、三模型共识预测、分阶段差异分析与特有抗菌肽筛选均已完成。</a:t>
+            </a:r>
+          </a:p>
+          <a:p>
+            <a:pPr algn="l">
+              <a:lnSpc>
+                <a:spcPct val="134000"/>
+              </a:lnSpc>
+              <a:spcBef>
+                <a:spcPts val="1400"/>
+              </a:spcBef>
+              <a:spcAft>
+                <a:spcPts val="0"/>
+              </a:spcAft>
+            </a:pPr>
+            <a:r>
+              <a:rPr sz="1800" b="0">
+                <a:solidFill>
+                  <a:srgbClr val="333333"/>
+                </a:solidFill>
+                <a:latin typeface="Arial"/>
+                <a:ea typeface="微软雅黑"/>
+                <a:cs typeface="Arial"/>
+              </a:rPr>
+              <a:t>待完成：机制关联分析的结论整理、候选抗菌肽的抑菌实验验证，以及学位论文与投稿论文撰写。</a:t>
+            </a:r>
+          </a:p>
+          <a:p>
+            <a:pPr algn="l">
+              <a:lnSpc>
+                <a:spcPct val="134000"/>
+              </a:lnSpc>
+              <a:spcBef>
+                <a:spcPts val="1400"/>
+              </a:spcBef>
+              <a:spcAft>
+                <a:spcPts val="0"/>
+              </a:spcAft>
+            </a:pPr>
+            <a:r>
+              <a:rPr sz="1800" b="0">
+                <a:solidFill>
+                  <a:srgbClr val="333333"/>
+                </a:solidFill>
+                <a:latin typeface="Arial"/>
+                <a:ea typeface="微软雅黑"/>
+                <a:cs typeface="Arial"/>
+              </a:rPr>
+              <a:t>进度安排：按开题计划推进，后续不依赖新的数据生产。</a:t>
+            </a:r>
+          </a:p>
+        </p:txBody>
+      </p:sp>
+      <p:sp>
+        <p:nvSpPr>
+          <p:cNvPr id="5" name="Rectangle 4"/>
+          <p:cNvSpPr/>
+          <p:nvPr/>
+        </p:nvSpPr>
+        <p:spPr>
+          <a:xfrm>
+            <a:off x="640080" y="4846320"/>
+            <a:ext cx="1920240" cy="30480"/>
+          </a:xfrm>
+          <a:prstGeom prst="rect">
+            <a:avLst/>
+          </a:prstGeom>
+          <a:solidFill>
+            <a:srgbClr val="B03A2E"/>
+          </a:solidFill>
+          <a:ln>
+            <a:noFill/>
+          </a:ln>
+          <a:effectLst/>
+        </p:spPr>
+        <p:style>
+          <a:lnRef idx="1">
+            <a:schemeClr val="accent1"/>
+          </a:lnRef>
+          <a:fillRef idx="3">
+            <a:schemeClr val="accent1"/>
+          </a:fillRef>
+          <a:effectRef idx="2">
+            <a:schemeClr val="accent1"/>
+          </a:effectRef>
+          <a:fontRef idx="minor">
+            <a:schemeClr val="lt1"/>
+          </a:fontRef>
+        </p:style>
+        <p:txBody>
+          <a:bodyPr rtlCol="0" anchor="ctr"/>
+          <a:lstStyle/>
+          <a:p>
+            <a:pPr algn="ctr"/>
+          </a:p>
+        </p:txBody>
+      </p:sp>
+      <p:sp>
+        <p:nvSpPr>
+          <p:cNvPr id="6" name="TextBox 5"/>
+          <p:cNvSpPr txBox="1"/>
+          <p:nvPr/>
+        </p:nvSpPr>
+        <p:spPr>
+          <a:xfrm>
+            <a:off x="640080" y="5084064"/>
+            <a:ext cx="10424160" cy="731520"/>
+          </a:xfrm>
+          <a:prstGeom prst="rect">
+            <a:avLst/>
+          </a:prstGeom>
+          <a:noFill/>
+        </p:spPr>
+        <p:txBody>
+          <a:bodyPr wrap="square" anchor="t" lIns="27432" rIns="27432" tIns="0" bIns="0">
+            <a:spAutoFit/>
+          </a:bodyPr>
+          <a:lstStyle/>
+          <a:p>
+            <a:pPr algn="l">
+              <a:lnSpc>
+                <a:spcPct val="110000"/>
+              </a:lnSpc>
+              <a:spcBef>
+                <a:spcPts val="0"/>
+              </a:spcBef>
+              <a:spcAft>
+                <a:spcPts val="0"/>
+              </a:spcAft>
+            </a:pPr>
+            <a:r>
+              <a:rPr sz="2000" b="1">
+                <a:solidFill>
+                  <a:srgbClr val="111111"/>
+                </a:solidFill>
+                <a:latin typeface="Arial"/>
+                <a:ea typeface="微软雅黑"/>
+                <a:cs typeface="Arial"/>
+              </a:rPr>
+              <a:t>谢谢各位老师，请批评指正。</a:t>
+            </a:r>
+          </a:p>
+        </p:txBody>
+      </p:sp>
+      <p:sp>
+        <p:nvSpPr>
+          <p:cNvPr id="7" name="TextBox 6"/>
+          <p:cNvSpPr txBox="1"/>
+          <p:nvPr/>
+        </p:nvSpPr>
+        <p:spPr>
+          <a:xfrm>
+            <a:off x="640080" y="6419088"/>
+            <a:ext cx="8778240" cy="310896"/>
+          </a:xfrm>
+          <a:prstGeom prst="rect">
+            <a:avLst/>
+          </a:prstGeom>
+          <a:noFill/>
+        </p:spPr>
+        <p:txBody>
+          <a:bodyPr wrap="square" anchor="t" lIns="27432" rIns="27432" tIns="0" bIns="0">
+            <a:spAutoFit/>
+          </a:bodyPr>
+          <a:lstStyle/>
+          <a:p>
+            <a:pPr algn="l">
+              <a:lnSpc>
+                <a:spcPct val="100000"/>
+              </a:lnSpc>
+              <a:spcBef>
+                <a:spcPts val="0"/>
+              </a:spcBef>
+              <a:spcAft>
+                <a:spcPts val="0"/>
+              </a:spcAft>
+            </a:pPr>
+            <a:r>
+              <a:rPr sz="1500" b="0">
+                <a:solidFill>
+                  <a:srgbClr val="777777"/>
+                </a:solidFill>
+                <a:latin typeface="Arial"/>
+                <a:ea typeface="微软雅黑"/>
+                <a:cs typeface="Arial"/>
+              </a:rPr>
+              <a:t>研究生论文中期检查 · 文绍华</a:t>
+            </a:r>
+          </a:p>
+        </p:txBody>
+      </p:sp>
+      <p:sp>
+        <p:nvSpPr>
+          <p:cNvPr id="8" name="TextBox 7"/>
+          <p:cNvSpPr txBox="1"/>
+          <p:nvPr/>
+        </p:nvSpPr>
+        <p:spPr>
+          <a:xfrm>
+            <a:off x="10058400" y="6419088"/>
+            <a:ext cx="1490472" cy="310896"/>
+          </a:xfrm>
+          <a:prstGeom prst="rect">
+            <a:avLst/>
+          </a:prstGeom>
+          <a:noFill/>
+        </p:spPr>
+        <p:txBody>
+          <a:bodyPr wrap="square" anchor="t" lIns="27432" rIns="27432" tIns="0" bIns="0">
+            <a:spAutoFit/>
+          </a:bodyPr>
+          <a:lstStyle/>
+          <a:p>
+            <a:pPr algn="r">
+              <a:lnSpc>
+                <a:spcPct val="100000"/>
+              </a:lnSpc>
+              <a:spcBef>
+                <a:spcPts val="0"/>
+              </a:spcBef>
+              <a:spcAft>
+                <a:spcPts val="0"/>
+              </a:spcAft>
+            </a:pPr>
+            <a:r>
+              <a:rPr sz="1500" b="0">
+                <a:solidFill>
+                  <a:srgbClr val="777777"/>
+                </a:solidFill>
+                <a:latin typeface="Arial"/>
+                <a:ea typeface="微软雅黑"/>
+                <a:cs typeface="Arial"/>
+              </a:rPr>
               <a:t>24 / 24</a:t>
             </a:r>
           </a:p>
@@ -16165,8 +15883,8 @@
                 <a:ea typeface="微软雅黑"/>
                 <a:cs typeface="Arial"/>
               </a:rPr>
-              <a:t>双端鸟枪法测序
-质控与去宿主</a:t>
+              <a:t>fastp 质控
+KneadData 去宿主</a:t>
             </a:r>
           </a:p>
         </p:txBody>
@@ -16354,8 +16072,9 @@
                 <a:ea typeface="微软雅黑"/>
                 <a:cs typeface="Arial"/>
               </a:rPr>
-              <a:t>序列组装与分箱
-分箱提纯</a:t>
+              <a:t>MEGAHIT 组装
+MetaBAT2 分箱
+CONCOCT 分箱</a:t>
             </a:r>
           </a:p>
         </p:txBody>
@@ -16543,8 +16262,8 @@
                 <a:ea typeface="微软雅黑"/>
                 <a:cs typeface="Arial"/>
               </a:rPr>
-              <a:t>种水平去冗余
-非冗余参考集</a:t>
+              <a:t>metaWRAP 提纯
+dRep 去冗余</a:t>
             </a:r>
           </a:p>
         </p:txBody>
@@ -16732,7 +16451,7 @@
                 <a:ea typeface="微软雅黑"/>
                 <a:cs typeface="Arial"/>
               </a:rPr>
-              <a:t>小开放阅读框
+              <a:t>EMBOSS getorf
 长度 5—50 aa</a:t>
             </a:r>
           </a:p>
@@ -16921,7 +16640,7 @@
                 <a:ea typeface="微软雅黑"/>
                 <a:cs typeface="Arial"/>
               </a:rPr>
-              <a:t>序列级去冗余
+              <a:t>序列级精确去冗余
 非冗余短肽库</a:t>
             </a:r>
           </a:p>
@@ -17110,8 +16829,8 @@
                 <a:ea typeface="微软雅黑"/>
                 <a:cs typeface="Arial"/>
               </a:rPr>
-              <a:t>多模型独立预测
-一致阳性才纳入</a:t>
+              <a:t>Attention / LSTM
+/ BERT 一致阳性</a:t>
             </a:r>
           </a:p>
         </p:txBody>
@@ -17299,8 +17018,9 @@
                 <a:ea typeface="微软雅黑"/>
                 <a:cs typeface="Arial"/>
               </a:rPr>
-              <a:t>按五个认知阶段
-比较组成与丰度</a:t>
+              <a:t>CoverM 定量
+CLR 变换
+Kruskal-Wallis</a:t>
             </a:r>
           </a:p>
         </p:txBody>
@@ -17488,7 +17208,7 @@
                 <a:ea typeface="微软雅黑"/>
                 <a:cs typeface="Arial"/>
               </a:rPr>
-              <a:t>蛋白组二次去重
+              <a:t>宏蛋白组二次去重
 剔除无表达序列</a:t>
             </a:r>
           </a:p>
@@ -17866,7 +17586,7 @@
                 <a:ea typeface="微软雅黑"/>
                 <a:cs typeface="Arial"/>
               </a:rPr>
-              <a:t>对接与动力学
+              <a:t>分子对接 + 动力学
 给出候选优先序</a:t>
             </a:r>
           </a:p>
@@ -18055,9 +17775,8 @@
                 <a:ea typeface="微软雅黑"/>
                 <a:cs typeface="Arial"/>
               </a:rPr>
-              <a:t>合成代表性肽
-纸片扩散法筛查
-肉汤稀释法 MIC</a:t>
+              <a:t>纸片扩散法筛查
+微量肉汤稀释法 MIC</a:t>
             </a:r>
           </a:p>
         </p:txBody>
@@ -18758,7 +18477,7 @@
                 <a:ea typeface="微软雅黑"/>
                 <a:cs typeface="Arial"/>
               </a:rPr>
-              <a:t>5 个阶段</a:t>
+              <a:t>265 例</a:t>
             </a:r>
           </a:p>
         </p:txBody>
@@ -18805,7 +18524,7 @@
                 <a:ea typeface="微软雅黑"/>
                 <a:cs typeface="Arial"/>
               </a:rPr>
-              <a:t>NC · SCS · SCD · MCI · AD</a:t>
+              <a:t>匹配亚队列 · 各阶段 53 例</a:t>
             </a:r>
           </a:p>
         </p:txBody>
@@ -18852,7 +18571,7 @@
                 <a:ea typeface="微软雅黑"/>
                 <a:cs typeface="Arial"/>
               </a:rPr>
-              <a:t>2 个性别</a:t>
+              <a:t>53 例</a:t>
             </a:r>
           </a:p>
         </p:txBody>
@@ -18899,7 +18618,7 @@
                 <a:ea typeface="微软雅黑"/>
                 <a:cs typeface="Arial"/>
               </a:rPr>
-              <a:t>男女分别匹配</a:t>
+              <a:t>每阶段样本量 · 每组 35 女 / 18 男</a:t>
             </a:r>
           </a:p>
         </p:txBody>
@@ -19040,7 +18759,7 @@
                 <a:ea typeface="微软雅黑"/>
                 <a:cs typeface="Arial"/>
               </a:rPr>
-              <a:t>30 个分层单元</a:t>
+              <a:t>68.2—70.0 岁</a:t>
             </a:r>
           </a:p>
         </p:txBody>
@@ -19087,7 +18806,7 @@
                 <a:ea typeface="微软雅黑"/>
                 <a:cs typeface="Arial"/>
               </a:rPr>
-              <a:t>阶段 × 性别 × 年龄</a:t>
+              <a:t>各阶段平均年龄 · 组间差 ≤1.8 岁</a:t>
             </a:r>
           </a:p>
         </p:txBody>
@@ -19188,8 +18907,8 @@
         </p:nvSpPr>
         <p:spPr>
           <a:xfrm>
-            <a:off x="640080" y="3017520"/>
-            <a:ext cx="1998878" cy="365760"/>
+            <a:off x="640080" y="2999232"/>
+            <a:ext cx="1998878" cy="310896"/>
           </a:xfrm>
           <a:prstGeom prst="rect">
             <a:avLst/>
@@ -19235,8 +18954,8 @@
         </p:nvSpPr>
         <p:spPr>
           <a:xfrm>
-            <a:off x="640080" y="3383280"/>
-            <a:ext cx="1998878" cy="1005840"/>
+            <a:off x="640080" y="3310128"/>
+            <a:ext cx="1998878" cy="1097280"/>
           </a:xfrm>
           <a:prstGeom prst="rect">
             <a:avLst/>
@@ -19251,7 +18970,7 @@
           <a:p>
             <a:pPr algn="l">
               <a:lnSpc>
-                <a:spcPct val="116000"/>
+                <a:spcPct val="114000"/>
               </a:lnSpc>
               <a:spcBef>
                 <a:spcPts val="0"/>
@@ -19275,7 +18994,7 @@
           <a:p>
             <a:pPr algn="l">
               <a:lnSpc>
-                <a:spcPct val="116000"/>
+                <a:spcPct val="114000"/>
               </a:lnSpc>
               <a:spcBef>
                 <a:spcPts val="300"/>
@@ -19287,19 +19006,19 @@
             <a:r>
               <a:rPr sz="1500" b="0">
                 <a:solidFill>
-                  <a:srgbClr val="333333"/>
-                </a:solidFill>
-                <a:latin typeface="Arial"/>
-                <a:ea typeface="微软雅黑"/>
-                <a:cs typeface="Arial"/>
-              </a:rPr>
-              <a:t>菌群多样性最高</a:t>
+                  <a:srgbClr val="2F5D62"/>
+                </a:solidFill>
+                <a:latin typeface="Arial"/>
+                <a:ea typeface="微软雅黑"/>
+                <a:cs typeface="Arial"/>
+              </a:rPr>
+              <a:t>53 例 ｜ 35 女 / 18 男</a:t>
             </a:r>
           </a:p>
           <a:p>
             <a:pPr algn="l">
               <a:lnSpc>
-                <a:spcPct val="116000"/>
+                <a:spcPct val="114000"/>
               </a:lnSpc>
               <a:spcBef>
                 <a:spcPts val="300"/>
@@ -19317,7 +19036,7 @@
                 <a:ea typeface="微软雅黑"/>
                 <a:cs typeface="Arial"/>
               </a:rPr>
-              <a:t>作为比较基线</a:t>
+              <a:t>平均 68.4 岁 · 多样性最高</a:t>
             </a:r>
           </a:p>
         </p:txBody>
@@ -19374,8 +19093,8 @@
         </p:nvSpPr>
         <p:spPr>
           <a:xfrm>
-            <a:off x="2821838" y="3017520"/>
-            <a:ext cx="1998878" cy="365760"/>
+            <a:off x="2821838" y="2999232"/>
+            <a:ext cx="1998878" cy="310896"/>
           </a:xfrm>
           <a:prstGeom prst="rect">
             <a:avLst/>
@@ -19421,8 +19140,8 @@
         </p:nvSpPr>
         <p:spPr>
           <a:xfrm>
-            <a:off x="2821838" y="3383280"/>
-            <a:ext cx="1998878" cy="1005840"/>
+            <a:off x="2821838" y="3310128"/>
+            <a:ext cx="1998878" cy="1097280"/>
           </a:xfrm>
           <a:prstGeom prst="rect">
             <a:avLst/>
@@ -19437,7 +19156,7 @@
           <a:p>
             <a:pPr algn="l">
               <a:lnSpc>
-                <a:spcPct val="116000"/>
+                <a:spcPct val="114000"/>
               </a:lnSpc>
               <a:spcBef>
                 <a:spcPts val="0"/>
@@ -19461,7 +19180,7 @@
           <a:p>
             <a:pPr algn="l">
               <a:lnSpc>
-                <a:spcPct val="116000"/>
+                <a:spcPct val="114000"/>
               </a:lnSpc>
               <a:spcBef>
                 <a:spcPts val="300"/>
@@ -19473,19 +19192,19 @@
             <a:r>
               <a:rPr sz="1500" b="0">
                 <a:solidFill>
-                  <a:srgbClr val="333333"/>
-                </a:solidFill>
-                <a:latin typeface="Arial"/>
-                <a:ea typeface="微软雅黑"/>
-                <a:cs typeface="Arial"/>
-              </a:rPr>
-              <a:t>组成已出现偏移</a:t>
+                  <a:srgbClr val="2F5D62"/>
+                </a:solidFill>
+                <a:latin typeface="Arial"/>
+                <a:ea typeface="微软雅黑"/>
+                <a:cs typeface="Arial"/>
+              </a:rPr>
+              <a:t>53 例 ｜ 35 女 / 18 男</a:t>
             </a:r>
           </a:p>
           <a:p>
             <a:pPr algn="l">
               <a:lnSpc>
-                <a:spcPct val="116000"/>
+                <a:spcPct val="114000"/>
               </a:lnSpc>
               <a:spcBef>
                 <a:spcPts val="300"/>
@@ -19503,7 +19222,7 @@
                 <a:ea typeface="微软雅黑"/>
                 <a:cs typeface="Arial"/>
               </a:rPr>
-              <a:t>阶段特有菌属出现</a:t>
+              <a:t>平均 68.2 岁 · 组成偏移</a:t>
             </a:r>
           </a:p>
         </p:txBody>
@@ -19560,8 +19279,8 @@
         </p:nvSpPr>
         <p:spPr>
           <a:xfrm>
-            <a:off x="5003596" y="3017520"/>
-            <a:ext cx="1998878" cy="365760"/>
+            <a:off x="5003596" y="2999232"/>
+            <a:ext cx="1998878" cy="310896"/>
           </a:xfrm>
           <a:prstGeom prst="rect">
             <a:avLst/>
@@ -19607,8 +19326,8 @@
         </p:nvSpPr>
         <p:spPr>
           <a:xfrm>
-            <a:off x="5003596" y="3383280"/>
-            <a:ext cx="1998878" cy="1005840"/>
+            <a:off x="5003596" y="3310128"/>
+            <a:ext cx="1998878" cy="1097280"/>
           </a:xfrm>
           <a:prstGeom prst="rect">
             <a:avLst/>
@@ -19623,7 +19342,7 @@
           <a:p>
             <a:pPr algn="l">
               <a:lnSpc>
-                <a:spcPct val="116000"/>
+                <a:spcPct val="114000"/>
               </a:lnSpc>
               <a:spcBef>
                 <a:spcPts val="0"/>
@@ -19647,7 +19366,7 @@
           <a:p>
             <a:pPr algn="l">
               <a:lnSpc>
-                <a:spcPct val="116000"/>
+                <a:spcPct val="114000"/>
               </a:lnSpc>
               <a:spcBef>
                 <a:spcPts val="300"/>
@@ -19659,19 +19378,19 @@
             <a:r>
               <a:rPr sz="1500" b="0">
                 <a:solidFill>
-                  <a:srgbClr val="333333"/>
-                </a:solidFill>
-                <a:latin typeface="Arial"/>
-                <a:ea typeface="微软雅黑"/>
-                <a:cs typeface="Arial"/>
-              </a:rPr>
-              <a:t>肠屏障标志物升高</a:t>
+                  <a:srgbClr val="2F5D62"/>
+                </a:solidFill>
+                <a:latin typeface="Arial"/>
+                <a:ea typeface="微软雅黑"/>
+                <a:cs typeface="Arial"/>
+              </a:rPr>
+              <a:t>53 例 ｜ 35 女 / 18 男</a:t>
             </a:r>
           </a:p>
           <a:p>
             <a:pPr algn="l">
               <a:lnSpc>
-                <a:spcPct val="116000"/>
+                <a:spcPct val="114000"/>
               </a:lnSpc>
               <a:spcBef>
                 <a:spcPts val="300"/>
@@ -19689,7 +19408,7 @@
                 <a:ea typeface="微软雅黑"/>
                 <a:cs typeface="Arial"/>
               </a:rPr>
-              <a:t>改变早于痴呆</a:t>
+              <a:t>平均 69.1 岁 · 屏障标志↑</a:t>
             </a:r>
           </a:p>
         </p:txBody>
@@ -19746,8 +19465,8 @@
         </p:nvSpPr>
         <p:spPr>
           <a:xfrm>
-            <a:off x="7185355" y="3017520"/>
-            <a:ext cx="1998878" cy="365760"/>
+            <a:off x="7185355" y="2999232"/>
+            <a:ext cx="1998878" cy="310896"/>
           </a:xfrm>
           <a:prstGeom prst="rect">
             <a:avLst/>
@@ -19793,8 +19512,8 @@
         </p:nvSpPr>
         <p:spPr>
           <a:xfrm>
-            <a:off x="7185355" y="3383280"/>
-            <a:ext cx="1998878" cy="1005840"/>
+            <a:off x="7185355" y="3310128"/>
+            <a:ext cx="1998878" cy="1097280"/>
           </a:xfrm>
           <a:prstGeom prst="rect">
             <a:avLst/>
@@ -19809,7 +19528,7 @@
           <a:p>
             <a:pPr algn="l">
               <a:lnSpc>
-                <a:spcPct val="116000"/>
+                <a:spcPct val="114000"/>
               </a:lnSpc>
               <a:spcBef>
                 <a:spcPts val="0"/>
@@ -19833,7 +19552,7 @@
           <a:p>
             <a:pPr algn="l">
               <a:lnSpc>
-                <a:spcPct val="116000"/>
+                <a:spcPct val="114000"/>
               </a:lnSpc>
               <a:spcBef>
                 <a:spcPts val="300"/>
@@ -19845,19 +19564,19 @@
             <a:r>
               <a:rPr sz="1500" b="0">
                 <a:solidFill>
-                  <a:srgbClr val="333333"/>
-                </a:solidFill>
-                <a:latin typeface="Arial"/>
-                <a:ea typeface="微软雅黑"/>
-                <a:cs typeface="Arial"/>
-              </a:rPr>
-              <a:t>菌群失衡最明显</a:t>
+                  <a:srgbClr val="2F5D62"/>
+                </a:solidFill>
+                <a:latin typeface="Arial"/>
+                <a:ea typeface="微软雅黑"/>
+                <a:cs typeface="Arial"/>
+              </a:rPr>
+              <a:t>53 例 ｜ 35 女 / 18 男</a:t>
             </a:r>
           </a:p>
           <a:p>
             <a:pPr algn="l">
               <a:lnSpc>
-                <a:spcPct val="116000"/>
+                <a:spcPct val="114000"/>
               </a:lnSpc>
               <a:spcBef>
                 <a:spcPts val="300"/>
@@ -19875,7 +19594,7 @@
                 <a:ea typeface="微软雅黑"/>
                 <a:cs typeface="Arial"/>
               </a:rPr>
-              <a:t>与炎症指标相关</a:t>
+              <a:t>平均 68.8 岁 · 失衡最明显</a:t>
             </a:r>
           </a:p>
         </p:txBody>
@@ -19932,8 +19651,8 @@
         </p:nvSpPr>
         <p:spPr>
           <a:xfrm>
-            <a:off x="9367113" y="3017520"/>
-            <a:ext cx="1998878" cy="365760"/>
+            <a:off x="9367113" y="2999232"/>
+            <a:ext cx="1998878" cy="310896"/>
           </a:xfrm>
           <a:prstGeom prst="rect">
             <a:avLst/>
@@ -19979,8 +19698,8 @@
         </p:nvSpPr>
         <p:spPr>
           <a:xfrm>
-            <a:off x="9367113" y="3383280"/>
-            <a:ext cx="1998878" cy="1005840"/>
+            <a:off x="9367113" y="3310128"/>
+            <a:ext cx="1998878" cy="1097280"/>
           </a:xfrm>
           <a:prstGeom prst="rect">
             <a:avLst/>
@@ -19995,7 +19714,7 @@
           <a:p>
             <a:pPr algn="l">
               <a:lnSpc>
-                <a:spcPct val="116000"/>
+                <a:spcPct val="114000"/>
               </a:lnSpc>
               <a:spcBef>
                 <a:spcPts val="0"/>
@@ -20019,7 +19738,7 @@
           <a:p>
             <a:pPr algn="l">
               <a:lnSpc>
-                <a:spcPct val="116000"/>
+                <a:spcPct val="114000"/>
               </a:lnSpc>
               <a:spcBef>
                 <a:spcPts val="300"/>
@@ -20031,19 +19750,19 @@
             <a:r>
               <a:rPr sz="1500" b="0">
                 <a:solidFill>
-                  <a:srgbClr val="333333"/>
-                </a:solidFill>
-                <a:latin typeface="Arial"/>
-                <a:ea typeface="微软雅黑"/>
-                <a:cs typeface="Arial"/>
-              </a:rPr>
-              <a:t>菌群变化幅度最大</a:t>
+                  <a:srgbClr val="2F5D62"/>
+                </a:solidFill>
+                <a:latin typeface="Arial"/>
+                <a:ea typeface="微软雅黑"/>
+                <a:cs typeface="Arial"/>
+              </a:rPr>
+              <a:t>53 例 ｜ 35 女 / 18 男</a:t>
             </a:r>
           </a:p>
           <a:p>
             <a:pPr algn="l">
               <a:lnSpc>
-                <a:spcPct val="116000"/>
+                <a:spcPct val="114000"/>
               </a:lnSpc>
               <a:spcBef>
                 <a:spcPts val="300"/>
@@ -20061,7 +19780,7 @@
                 <a:ea typeface="微软雅黑"/>
                 <a:cs typeface="Arial"/>
               </a:rPr>
-              <a:t>炎症—Aβ 环放大</a:t>
+              <a:t>平均 70.0 岁 · 变化幅度最大</a:t>
             </a:r>
           </a:p>
         </p:txBody>
@@ -20152,7 +19871,7 @@
                 <a:ea typeface="微软雅黑"/>
                 <a:cs typeface="Arial"/>
               </a:rPr>
-              <a:t>分层方式：5 个阶段 × 2 个性别 × 3 个年龄段（60—69、70—79、≥80 岁）= 30 个分层单元；每个单元内按年龄与性别匹配，得到结构一致的比较亚队列，保证阶段之间的差异不来自年龄与性别构成。</a:t>
+              <a:t>分层方式：5 个阶段 × 2 个性别 × 3 个年龄段（60—69、70—79、≥80 岁）= 30 个分层单元；每个单元内按年龄与性别匹配，最终选出 265 例匹配亚队列——各阶段 53 例、每组 35 女 / 18 男，组间平均年龄最大差 1.8 岁，保证阶段之间的差异不来自年龄与性别构成。</a:t>
             </a:r>
           </a:p>
         </p:txBody>
@@ -20165,8 +19884,8 @@
         </p:nvSpPr>
         <p:spPr>
           <a:xfrm>
-            <a:off x="640080" y="6053328"/>
-            <a:ext cx="10908792" cy="329184"/>
+            <a:off x="640080" y="6419088"/>
+            <a:ext cx="8778240" cy="310896"/>
           </a:xfrm>
           <a:prstGeom prst="rect">
             <a:avLst/>
@@ -20199,7 +19918,7 @@
                 <a:ea typeface="微软雅黑"/>
                 <a:cs typeface="Arial"/>
               </a:rPr>
-              <a:t>分组与分层依据：已完成的全队列临床信息表（sources/已完成1.docx）</a:t>
+              <a:t>研究生论文中期检查 · 文绍华</a:t>
             </a:r>
           </a:p>
         </p:txBody>
@@ -20207,53 +19926,6 @@
       <p:sp>
         <p:nvSpPr>
           <p:cNvPr id="32" name="TextBox 31"/>
-          <p:cNvSpPr txBox="1"/>
-          <p:nvPr/>
-        </p:nvSpPr>
-        <p:spPr>
-          <a:xfrm>
-            <a:off x="640080" y="6419088"/>
-            <a:ext cx="8778240" cy="310896"/>
-          </a:xfrm>
-          <a:prstGeom prst="rect">
-            <a:avLst/>
-          </a:prstGeom>
-          <a:noFill/>
-        </p:spPr>
-        <p:txBody>
-          <a:bodyPr wrap="square" anchor="t" lIns="27432" rIns="27432" tIns="0" bIns="0">
-            <a:spAutoFit/>
-          </a:bodyPr>
-          <a:lstStyle/>
-          <a:p>
-            <a:pPr algn="l">
-              <a:lnSpc>
-                <a:spcPct val="100000"/>
-              </a:lnSpc>
-              <a:spcBef>
-                <a:spcPts val="0"/>
-              </a:spcBef>
-              <a:spcAft>
-                <a:spcPts val="0"/>
-              </a:spcAft>
-            </a:pPr>
-            <a:r>
-              <a:rPr sz="1500" b="0">
-                <a:solidFill>
-                  <a:srgbClr val="777777"/>
-                </a:solidFill>
-                <a:latin typeface="Arial"/>
-                <a:ea typeface="微软雅黑"/>
-                <a:cs typeface="Arial"/>
-              </a:rPr>
-              <a:t>研究生论文中期检查 · 文绍华</a:t>
-            </a:r>
-          </a:p>
-        </p:txBody>
-      </p:sp>
-      <p:sp>
-        <p:nvSpPr>
-          <p:cNvPr id="33" name="TextBox 32"/>
           <p:cNvSpPr txBox="1"/>
           <p:nvPr/>
         </p:nvSpPr>
@@ -20486,8 +20158,8 @@
         </p:nvSpPr>
         <p:spPr>
           <a:xfrm>
-            <a:off x="640080" y="6053328"/>
-            <a:ext cx="10908792" cy="329184"/>
+            <a:off x="640080" y="6419088"/>
+            <a:ext cx="8778240" cy="310896"/>
           </a:xfrm>
           <a:prstGeom prst="rect">
             <a:avLst/>
@@ -20520,7 +20192,7 @@
                 <a:ea typeface="微软雅黑"/>
                 <a:cs typeface="Arial"/>
               </a:rPr>
-              <a:t>图：本项目自制（results/figures）</a:t>
+              <a:t>研究生论文中期检查 · 文绍华</a:t>
             </a:r>
           </a:p>
         </p:txBody>
@@ -20528,53 +20200,6 @@
       <p:sp>
         <p:nvSpPr>
           <p:cNvPr id="7" name="TextBox 6"/>
-          <p:cNvSpPr txBox="1"/>
-          <p:nvPr/>
-        </p:nvSpPr>
-        <p:spPr>
-          <a:xfrm>
-            <a:off x="640080" y="6419088"/>
-            <a:ext cx="8778240" cy="310896"/>
-          </a:xfrm>
-          <a:prstGeom prst="rect">
-            <a:avLst/>
-          </a:prstGeom>
-          <a:noFill/>
-        </p:spPr>
-        <p:txBody>
-          <a:bodyPr wrap="square" anchor="t" lIns="27432" rIns="27432" tIns="0" bIns="0">
-            <a:spAutoFit/>
-          </a:bodyPr>
-          <a:lstStyle/>
-          <a:p>
-            <a:pPr algn="l">
-              <a:lnSpc>
-                <a:spcPct val="100000"/>
-              </a:lnSpc>
-              <a:spcBef>
-                <a:spcPts val="0"/>
-              </a:spcBef>
-              <a:spcAft>
-                <a:spcPts val="0"/>
-              </a:spcAft>
-            </a:pPr>
-            <a:r>
-              <a:rPr sz="1500" b="0">
-                <a:solidFill>
-                  <a:srgbClr val="777777"/>
-                </a:solidFill>
-                <a:latin typeface="Arial"/>
-                <a:ea typeface="微软雅黑"/>
-                <a:cs typeface="Arial"/>
-              </a:rPr>
-              <a:t>研究生论文中期检查 · 文绍华</a:t>
-            </a:r>
-          </a:p>
-        </p:txBody>
-      </p:sp>
-      <p:sp>
-        <p:nvSpPr>
-          <p:cNvPr id="8" name="TextBox 7"/>
           <p:cNvSpPr txBox="1"/>
           <p:nvPr/>
         </p:nvSpPr>
@@ -21149,8 +20774,8 @@
         </p:nvSpPr>
         <p:spPr>
           <a:xfrm>
-            <a:off x="640080" y="6053328"/>
-            <a:ext cx="10908792" cy="329184"/>
+            <a:off x="640080" y="6419088"/>
+            <a:ext cx="8778240" cy="310896"/>
           </a:xfrm>
           <a:prstGeom prst="rect">
             <a:avLst/>
@@ -21183,7 +20808,7 @@
                 <a:ea typeface="微软雅黑"/>
                 <a:cs typeface="Arial"/>
               </a:rPr>
-              <a:t>图：本项目自制（results/figures）</a:t>
+              <a:t>研究生论文中期检查 · 文绍华</a:t>
             </a:r>
           </a:p>
         </p:txBody>
@@ -21191,53 +20816,6 @@
       <p:sp>
         <p:nvSpPr>
           <p:cNvPr id="8" name="TextBox 7"/>
-          <p:cNvSpPr txBox="1"/>
-          <p:nvPr/>
-        </p:nvSpPr>
-        <p:spPr>
-          <a:xfrm>
-            <a:off x="640080" y="6419088"/>
-            <a:ext cx="8778240" cy="310896"/>
-          </a:xfrm>
-          <a:prstGeom prst="rect">
-            <a:avLst/>
-          </a:prstGeom>
-          <a:noFill/>
-        </p:spPr>
-        <p:txBody>
-          <a:bodyPr wrap="square" anchor="t" lIns="27432" rIns="27432" tIns="0" bIns="0">
-            <a:spAutoFit/>
-          </a:bodyPr>
-          <a:lstStyle/>
-          <a:p>
-            <a:pPr algn="l">
-              <a:lnSpc>
-                <a:spcPct val="100000"/>
-              </a:lnSpc>
-              <a:spcBef>
-                <a:spcPts val="0"/>
-              </a:spcBef>
-              <a:spcAft>
-                <a:spcPts val="0"/>
-              </a:spcAft>
-            </a:pPr>
-            <a:r>
-              <a:rPr sz="1500" b="0">
-                <a:solidFill>
-                  <a:srgbClr val="777777"/>
-                </a:solidFill>
-                <a:latin typeface="Arial"/>
-                <a:ea typeface="微软雅黑"/>
-                <a:cs typeface="Arial"/>
-              </a:rPr>
-              <a:t>研究生论文中期检查 · 文绍华</a:t>
-            </a:r>
-          </a:p>
-        </p:txBody>
-      </p:sp>
-      <p:sp>
-        <p:nvSpPr>
-          <p:cNvPr id="9" name="TextBox 8"/>
           <p:cNvSpPr txBox="1"/>
           <p:nvPr/>
         </p:nvSpPr>

--- a/deliverable/中期答辩_H_nature风.pptx
+++ b/deliverable/中期答辩_H_nature风.pptx
@@ -665,7 +665,7 @@
           <a:lstStyle/>
           <a:p>
             <a:r>
-              <a:t>机制关联参照乙酰胆碱酯酶—β-淀粉样肽复合物分子模拟研究的思路，从三个方向考察：与 Aβ 的相互作用及其对聚集的影响、与 AChE 外周阴离子位点结合从而干扰成核的可能性，以及经免疫与炎症通路参与神经炎症的可能性。这部分把结论定位为线索发现，不夸大因果。</a:t>
+              <a:t>机制关联参照乙酰胆碱酯酶—β-淀粉样肽复合物分子模拟研究的思路，方向按致病方向设定：微生物来源的淀粉样蛋白与内毒素已有先例——FapC 与 CsgA 种子加速 Aβ 纤维化并在动物模型中加重病理，LPS 缩短成核滞后期并诱导斑块与 p-tau，LL-37 与 Aβ 形成异源团簇、生成更毒的聚集体。因此分析的是候选肽是否促进 Aβ 成核与聚集、是否经 AChE 外周阴离子位点推动成核、是否经免疫与炎症通路放大神经炎症，而不是去证明它抑制 AD；结论定位为线索发现与优先序。</a:t>
             </a:r>
           </a:p>
         </p:txBody>
@@ -1155,7 +1155,7 @@
           <a:lstStyle/>
           <a:p>
             <a:r>
-              <a:t>这页把抗菌肽与 AD 的关联拆成七环，并标出每一环的证据强度：蓝色是已有实验或临床证据，绿色是计算方法能给出候选与优先序的部分，橙色是本课题要回答或需要验证的部分。老师问任何一环，都能说清这一环目前的证据到什么程度。</a:t>
+              <a:t>这页把抗菌肽与 AD 的关联拆成七环，并标出每一环的证据强度：蓝色是已有实验或临床证据，绿色是计算方法能给出候选与优先序的部分，橙色是本课题要回答或需要验证的部分。第六环要特别说清楚：本课题验证的是致病方向——筛选出的候选抗菌肽是否像 FapC、CsgA 与 LL-37 那样推动 Aβ 成核聚集与神经炎症，而不是去证明它抑制 AD。老师问任何一环，都能说清这一环目前的证据到什么程度。</a:t>
             </a:r>
           </a:p>
         </p:txBody>
@@ -1365,7 +1365,7 @@
           <a:lstStyle/>
           <a:p>
             <a:r>
-              <a:t>机制落点参照 AChE–Aβ 复合物的分子动力学研究：Aβ 对接进 PAS 后，复合物在 1 微秒模拟中保持稳定，主要停留区段是 344—361，该区段紧邻 PAS 但不受双位点抑制剂的位阻。同一界面的其他实验证据包括：丙锭可阻断 AChE 诱导的聚集而催化位点抑制剂无效、PAS 负电荷触发 β-发夹构象、丁酰胆碱酯酶反向延缓纤维形成。由此提出三个假设，并用对接与动力学给出优先序。</a:t>
+              <a:t>机制落点参照 AChE–Aβ 复合物的分子动力学研究：Aβ 对接进 PAS 后，复合物在 1 微秒模拟中保持稳定，主要停留区段是 344—361，该区段紧邻 PAS 但不受双位点抑制剂的位阻。这一段界面既是 Aβ 成核的场所，也是候选抗菌肽最可能介入的位置。与按“抑制聚集”提问不同，本课题的动力学按致病方向设计——检验候选肽是否促进成核与聚集，这样设计的依据是微生物来源的淀粉样蛋白与内毒素已有直接先例：FapC 与 CsgA 种子催化 Aβ 纤维化并在动物模型中加重病理 [47][48]，LPS 缩短滞后期、其内毒素血症模型中 7—9 天出现 Aβ 斑块与 p-tau [49][50]，LL-37 与 Aβ40 形成异源团簇、生成更毒的聚集体并经 CLIC1 造成小鼠与猴模型的 AD 样病理 [6][53]。由此提出三个假设：H1 结合 PAS 与 344—361 促进成核与聚集、H2 结合 Aβ 生成区加速纤维化或推向更毒寡聚体、H3 在膜与小胶质水平放大炎症信号；验证路径是先用对接与动力学给出致病方向的优先序，再用 ThT 聚集动力学、电镜形态与细胞毒性实验给证据。</a:t>
             </a:r>
           </a:p>
         </p:txBody>
@@ -1505,7 +1505,7 @@
           <a:lstStyle/>
           <a:p>
             <a:r>
-              <a:t>这张表把老师提出的八个问题逐条列出，并给出答案要点与证据强度。需要说明的是：关联类结论的证据强度较高，方向类结论（谁更多、促进还是抑制）存在例外与条件依赖，因此标注为中；微生物源抗菌肽在 AD 中的变化属于待验证部分，正是本课题要补的一环。</a:t>
+              <a:t>这张表把老师提出的八个问题逐条列出，并给出答案要点与证据强度。需要说明两件事：第一，机制与动力学一律按致病方向表述——只问候选抗菌肽是否推动 AD，不写“抑制 AD”，抗菌活性放在第六问作为本职功能；第二，致病方向的体内外证据已经存在（细菌淀粉样蛋白、内毒素与 LL-37），但针对本课题筛出的候选肽仍属假设，因此标注为中—强；微生物源抗菌肽在 AD 中的变化正是本课题要补的一环。</a:t>
             </a:r>
           </a:p>
         </p:txBody>
@@ -1575,7 +1575,7 @@
           <a:lstStyle/>
           <a:p>
             <a:r>
-              <a:t>机制说明文档《抗菌肽与AD关联机制说明》共整理 46 条文献，覆盖 AD 与感染、宿主抗菌肽在 AD 中的变化、抗菌肽预测方法、菌群分期、AChE–Aβ 与交叉成核的分子模拟，以及作为反例的乳铁蛋白下降证据。这里列出其中十条代表性文献及其结论。</a:t>
+              <a:t>机制说明文档《抗菌肽与AD关联机制说明》共整理 58 条文献，覆盖 AD 与感染、宿主抗菌肽在 AD 中的变化、抗菌肽预测方法、菌群分期、AChE–Aβ 与交叉成核的分子模拟、细菌淀粉样蛋白与内毒素推动 Aβ 聚集的致病方向证据，以及作为反例的乳铁蛋白下降与α-防御素抑制纤维化的证据。这里列出其中十三条代表性文献及其结论。</a:t>
             </a:r>
           </a:p>
         </p:txBody>
@@ -6080,7 +6080,7 @@
                 <a:ea typeface="微软雅黑"/>
                 <a:cs typeface="Arial"/>
               </a:rPr>
-              <a:t>借鉴乙酰胆碱酯酶—β-淀粉样肽复合物分子模拟研究的思路：考察候选肽与 Aβ 的相互作用、与 AChE 外周阴离子位点的结合，以及经免疫与炎症通路参与神经炎症的可能性。定位为线索发现。</a:t>
+              <a:t>借鉴乙酰胆碱酯酶—β-淀粉样肽复合物分子模拟研究的思路，按致病方向考察：候选肽是否促进 Aβ 成核与聚集、是否经 AChE 外周阴离子位点推动成核、是否经免疫与炎症通路放大神经炎症；输出优先序，定位为线索发现。</a:t>
             </a:r>
           </a:p>
         </p:txBody>
@@ -9059,7 +9059,7 @@
                 <a:ea typeface="微软雅黑"/>
                 <a:cs typeface="Arial"/>
               </a:rPr>
-              <a:t>① AD 与感染相关、② 感染与炎症驱动抗菌肽与 Aβ 生成、③ Aβ 本身即抗菌肽；④ 抗菌活性可计算预测、⑤ AD 组特异抗菌肽随阶段变化、⑥ 双刃剑效应；⑦ 为什么 AD 更多与分子机制落点，是本课题要回答的部分。</a:t>
+              <a:t>① AD 与感染相关、② 炎症驱动抗菌肽与 Aβ 生成、③ Aβ 本身即抗菌肽；④ 抗菌活性可计算预测、⑤ 特异抗菌肽随阶段变化、⑥ 致病方向：促进 Aβ 聚集；⑦ 为什么 AD 更多与机制落点是本课题要回答的部分。</a:t>
             </a:r>
           </a:p>
         </p:txBody>
@@ -10462,7 +10462,7 @@
                 <a:ea typeface="微软雅黑"/>
                 <a:cs typeface="Arial"/>
               </a:rPr>
-              <a:t>分子机制（一）：AChE–Aβ 复合物的动力学要点</a:t>
+              <a:t>分子机制（一）：动力学如何验证候选肽的致病方向</a:t>
             </a:r>
           </a:p>
         </p:txBody>
@@ -10577,7 +10577,7 @@
                 <a:ea typeface="微软雅黑"/>
                 <a:cs typeface="Arial"/>
               </a:rPr>
-              <a:t>PAS 是 Aβ 聚集的成核中心：1 μs 模拟中复合物稳定，Aβ 主要停留于 344—361 区段，不受双位点抑制剂位阻 [31]；丙锭阻断 PAS 后聚集被抑制 [33]。</a:t>
+              <a:t>PAS 是 Aβ 的成核界面：1 μs 模拟中复合物稳定，Aβ 主要停留于 344—361 区段 [31]；本课题据此检验候选肽在这一界面是促进成核与聚集，还是把产物推向更毒的寡聚体。</a:t>
             </a:r>
           </a:p>
         </p:txBody>
@@ -10851,7 +10851,7 @@
                 <a:ea typeface="微软雅黑"/>
                 <a:cs typeface="Arial"/>
               </a:rPr>
-              <a:t>抗菌肽与 Aβ 结构兼容，可交叉成核，方向由界面与浓度决定 [36][37]；LL-37 以疏水作用封堵纤维延伸面 [38]，五肽库筛选可破坏 D23—K28 盐桥 [41]。</a:t>
+              <a:t>抗菌肽与 Aβ 结构兼容，可交叉成核 [36][37]；微生物来源的 FapC 与 CsgA 是先例：种子加速 Aβ 纤维化并在动物模型中加重病理 [47][48]；本课题按致病方向检验候选肽。</a:t>
             </a:r>
           </a:p>
         </p:txBody>
@@ -11819,7 +11819,7 @@
                           <a:ea typeface="微软雅黑"/>
                           <a:cs typeface="Arial"/>
                         </a:rPr>
-                        <a:t>⑤ 促进还是抑制</a:t>
+                        <a:t>⑤ 是否导致 AD（致病方向）</a:t>
                       </a:r>
                     </a:p>
                   </a:txBody>
@@ -11854,7 +11854,7 @@
                           <a:ea typeface="微软雅黑"/>
                           <a:cs typeface="Arial"/>
                         </a:rPr>
-                        <a:t>两者同时成立：低浓度抗菌，长期过量致病</a:t>
+                        <a:t>FapC/CsgA 加速 Aβ 纤维化；LPS 促斑块与 p-tau；LL-37 经 CLIC1 致 AD 样病理</a:t>
                       </a:r>
                     </a:p>
                   </a:txBody>
@@ -11924,7 +11924,7 @@
                           <a:ea typeface="微软雅黑"/>
                           <a:cs typeface="Arial"/>
                         </a:rPr>
-                        <a:t>[1][3][6][20]</a:t>
+                        <a:t>[6][47][49][53]</a:t>
                       </a:r>
                     </a:p>
                   </a:txBody>
@@ -11961,7 +11961,7 @@
                           <a:ea typeface="微软雅黑"/>
                           <a:cs typeface="Arial"/>
                         </a:rPr>
-                        <a:t>⑥ 抑制感染证据</a:t>
+                        <a:t>⑥ 抗菌活性（本职功能）</a:t>
                       </a:r>
                     </a:p>
                   </a:txBody>
@@ -11996,7 +11996,7 @@
                           <a:ea typeface="微软雅黑"/>
                           <a:cs typeface="Arial"/>
                         </a:rPr>
-                        <a:t>小鼠抗感染更强；纤维网捕获病原体</a:t>
+                        <a:t>小鼠抗感染更强；纤维网捕获病原体；不作为“抑制 AD”结论</a:t>
                       </a:r>
                     </a:p>
                   </a:txBody>
@@ -12578,7 +12578,7 @@
         </p:nvGraphicFramePr>
         <p:xfrm>
           <a:off x="640080" y="1234440"/>
-          <a:ext cx="10908792" cy="4626864"/>
+          <a:ext cx="10908792" cy="5376672"/>
         </p:xfrm>
         <a:graphic>
           <a:graphicData uri="http://schemas.openxmlformats.org/drawingml/2006/table">
@@ -12591,7 +12591,7 @@
                 <a:gridCol w="5623560"/>
                 <a:gridCol w="2587752"/>
               </a:tblGrid>
-              <a:tr h="420624">
+              <a:tr h="384048">
                 <a:tc>
                   <a:txBody>
                     <a:bodyPr/>
@@ -12698,7 +12698,7 @@
                   </a:tcPr>
                 </a:tc>
               </a:tr>
-              <a:tr h="420624">
+              <a:tr h="384048">
                 <a:tc>
                   <a:txBody>
                     <a:bodyPr/>
@@ -12805,7 +12805,7 @@
                   </a:tcPr>
                 </a:tc>
               </a:tr>
-              <a:tr h="420624">
+              <a:tr h="384048">
                 <a:tc>
                   <a:txBody>
                     <a:bodyPr/>
@@ -12912,7 +12912,7 @@
                   </a:tcPr>
                 </a:tc>
               </a:tr>
-              <a:tr h="420624">
+              <a:tr h="384048">
                 <a:tc>
                   <a:txBody>
                     <a:bodyPr/>
@@ -13019,7 +13019,7 @@
                   </a:tcPr>
                 </a:tc>
               </a:tr>
-              <a:tr h="420624">
+              <a:tr h="384048">
                 <a:tc>
                   <a:txBody>
                     <a:bodyPr/>
@@ -13126,7 +13126,7 @@
                   </a:tcPr>
                 </a:tc>
               </a:tr>
-              <a:tr h="420624">
+              <a:tr h="384048">
                 <a:tc>
                   <a:txBody>
                     <a:bodyPr/>
@@ -13233,7 +13233,7 @@
                   </a:tcPr>
                 </a:tc>
               </a:tr>
-              <a:tr h="420624">
+              <a:tr h="384048">
                 <a:tc>
                   <a:txBody>
                     <a:bodyPr/>
@@ -13340,7 +13340,7 @@
                   </a:tcPr>
                 </a:tc>
               </a:tr>
-              <a:tr h="420624">
+              <a:tr h="384048">
                 <a:tc>
                   <a:txBody>
                     <a:bodyPr/>
@@ -13447,7 +13447,7 @@
                   </a:tcPr>
                 </a:tc>
               </a:tr>
-              <a:tr h="420624">
+              <a:tr h="384048">
                 <a:tc>
                   <a:txBody>
                     <a:bodyPr/>
@@ -13554,7 +13554,7 @@
                   </a:tcPr>
                 </a:tc>
               </a:tr>
-              <a:tr h="420624">
+              <a:tr h="384048">
                 <a:tc>
                   <a:txBody>
                     <a:bodyPr/>
@@ -13661,7 +13661,7 @@
                   </a:tcPr>
                 </a:tc>
               </a:tr>
-              <a:tr h="420624">
+              <a:tr h="384048">
                 <a:tc>
                   <a:txBody>
                     <a:bodyPr/>
@@ -13758,6 +13758,327 @@
                           <a:cs typeface="Arial"/>
                         </a:rPr>
                         <a:t>J Alzheimers Dis [42]</a:t>
+                      </a:r>
+                    </a:p>
+                  </a:txBody>
+                  <a:tcPr marT="27432" marB="27432">
+                    <a:solidFill>
+                      <a:srgbClr val="FFFFFF"/>
+                    </a:solidFill>
+                  </a:tcPr>
+                </a:tc>
+              </a:tr>
+              <a:tr h="384048">
+                <a:tc>
+                  <a:txBody>
+                    <a:bodyPr/>
+                    <a:lstStyle/>
+                    <a:p>
+                      <a:pPr algn="l">
+                        <a:lnSpc>
+                          <a:spcPct val="105000"/>
+                        </a:lnSpc>
+                        <a:spcBef>
+                          <a:spcPts val="0"/>
+                        </a:spcBef>
+                        <a:spcAft>
+                          <a:spcPts val="0"/>
+                        </a:spcAft>
+                      </a:pPr>
+                      <a:r>
+                        <a:rPr sz="1500" b="0">
+                          <a:solidFill>
+                            <a:srgbClr val="111111"/>
+                          </a:solidFill>
+                          <a:latin typeface="Arial"/>
+                          <a:ea typeface="微软雅黑"/>
+                          <a:cs typeface="Arial"/>
+                        </a:rPr>
+                        <a:t>Javed 等 2020</a:t>
+                      </a:r>
+                    </a:p>
+                  </a:txBody>
+                  <a:tcPr marT="27432" marB="27432">
+                    <a:solidFill>
+                      <a:srgbClr val="FFFFFF"/>
+                    </a:solidFill>
+                  </a:tcPr>
+                </a:tc>
+                <a:tc>
+                  <a:txBody>
+                    <a:bodyPr/>
+                    <a:lstStyle/>
+                    <a:p>
+                      <a:pPr algn="l">
+                        <a:lnSpc>
+                          <a:spcPct val="105000"/>
+                        </a:lnSpc>
+                        <a:spcBef>
+                          <a:spcPts val="0"/>
+                        </a:spcBef>
+                        <a:spcAft>
+                          <a:spcPts val="0"/>
+                        </a:spcAft>
+                      </a:pPr>
+                      <a:r>
+                        <a:rPr sz="1500" b="0">
+                          <a:solidFill>
+                            <a:srgbClr val="333333"/>
+                          </a:solidFill>
+                          <a:latin typeface="Arial"/>
+                          <a:ea typeface="微软雅黑"/>
+                          <a:cs typeface="Arial"/>
+                        </a:rPr>
+                        <a:t>FapC 种子加速 Aβ 纤维化，斑马鱼中加重病理</a:t>
+                      </a:r>
+                    </a:p>
+                  </a:txBody>
+                  <a:tcPr marT="27432" marB="27432">
+                    <a:solidFill>
+                      <a:srgbClr val="FFFFFF"/>
+                    </a:solidFill>
+                  </a:tcPr>
+                </a:tc>
+                <a:tc>
+                  <a:txBody>
+                    <a:bodyPr/>
+                    <a:lstStyle/>
+                    <a:p>
+                      <a:pPr algn="l">
+                        <a:lnSpc>
+                          <a:spcPct val="105000"/>
+                        </a:lnSpc>
+                        <a:spcBef>
+                          <a:spcPts val="0"/>
+                        </a:spcBef>
+                        <a:spcAft>
+                          <a:spcPts val="0"/>
+                        </a:spcAft>
+                      </a:pPr>
+                      <a:r>
+                        <a:rPr sz="1500" b="0">
+                          <a:solidFill>
+                            <a:srgbClr val="333333"/>
+                          </a:solidFill>
+                          <a:latin typeface="Arial"/>
+                          <a:ea typeface="微软雅黑"/>
+                          <a:cs typeface="Arial"/>
+                        </a:rPr>
+                        <a:t>Adv Sci [47]</a:t>
+                      </a:r>
+                    </a:p>
+                  </a:txBody>
+                  <a:tcPr marT="27432" marB="27432">
+                    <a:solidFill>
+                      <a:srgbClr val="FFFFFF"/>
+                    </a:solidFill>
+                  </a:tcPr>
+                </a:tc>
+              </a:tr>
+              <a:tr h="384048">
+                <a:tc>
+                  <a:txBody>
+                    <a:bodyPr/>
+                    <a:lstStyle/>
+                    <a:p>
+                      <a:pPr algn="l">
+                        <a:lnSpc>
+                          <a:spcPct val="105000"/>
+                        </a:lnSpc>
+                        <a:spcBef>
+                          <a:spcPts val="0"/>
+                        </a:spcBef>
+                        <a:spcAft>
+                          <a:spcPts val="0"/>
+                        </a:spcAft>
+                      </a:pPr>
+                      <a:r>
+                        <a:rPr sz="1500" b="0">
+                          <a:solidFill>
+                            <a:srgbClr val="111111"/>
+                          </a:solidFill>
+                          <a:latin typeface="Arial"/>
+                          <a:ea typeface="微软雅黑"/>
+                          <a:cs typeface="Arial"/>
+                        </a:rPr>
+                        <a:t>Wang 等 2018</a:t>
+                      </a:r>
+                    </a:p>
+                  </a:txBody>
+                  <a:tcPr marT="27432" marB="27432">
+                    <a:solidFill>
+                      <a:srgbClr val="FFFFFF"/>
+                    </a:solidFill>
+                  </a:tcPr>
+                </a:tc>
+                <a:tc>
+                  <a:txBody>
+                    <a:bodyPr/>
+                    <a:lstStyle/>
+                    <a:p>
+                      <a:pPr algn="l">
+                        <a:lnSpc>
+                          <a:spcPct val="105000"/>
+                        </a:lnSpc>
+                        <a:spcBef>
+                          <a:spcPts val="0"/>
+                        </a:spcBef>
+                        <a:spcAft>
+                          <a:spcPts val="0"/>
+                        </a:spcAft>
+                      </a:pPr>
+                      <a:r>
+                        <a:rPr sz="1500" b="0">
+                          <a:solidFill>
+                            <a:srgbClr val="333333"/>
+                          </a:solidFill>
+                          <a:latin typeface="Arial"/>
+                          <a:ea typeface="微软雅黑"/>
+                          <a:cs typeface="Arial"/>
+                        </a:rPr>
+                        <a:t>LPS 内毒素血症诱导 Aβ 斑块与 p-tau</a:t>
+                      </a:r>
+                    </a:p>
+                  </a:txBody>
+                  <a:tcPr marT="27432" marB="27432">
+                    <a:solidFill>
+                      <a:srgbClr val="FFFFFF"/>
+                    </a:solidFill>
+                  </a:tcPr>
+                </a:tc>
+                <a:tc>
+                  <a:txBody>
+                    <a:bodyPr/>
+                    <a:lstStyle/>
+                    <a:p>
+                      <a:pPr algn="l">
+                        <a:lnSpc>
+                          <a:spcPct val="105000"/>
+                        </a:lnSpc>
+                        <a:spcBef>
+                          <a:spcPts val="0"/>
+                        </a:spcBef>
+                        <a:spcAft>
+                          <a:spcPts val="0"/>
+                        </a:spcAft>
+                      </a:pPr>
+                      <a:r>
+                        <a:rPr sz="1500" b="0">
+                          <a:solidFill>
+                            <a:srgbClr val="333333"/>
+                          </a:solidFill>
+                          <a:latin typeface="Arial"/>
+                          <a:ea typeface="微软雅黑"/>
+                          <a:cs typeface="Arial"/>
+                        </a:rPr>
+                        <a:t>Am J Nucl Med Mol Imaging [50]</a:t>
+                      </a:r>
+                    </a:p>
+                  </a:txBody>
+                  <a:tcPr marT="27432" marB="27432">
+                    <a:solidFill>
+                      <a:srgbClr val="FFFFFF"/>
+                    </a:solidFill>
+                  </a:tcPr>
+                </a:tc>
+              </a:tr>
+              <a:tr h="384048">
+                <a:tc>
+                  <a:txBody>
+                    <a:bodyPr/>
+                    <a:lstStyle/>
+                    <a:p>
+                      <a:pPr algn="l">
+                        <a:lnSpc>
+                          <a:spcPct val="105000"/>
+                        </a:lnSpc>
+                        <a:spcBef>
+                          <a:spcPts val="0"/>
+                        </a:spcBef>
+                        <a:spcAft>
+                          <a:spcPts val="0"/>
+                        </a:spcAft>
+                      </a:pPr>
+                      <a:r>
+                        <a:rPr sz="1500" b="0">
+                          <a:solidFill>
+                            <a:srgbClr val="111111"/>
+                          </a:solidFill>
+                          <a:latin typeface="Arial"/>
+                          <a:ea typeface="微软雅黑"/>
+                          <a:cs typeface="Arial"/>
+                        </a:rPr>
+                        <a:t>Wang 等 2025</a:t>
+                      </a:r>
+                    </a:p>
+                  </a:txBody>
+                  <a:tcPr marT="27432" marB="27432">
+                    <a:solidFill>
+                      <a:srgbClr val="FFFFFF"/>
+                    </a:solidFill>
+                  </a:tcPr>
+                </a:tc>
+                <a:tc>
+                  <a:txBody>
+                    <a:bodyPr/>
+                    <a:lstStyle/>
+                    <a:p>
+                      <a:pPr algn="l">
+                        <a:lnSpc>
+                          <a:spcPct val="105000"/>
+                        </a:lnSpc>
+                        <a:spcBef>
+                          <a:spcPts val="0"/>
+                        </a:spcBef>
+                        <a:spcAft>
+                          <a:spcPts val="0"/>
+                        </a:spcAft>
+                      </a:pPr>
+                      <a:r>
+                        <a:rPr sz="1500" b="0">
+                          <a:solidFill>
+                            <a:srgbClr val="333333"/>
+                          </a:solidFill>
+                          <a:latin typeface="Arial"/>
+                          <a:ea typeface="微软雅黑"/>
+                          <a:cs typeface="Arial"/>
+                        </a:rPr>
+                        <a:t>LL-37 与 Aβ40 形成异源团簇，产物更毒</a:t>
+                      </a:r>
+                    </a:p>
+                  </a:txBody>
+                  <a:tcPr marT="27432" marB="27432">
+                    <a:solidFill>
+                      <a:srgbClr val="FFFFFF"/>
+                    </a:solidFill>
+                  </a:tcPr>
+                </a:tc>
+                <a:tc>
+                  <a:txBody>
+                    <a:bodyPr/>
+                    <a:lstStyle/>
+                    <a:p>
+                      <a:pPr algn="l">
+                        <a:lnSpc>
+                          <a:spcPct val="105000"/>
+                        </a:lnSpc>
+                        <a:spcBef>
+                          <a:spcPts val="0"/>
+                        </a:spcBef>
+                        <a:spcAft>
+                          <a:spcPts val="0"/>
+                        </a:spcAft>
+                      </a:pPr>
+                      <a:r>
+                        <a:rPr sz="1500" b="0">
+                          <a:solidFill>
+                            <a:srgbClr val="333333"/>
+                          </a:solidFill>
+                          <a:latin typeface="Arial"/>
+                          <a:ea typeface="微软雅黑"/>
+                          <a:cs typeface="Arial"/>
+                        </a:rPr>
+                        <a:t>Angew Chem Int Ed [53]</a:t>
                       </a:r>
                     </a:p>
                   </a:txBody>

--- a/deliverable/中期答辩_H_nature风.pptx
+++ b/deliverable/中期答辩_H_nature风.pptx
@@ -595,7 +595,7 @@
           <a:lstStyle/>
           <a:p>
             <a:r>
-              <a:t>在序列去冗余的基础上，引入宏蛋白组的表达证据做二次去重，只保留在蛋白层面真实存在、可检出的抗菌肽；再按组内共有、组间特比较，得到健康人群特有与各疾病阶段特有的抗菌肽清单。这一步已完成。</a:t>
+              <a:t>在序列去冗余的基础上，引入宏蛋白组的表达证据做二次去重，只保留在蛋白层面真实存在、可检出的抗菌肽；再按组内共有、组间特比较，得到 AD 组特有（AD 特异性）的抗菌肽清单，这一步已完成。</a:t>
             </a:r>
           </a:p>
         </p:txBody>
@@ -665,7 +665,7 @@
           <a:lstStyle/>
           <a:p>
             <a:r>
-              <a:t>机制关联参照乙酰胆碱酯酶—β-淀粉样肽复合物分子模拟研究的思路，方向按致病方向设定：微生物来源的淀粉样蛋白与内毒素已有先例——FapC 与 CsgA 种子加速 Aβ 纤维化并在动物模型中加重病理，LPS 缩短成核滞后期并诱导斑块与 p-tau，LL-37 与 Aβ 形成异源团簇、生成更毒的聚集体。因此分析的是候选肽是否促进 Aβ 成核与聚集、是否经 AChE 外周阴离子位点推动成核、是否经免疫与炎症通路放大神经炎症，而不是去证明它抑制 AD；结论定位为线索发现与优先序。</a:t>
+              <a:t>机制关联参照乙酰胆碱酯酶—β-淀粉样肽复合物分子模拟研究的思路，方向按致病方向设定：微生物来源的淀粉样蛋白与内毒素已有先例——FapC 与 CsgA 种子加速 Aβ 纤维化并在动物模型中加重病理，LPS 缩短成核滞后期并诱导斑块与 p-tau，LL-37 与 Aβ 形成异源团簇、生成更毒的聚集体。因此分析的是 AD 特异性特有肽是否促进 Aβ 成核与聚集、是否经 AChE 外周阴离子位点推动成核、是否经免疫与炎症通路放大神经炎症，而不是去证明它抑制 AD；结论定位为线索发现。</a:t>
             </a:r>
           </a:p>
         </p:txBody>
@@ -1155,7 +1155,7 @@
           <a:lstStyle/>
           <a:p>
             <a:r>
-              <a:t>这页把抗菌肽与 AD 的关联拆成七环，并标出每一环的证据强度：蓝色是已有实验或临床证据，绿色是计算方法能给出候选与优先序的部分，橙色是本课题要回答或需要验证的部分。第六环要特别说清楚：本课题验证的是致病方向——筛选出的候选抗菌肽是否像 FapC、CsgA 与 LL-37 那样推动 Aβ 成核聚集与神经炎症，而不是去证明它抑制 AD。老师问任何一环，都能说清这一环目前的证据到什么程度。</a:t>
+              <a:t>这页把抗菌肽与 AD 的关联拆成七环，并标出每一环的证据强度：蓝色是已有实验或临床证据，绿色是计算与文献比对能给出关联线索的部分，橙色是本课题要回答或需要验证的部分。第六环要特别说清楚：本课题验证的是致病方向——筛选出的候选抗菌肽是否像 FapC、CsgA 与 LL-37 那样推动 Aβ 成核聚集与神经炎症，而不是去证明它抑制 AD。老师问任何一环，都能说清这一环目前的证据到什么程度。</a:t>
             </a:r>
           </a:p>
         </p:txBody>
@@ -1365,7 +1365,7 @@
           <a:lstStyle/>
           <a:p>
             <a:r>
-              <a:t>机制落点参照 AChE–Aβ 复合物的分子动力学研究：Aβ 对接进 PAS 后，复合物在 1 微秒模拟中保持稳定，主要停留区段是 344—361，该区段紧邻 PAS 但不受双位点抑制剂的位阻。这一段界面既是 Aβ 成核的场所，也是候选抗菌肽最可能介入的位置。与按“抑制聚集”提问不同，本课题的动力学按致病方向设计——检验候选肽是否促进成核与聚集，这样设计的依据是微生物来源的淀粉样蛋白与内毒素已有直接先例：FapC 与 CsgA 种子催化 Aβ 纤维化并在动物模型中加重病理 [47][48]，LPS 缩短滞后期、其内毒素血症模型中 7—9 天出现 Aβ 斑块与 p-tau [49][50]，LL-37 与 Aβ40 形成异源团簇、生成更毒的聚集体并经 CLIC1 造成小鼠与猴模型的 AD 样病理 [6][53]。由此提出三个假设：H1 结合 PAS 与 344—361 促进成核与聚集、H2 结合 Aβ 生成区加速纤维化或推向更毒寡聚体、H3 在膜与小胶质水平放大炎症信号；验证路径是先用对接与动力学给出致病方向的优先序，再用 ThT 聚集动力学、电镜形态与细胞毒性实验给证据。</a:t>
+              <a:t>机制落点参照 AChE–Aβ 复合物的分子动力学研究：Aβ 对接进 PAS 后，复合物在 1 微秒模拟中保持稳定，主要停留区段是 344—361，该区段紧邻 PAS 但不受双位点抑制剂的位阻。这一段界面既是 Aβ 成核的场所，也是 AD 特异性特有肽最可能起作用的位置。与按“抑制聚集”提问不同，本课题的动力学按致病方向设计——检验 AD 特有肽是否促进成核与聚集，这样设计的依据是微生物来源的淀粉样蛋白与内毒素已有直接先例：FapC 与 CsgA 种子催化 Aβ 纤维化并在动物模型中加重病理 [47][48]，LPS 缩短滞后期、其内毒素血症模型中 7—9 天出现 Aβ 斑块与 p-tau [49][50]，LL-37 与 Aβ40 形成异源团簇、生成更毒的聚集体并经 CLIC1 造成小鼠与猴模型的 AD 样病理 [6][53]。由此提出三个假设：H1 结合 PAS 与 344—361 促进成核与聚集、H2 结合 Aβ 生成区加速纤维化或推向更毒寡聚体、H3 在膜与小胶质水平放大炎症信号；验证路径是先用对接与动力学判断关联方向（是否促进成核与聚集、是否把产物推向更毒寡聚体），再用 ThT 聚集动力学、电镜形态与细胞毒性实验给证据。</a:t>
             </a:r>
           </a:p>
         </p:txBody>
@@ -1855,7 +1855,7 @@
           <a:lstStyle/>
           <a:p>
             <a:r>
-              <a:t>这页说明整体流程：从测序数据到候选抗菌肽清单，共十二步，输入输出都可追溯。工具链是 fastp 与 KneadData 做质控去宿主，MEGAHIT 组装，MetaBAT2、MaxBin2 与 CONCOCT 多算法联合分箱后 metaWRAP 提纯，dRep 按 95% ANI 去冗余得到参考基因组集，EMBOSS getorf 预测 sORF 并做序列级去冗余，Attention / LSTM / BERT 三模型一致阳性才纳入候选，CoverM 定量并做 CLR 变换，用 Kruskal-Wallis 与 Mann-Whitney U 做组间检验，再用宏蛋白组表达证据二次去重。前九步已经在中期前完成，最后三步正在推进——机制关联分析、抑菌实验验证与结果整理。</a:t>
+              <a:t>这页说明整体流程：从测序数据到候选抗菌肽清单，共十二步，输入输出都可追溯。工具链是 fastp 与 KneadData 做质控去宿主，MEGAHIT 组装，MetaBAT2、MaxBin2 与 CONCOCT 三个分箱算法分别分箱，再用 metaWRAP 提纯，dRep 按 95% ANI 去冗余得到参考基因组集，EMBOSS getorf 预测 sORF 并做序列级去冗余，Attention / LSTM / BERT 三模型一致阳性才纳入候选，CoverM 定量并做 CLR 变换，用 Kruskal-Wallis 与 Mann-Whitney U 做组间检验，再用宏蛋白组表达证据二次去重。前九步已经在中期前完成，最后三步正在推进——机制关联分析、抑菌实验验证与结果整理。</a:t>
             </a:r>
           </a:p>
         </p:txBody>
@@ -5667,7 +5667,7 @@
                 <a:ea typeface="微软雅黑"/>
                 <a:cs typeface="Arial"/>
               </a:rPr>
-              <a:t>宏蛋白组表达证据二次去重后，得到健康人与各阶段特有抗菌肽</a:t>
+              <a:t>宏蛋白组表达证据二次去重后，得到 AD 特异性特有抗菌肽</a:t>
             </a:r>
           </a:p>
         </p:txBody>
@@ -5782,7 +5782,7 @@
                 <a:ea typeface="微软雅黑"/>
                 <a:cs typeface="Arial"/>
               </a:rPr>
-              <a:t>序列层面去冗余解决重复；宏蛋白组表达证据解决“有预测、无表达”的假阳性。二次去重后按组内共有、组间特比较，得到健康人群特有与各疾病阶段特有的抗菌肽清单。</a:t>
+              <a:t>序列层面去冗余解决重复；宏蛋白组表达证据解决“有预测、无表达”的假阳性。二次去重后按组内共有、组间特比较，得到 AD 组特有（AD 特异性）的抗菌肽清单，并保留其随认知阶段的变化。</a:t>
             </a:r>
           </a:p>
         </p:txBody>
@@ -5941,7 +5941,7 @@
                 <a:ea typeface="微软雅黑"/>
                 <a:cs typeface="Arial"/>
               </a:rPr>
-              <a:t>机制关联从 Aβ、AChE 与炎症通路三个方向展开</a:t>
+              <a:t>AD 特有肽与 AD 的关联：Aβ、AChE 与炎症通路</a:t>
             </a:r>
           </a:p>
         </p:txBody>
@@ -6080,7 +6080,7 @@
                 <a:ea typeface="微软雅黑"/>
                 <a:cs typeface="Arial"/>
               </a:rPr>
-              <a:t>借鉴乙酰胆碱酯酶—β-淀粉样肽复合物分子模拟研究的思路，按致病方向考察：候选肽是否促进 Aβ 成核与聚集、是否经 AChE 外周阴离子位点推动成核、是否经免疫与炎症通路放大神经炎症；输出优先序，定位为线索发现。</a:t>
+              <a:t>借鉴乙酰胆碱酯酶—β-淀粉样肽复合物分子模拟研究的思路，按致病方向考察 AD 特异性特有肽：是否促进 Aβ 成核与聚集、是否经 AChE 外周阴离子位点推动成核、是否经免疫与炎症通路放大神经炎症；结论定位为线索发现。</a:t>
             </a:r>
           </a:p>
         </p:txBody>
@@ -8439,7 +8439,7 @@
                 <a:ea typeface="微软雅黑"/>
                 <a:cs typeface="Arial"/>
               </a:rPr>
-              <a:t>机制关联分析：完成特有抗菌肽与 Aβ 聚集、AChE 结合及炎症通路的关联分析，形成候选肽清单。</a:t>
+              <a:t>机制关联分析：完成 AD 特异性特有抗菌肽与 Aβ 聚集、AChE 结合及炎症通路的关联分析。</a:t>
             </a:r>
           </a:p>
           <a:p>
@@ -8487,7 +8487,7 @@
                 <a:ea typeface="微软雅黑"/>
                 <a:cs typeface="Arial"/>
               </a:rPr>
-              <a:t>结果整理与论文撰写：汇总候选抗菌肽、特有肽与验证结果，完成学位论文与投稿论文准备。</a:t>
+              <a:t>结果整理与论文撰写：汇总 AD 特有肽、机制关联与验证结果，完成学位论文与投稿论文准备。</a:t>
             </a:r>
           </a:p>
         </p:txBody>
@@ -8737,7 +8737,7 @@
                 <a:ea typeface="微软雅黑"/>
                 <a:cs typeface="Arial"/>
               </a:rPr>
-              <a:t>预期成果：一套可复用的分析流程、健康人与各阶段特有的候选抗菌肽清单、机制关联与抑菌活性结果，以及以第一作者投稿的 SCI 论文与学位论文。</a:t>
+              <a:t>预期成果：一套可复用的分析流程、AD 特异性特有的候选抗菌肽清单、AD 特有肽与 AD 关联的分析结果、以及以第一作者投稿的 SCI 论文与学位论文。</a:t>
             </a:r>
           </a:p>
           <a:p>
@@ -9009,8 +9009,8 @@
         </p:blipFill>
         <p:spPr>
           <a:xfrm>
-            <a:off x="1697813" y="1188720"/>
-            <a:ext cx="8793325" cy="3767328"/>
+            <a:off x="1606668" y="1188720"/>
+            <a:ext cx="8975615" cy="3767328"/>
           </a:xfrm>
           <a:prstGeom prst="rect">
             <a:avLst/>
@@ -9059,7 +9059,7 @@
                 <a:ea typeface="微软雅黑"/>
                 <a:cs typeface="Arial"/>
               </a:rPr>
-              <a:t>① AD 与感染相关、② 炎症驱动抗菌肽与 Aβ 生成、③ Aβ 本身即抗菌肽；④ 抗菌活性可计算预测、⑤ 特异抗菌肽随阶段变化、⑥ 致病方向：促进 Aβ 聚集；⑦ 为什么 AD 更多与机制落点是本课题要回答的部分。</a:t>
+              <a:t>① AD 与感染相关、② 炎症驱动抗菌肽与 Aβ 生成、③ Aβ 本身即抗菌肽；④ 抗菌活性可计算预测、⑤ AD 特异性特有肽随阶段变化、⑥ 致病方向：促进 Aβ 聚集；⑦ 为什么 AD 更多与 AD 特有肽与 AD 的关联是本课题要回答的部分。</a:t>
             </a:r>
           </a:p>
         </p:txBody>
@@ -10462,7 +10462,7 @@
                 <a:ea typeface="微软雅黑"/>
                 <a:cs typeface="Arial"/>
               </a:rPr>
-              <a:t>分子机制（一）：动力学如何验证候选肽的致病方向</a:t>
+              <a:t>分子机制（一）：动力学如何检验 AD 特有肽与 AD 的关联</a:t>
             </a:r>
           </a:p>
         </p:txBody>
@@ -10577,7 +10577,7 @@
                 <a:ea typeface="微软雅黑"/>
                 <a:cs typeface="Arial"/>
               </a:rPr>
-              <a:t>PAS 是 Aβ 的成核界面：1 μs 模拟中复合物稳定，Aβ 主要停留于 344—361 区段 [31]；本课题据此检验候选肽在这一界面是促进成核与聚集，还是把产物推向更毒的寡聚体。</a:t>
+              <a:t>PAS 是 Aβ 的成核界面：1 μs 模拟中复合物稳定，Aβ 主要停留于 344—361 区段 [31]；本课题据此检验 AD 特异性特有肽在这一界面是促进成核与聚集，还是把产物推向更毒的寡聚体。</a:t>
             </a:r>
           </a:p>
         </p:txBody>
@@ -10851,7 +10851,7 @@
                 <a:ea typeface="微软雅黑"/>
                 <a:cs typeface="Arial"/>
               </a:rPr>
-              <a:t>抗菌肽与 Aβ 结构兼容，可交叉成核 [36][37]；微生物来源的 FapC 与 CsgA 是先例：种子加速 Aβ 纤维化并在动物模型中加重病理 [47][48]；本课题按致病方向检验候选肽。</a:t>
+              <a:t>抗菌肽与 Aβ 结构兼容，可交叉成核 [36][37]；微生物来源的 FapC 与 CsgA 是先例：种子加速 Aβ 纤维化并在动物模型中加重病理 [47][48]；本课题按致病方向检验 AD 特有肽。</a:t>
             </a:r>
           </a:p>
         </p:txBody>
@@ -11677,7 +11677,7 @@
                           <a:ea typeface="微软雅黑"/>
                           <a:cs typeface="Arial"/>
                         </a:rPr>
-                        <a:t>④ AD 组特有肽</a:t>
+                        <a:t>④ AD 特异性特有肽</a:t>
                       </a:r>
                     </a:p>
                   </a:txBody>
@@ -11712,7 +11712,7 @@
                           <a:ea typeface="微软雅黑"/>
                           <a:cs typeface="Arial"/>
                         </a:rPr>
-                        <a:t>菌群随认知阶段梯度变化，阶段特有肽有依据</a:t>
+                        <a:t>AD 组特异的菌种与功能特征有据；特有肽判定需表达证据</a:t>
                       </a:r>
                     </a:p>
                   </a:txBody>
@@ -11782,7 +11782,7 @@
                           <a:ea typeface="微软雅黑"/>
                           <a:cs typeface="Arial"/>
                         </a:rPr>
-                        <a:t>[26][28][30]</a:t>
+                        <a:t>[26][28][30][59]</a:t>
                       </a:r>
                     </a:p>
                   </a:txBody>
@@ -14338,7 +14338,7 @@
                 <a:ea typeface="微软雅黑"/>
                 <a:cs typeface="Arial"/>
               </a:rPr>
-              <a:t>确认事实：数据资源、短肽库、三模型共识预测、分阶段差异分析与特有抗菌肽筛选均已完成。</a:t>
+              <a:t>确认事实：数据资源、短肽库、三模型共识预测、分阶段差异分析与 AD 特异性特有抗菌肽筛选均已完成。</a:t>
             </a:r>
           </a:p>
           <a:p>
@@ -14775,7 +14775,7 @@
                 <a:ea typeface="微软雅黑"/>
                 <a:cs typeface="Arial"/>
               </a:rPr>
-              <a:t>统计与表达层：按认知阶段比较差异，并以宏蛋白组表达证据二次去重，筛选健康人群特有与各阶段特有抗菌肽。</a:t>
+              <a:t>统计与表达层：按认知阶段比较差异，再以宏蛋白组表达证据二次去重，筛出 AD 特异性特有抗菌肽。</a:t>
             </a:r>
           </a:p>
           <a:p>
@@ -14799,7 +14799,7 @@
                 <a:ea typeface="微软雅黑"/>
                 <a:cs typeface="Arial"/>
               </a:rPr>
-              <a:t>功能层：对特有抗菌肽开展发病机制关联分析与抑菌实验验证。</a:t>
+              <a:t>功能层：考察这些 AD 特有肽与 AD 的关联，并做抑菌实验验证。</a:t>
             </a:r>
           </a:p>
         </p:txBody>
@@ -16394,8 +16394,8 @@
                 <a:cs typeface="Arial"/>
               </a:rPr>
               <a:t>MEGAHIT 组装
-MetaBAT2 分箱
-CONCOCT 分箱</a:t>
+MetaBAT2 · MaxBin2
+· CONCOCT 分箱</a:t>
             </a:r>
           </a:p>
         </p:txBody>
@@ -17694,7 +17694,7 @@
                 <a:ea typeface="微软雅黑"/>
                 <a:cs typeface="Arial"/>
               </a:rPr>
-              <a:t>特有抗菌肽</a:t>
+              <a:t>AD 特有抗菌肽</a:t>
             </a:r>
           </a:p>
           <a:p>
@@ -17718,8 +17718,8 @@
                 <a:ea typeface="微软雅黑"/>
                 <a:cs typeface="Arial"/>
               </a:rPr>
-              <a:t>健康人群特有肽
-各阶段特有肽</a:t>
+              <a:t>AD 组特有（特异性）
+各阶段 AD 特有肽</a:t>
             </a:r>
           </a:p>
         </p:txBody>
@@ -17883,7 +17883,7 @@
                 <a:ea typeface="微软雅黑"/>
                 <a:cs typeface="Arial"/>
               </a:rPr>
-              <a:t>机制关联分析</a:t>
+              <a:t>AD 特有肽与 AD 关联</a:t>
             </a:r>
           </a:p>
           <a:p>
@@ -17908,7 +17908,7 @@
                 <a:cs typeface="Arial"/>
               </a:rPr>
               <a:t>分子对接 + 动力学
-给出候选优先序</a:t>
+文献比对与机制判定</a:t>
             </a:r>
           </a:p>
         </p:txBody>
